--- a/lectures/Week05_ChainingFinalOverload_Generics/3_CollectionsComparator_V4.pptx
+++ b/lectures/Week05_ChainingFinalOverload_Generics/3_CollectionsComparator_V4.pptx
@@ -6,10 +6,10 @@
     <p:sldMasterId id="2147483674" r:id="rId2"/>
   </p:sldMasterIdLst>
   <p:notesMasterIdLst>
-    <p:notesMasterId r:id="rId53"/>
+    <p:notesMasterId r:id="rId54"/>
   </p:notesMasterIdLst>
   <p:handoutMasterIdLst>
-    <p:handoutMasterId r:id="rId54"/>
+    <p:handoutMasterId r:id="rId55"/>
   </p:handoutMasterIdLst>
   <p:sldIdLst>
     <p:sldId id="333" r:id="rId3"/>
@@ -62,6 +62,7 @@
     <p:sldId id="383" r:id="rId50"/>
     <p:sldId id="384" r:id="rId51"/>
     <p:sldId id="394" r:id="rId52"/>
+    <p:sldId id="509" r:id="rId53"/>
   </p:sldIdLst>
   <p:sldSz cx="12192000" cy="6858000"/>
   <p:notesSz cx="7010400" cy="9296400"/>
@@ -250,7 +251,7 @@
           <a:p>
             <a:fld id="{8E938536-29D3-49BD-A567-41CAF057586A}" type="datetimeFigureOut">
               <a:rPr lang="en-US" smtClean="0"/>
-              <a:t>8/21/2026</a:t>
+              <a:t>9/22/2026</a:t>
             </a:fld>
             <a:endParaRPr lang="en-US"/>
           </a:p>
@@ -415,7 +416,7 @@
           <a:p>
             <a:fld id="{71559A16-B3AD-4CE2-9A5E-FAAD3C2C27CA}" type="datetimeFigureOut">
               <a:rPr lang="en-US" smtClean="0"/>
-              <a:t>8/21/2026</a:t>
+              <a:t>9/22/2026</a:t>
             </a:fld>
             <a:endParaRPr lang="en-US"/>
           </a:p>
@@ -2097,7 +2098,7 @@
               <a:pPr>
                 <a:defRPr/>
               </a:pPr>
-              <a:t>8/21/2026</a:t>
+              <a:t>9/22/2026</a:t>
             </a:fld>
             <a:endParaRPr lang="en-US"/>
           </a:p>
@@ -2518,7 +2519,7 @@
                 <a:tabLst/>
                 <a:defRPr/>
               </a:pPr>
-              <a:t>8/21/2026</a:t>
+              <a:t>9/22/2026</a:t>
             </a:fld>
             <a:endParaRPr kumimoji="0" lang="en-US" sz="1800" b="0" i="0" u="none" strike="noStrike" kern="1200" cap="none" spc="0" normalizeH="0" baseline="0" noProof="0">
               <a:ln>
@@ -28708,6 +28709,70 @@
     <p:extLst>
       <p:ext uri="{BB962C8B-B14F-4D97-AF65-F5344CB8AC3E}">
         <p14:creationId xmlns:p14="http://schemas.microsoft.com/office/powerpoint/2010/main" val="596222078"/>
+      </p:ext>
+    </p:extLst>
+  </p:cSld>
+  <p:clrMapOvr>
+    <a:masterClrMapping/>
+  </p:clrMapOvr>
+</p:sld>
+</file>
+
+<file path=ppt/slides/slide51.xml><?xml version="1.0" encoding="utf-8"?>
+<p:sld xmlns:a="http://schemas.openxmlformats.org/drawingml/2006/main" xmlns:r="http://schemas.openxmlformats.org/officeDocument/2006/relationships" xmlns:p="http://schemas.openxmlformats.org/presentationml/2006/main">
+  <p:cSld>
+    <p:spTree>
+      <p:nvGrpSpPr>
+        <p:cNvPr id="1" name="">
+          <a:extLst>
+            <a:ext uri="{FF2B5EF4-FFF2-40B4-BE49-F238E27FC236}">
+              <a16:creationId xmlns:a16="http://schemas.microsoft.com/office/drawing/2014/main" id="{84DA25F2-3AE0-BDCF-0880-EDD5EEF55E54}"/>
+            </a:ext>
+          </a:extLst>
+        </p:cNvPr>
+        <p:cNvGrpSpPr/>
+        <p:nvPr/>
+      </p:nvGrpSpPr>
+      <p:grpSpPr>
+        <a:xfrm>
+          <a:off x="0" y="0"/>
+          <a:ext cx="0" cy="0"/>
+          <a:chOff x="0" y="0"/>
+          <a:chExt cx="0" cy="0"/>
+        </a:xfrm>
+      </p:grpSpPr>
+      <p:sp>
+        <p:nvSpPr>
+          <p:cNvPr id="2" name="Title 1">
+            <a:extLst>
+              <a:ext uri="{FF2B5EF4-FFF2-40B4-BE49-F238E27FC236}">
+                <a16:creationId xmlns:a16="http://schemas.microsoft.com/office/drawing/2014/main" id="{6EAE57A2-3A61-C5F8-EEFD-EA2961784338}"/>
+              </a:ext>
+            </a:extLst>
+          </p:cNvPr>
+          <p:cNvSpPr>
+            <a:spLocks noGrp="1"/>
+          </p:cNvSpPr>
+          <p:nvPr>
+            <p:ph type="ctrTitle"/>
+          </p:nvPr>
+        </p:nvSpPr>
+        <p:spPr/>
+        <p:txBody>
+          <a:bodyPr/>
+          <a:lstStyle/>
+          <a:p>
+            <a:r>
+              <a:rPr lang="en-US" dirty="0"/>
+              <a:t>… to here …</a:t>
+            </a:r>
+          </a:p>
+        </p:txBody>
+      </p:sp>
+    </p:spTree>
+    <p:extLst>
+      <p:ext uri="{BB962C8B-B14F-4D97-AF65-F5344CB8AC3E}">
+        <p14:creationId xmlns:p14="http://schemas.microsoft.com/office/powerpoint/2010/main" val="2815624037"/>
       </p:ext>
     </p:extLst>
   </p:cSld>

--- a/lectures/Week05_ChainingFinalOverload_Generics/3_CollectionsComparator_V4.pptx
+++ b/lectures/Week05_ChainingFinalOverload_Generics/3_CollectionsComparator_V4.pptx
@@ -251,7 +251,7 @@
           <a:p>
             <a:fld id="{8E938536-29D3-49BD-A567-41CAF057586A}" type="datetimeFigureOut">
               <a:rPr lang="en-US" smtClean="0"/>
-              <a:t>9/22/2026</a:t>
+              <a:t>9/23/2026</a:t>
             </a:fld>
             <a:endParaRPr lang="en-US"/>
           </a:p>
@@ -416,7 +416,7 @@
           <a:p>
             <a:fld id="{71559A16-B3AD-4CE2-9A5E-FAAD3C2C27CA}" type="datetimeFigureOut">
               <a:rPr lang="en-US" smtClean="0"/>
-              <a:t>9/22/2026</a:t>
+              <a:t>9/23/2026</a:t>
             </a:fld>
             <a:endParaRPr lang="en-US"/>
           </a:p>
@@ -2098,7 +2098,7 @@
               <a:pPr>
                 <a:defRPr/>
               </a:pPr>
-              <a:t>9/22/2026</a:t>
+              <a:t>9/23/2026</a:t>
             </a:fld>
             <a:endParaRPr lang="en-US"/>
           </a:p>
@@ -2519,7 +2519,7 @@
                 <a:tabLst/>
                 <a:defRPr/>
               </a:pPr>
-              <a:t>9/22/2026</a:t>
+              <a:t>9/23/2026</a:t>
             </a:fld>
             <a:endParaRPr kumimoji="0" lang="en-US" sz="1800" b="0" i="0" u="none" strike="noStrike" kern="1200" cap="none" spc="0" normalizeH="0" baseline="0" noProof="0">
               <a:ln>
@@ -6175,9 +6175,10 @@
           <a:lstStyle/>
           <a:p>
             <a:r>
-              <a:rPr lang="en-US" dirty="0"/>
-              <a:t>COEN160</a:t>
-            </a:r>
+              <a:rPr lang="en-US"/>
+              <a:t>CSEN160</a:t>
+            </a:r>
+            <a:endParaRPr lang="en-US" dirty="0"/>
           </a:p>
         </p:txBody>
       </p:sp>

--- a/lectures/Week05_ChainingFinalOverload_Generics/3_CollectionsComparator_V4.pptx
+++ b/lectures/Week05_ChainingFinalOverload_Generics/3_CollectionsComparator_V4.pptx
@@ -30,39 +30,39 @@
     <p:sldId id="483" r:id="rId18"/>
     <p:sldId id="482" r:id="rId19"/>
     <p:sldId id="364" r:id="rId20"/>
-    <p:sldId id="468" r:id="rId21"/>
-    <p:sldId id="344" r:id="rId22"/>
-    <p:sldId id="465" r:id="rId23"/>
-    <p:sldId id="466" r:id="rId24"/>
-    <p:sldId id="469" r:id="rId25"/>
-    <p:sldId id="467" r:id="rId26"/>
-    <p:sldId id="470" r:id="rId27"/>
-    <p:sldId id="457" r:id="rId28"/>
-    <p:sldId id="428" r:id="rId29"/>
-    <p:sldId id="429" r:id="rId30"/>
-    <p:sldId id="430" r:id="rId31"/>
-    <p:sldId id="455" r:id="rId32"/>
-    <p:sldId id="431" r:id="rId33"/>
-    <p:sldId id="480" r:id="rId34"/>
-    <p:sldId id="458" r:id="rId35"/>
-    <p:sldId id="432" r:id="rId36"/>
-    <p:sldId id="475" r:id="rId37"/>
-    <p:sldId id="476" r:id="rId38"/>
-    <p:sldId id="459" r:id="rId39"/>
-    <p:sldId id="433" r:id="rId40"/>
-    <p:sldId id="460" r:id="rId41"/>
-    <p:sldId id="461" r:id="rId42"/>
-    <p:sldId id="435" r:id="rId43"/>
-    <p:sldId id="436" r:id="rId44"/>
-    <p:sldId id="462" r:id="rId45"/>
-    <p:sldId id="463" r:id="rId46"/>
-    <p:sldId id="478" r:id="rId47"/>
-    <p:sldId id="345" r:id="rId48"/>
-    <p:sldId id="365" r:id="rId49"/>
-    <p:sldId id="383" r:id="rId50"/>
-    <p:sldId id="384" r:id="rId51"/>
-    <p:sldId id="394" r:id="rId52"/>
-    <p:sldId id="509" r:id="rId53"/>
+    <p:sldId id="509" r:id="rId21"/>
+    <p:sldId id="468" r:id="rId22"/>
+    <p:sldId id="344" r:id="rId23"/>
+    <p:sldId id="465" r:id="rId24"/>
+    <p:sldId id="466" r:id="rId25"/>
+    <p:sldId id="469" r:id="rId26"/>
+    <p:sldId id="467" r:id="rId27"/>
+    <p:sldId id="470" r:id="rId28"/>
+    <p:sldId id="457" r:id="rId29"/>
+    <p:sldId id="428" r:id="rId30"/>
+    <p:sldId id="429" r:id="rId31"/>
+    <p:sldId id="430" r:id="rId32"/>
+    <p:sldId id="455" r:id="rId33"/>
+    <p:sldId id="431" r:id="rId34"/>
+    <p:sldId id="480" r:id="rId35"/>
+    <p:sldId id="458" r:id="rId36"/>
+    <p:sldId id="432" r:id="rId37"/>
+    <p:sldId id="475" r:id="rId38"/>
+    <p:sldId id="476" r:id="rId39"/>
+    <p:sldId id="459" r:id="rId40"/>
+    <p:sldId id="433" r:id="rId41"/>
+    <p:sldId id="460" r:id="rId42"/>
+    <p:sldId id="461" r:id="rId43"/>
+    <p:sldId id="435" r:id="rId44"/>
+    <p:sldId id="436" r:id="rId45"/>
+    <p:sldId id="462" r:id="rId46"/>
+    <p:sldId id="463" r:id="rId47"/>
+    <p:sldId id="478" r:id="rId48"/>
+    <p:sldId id="345" r:id="rId49"/>
+    <p:sldId id="365" r:id="rId50"/>
+    <p:sldId id="383" r:id="rId51"/>
+    <p:sldId id="384" r:id="rId52"/>
+    <p:sldId id="394" r:id="rId53"/>
   </p:sldIdLst>
   <p:sldSz cx="12192000" cy="6858000"/>
   <p:notesSz cx="7010400" cy="9296400"/>
@@ -251,7 +251,7 @@
           <a:p>
             <a:fld id="{8E938536-29D3-49BD-A567-41CAF057586A}" type="datetimeFigureOut">
               <a:rPr lang="en-US" smtClean="0"/>
-              <a:t>9/23/2026</a:t>
+              <a:t>10/21/2026</a:t>
             </a:fld>
             <a:endParaRPr lang="en-US"/>
           </a:p>
@@ -416,7 +416,7 @@
           <a:p>
             <a:fld id="{71559A16-B3AD-4CE2-9A5E-FAAD3C2C27CA}" type="datetimeFigureOut">
               <a:rPr lang="en-US" smtClean="0"/>
-              <a:t>9/23/2026</a:t>
+              <a:t>10/21/2026</a:t>
             </a:fld>
             <a:endParaRPr lang="en-US"/>
           </a:p>
@@ -2098,7 +2098,7 @@
               <a:pPr>
                 <a:defRPr/>
               </a:pPr>
-              <a:t>9/23/2026</a:t>
+              <a:t>10/21/2026</a:t>
             </a:fld>
             <a:endParaRPr lang="en-US"/>
           </a:p>
@@ -2519,7 +2519,7 @@
                 <a:tabLst/>
                 <a:defRPr/>
               </a:pPr>
-              <a:t>9/23/2026</a:t>
+              <a:t>10/21/2026</a:t>
             </a:fld>
             <a:endParaRPr kumimoji="0" lang="en-US" sz="1800" b="0" i="0" u="none" strike="noStrike" kern="1200" cap="none" spc="0" normalizeH="0" baseline="0" noProof="0">
               <a:ln>
@@ -9801,7 +9801,13 @@
   <p:cSld>
     <p:spTree>
       <p:nvGrpSpPr>
-        <p:cNvPr id="1" name=""/>
+        <p:cNvPr id="1" name="">
+          <a:extLst>
+            <a:ext uri="{FF2B5EF4-FFF2-40B4-BE49-F238E27FC236}">
+              <a16:creationId xmlns:a16="http://schemas.microsoft.com/office/drawing/2014/main" id="{84DA25F2-3AE0-BDCF-0880-EDD5EEF55E54}"/>
+            </a:ext>
+          </a:extLst>
+        </p:cNvPr>
         <p:cNvGrpSpPr/>
         <p:nvPr/>
       </p:nvGrpSpPr>
@@ -9815,12 +9821,18 @@
       </p:grpSpPr>
       <p:sp>
         <p:nvSpPr>
-          <p:cNvPr id="4098" name="Title 1"/>
+          <p:cNvPr id="2" name="Title 1">
+            <a:extLst>
+              <a:ext uri="{FF2B5EF4-FFF2-40B4-BE49-F238E27FC236}">
+                <a16:creationId xmlns:a16="http://schemas.microsoft.com/office/drawing/2014/main" id="{6EAE57A2-3A61-C5F8-EEFD-EA2961784338}"/>
+              </a:ext>
+            </a:extLst>
+          </p:cNvPr>
           <p:cNvSpPr>
             <a:spLocks noGrp="1"/>
           </p:cNvSpPr>
           <p:nvPr>
-            <p:ph type="title"/>
+            <p:ph type="ctrTitle"/>
           </p:nvPr>
         </p:nvSpPr>
         <p:spPr/>
@@ -9828,10 +9840,9 @@
           <a:bodyPr/>
           <a:lstStyle/>
           <a:p>
-            <a:pPr eaLnBrk="1" hangingPunct="1"/>
-            <a:r>
-              <a:rPr lang="en-US" altLang="en-US" dirty="0"/>
-              <a:t>Iterators</a:t>
+            <a:r>
+              <a:rPr lang="en-US" dirty="0"/>
+              <a:t>… to here …</a:t>
             </a:r>
           </a:p>
         </p:txBody>
@@ -9839,7 +9850,7 @@
     </p:spTree>
     <p:extLst>
       <p:ext uri="{BB962C8B-B14F-4D97-AF65-F5344CB8AC3E}">
-        <p14:creationId xmlns:p14="http://schemas.microsoft.com/office/powerpoint/2010/main" val="2358247247"/>
+        <p14:creationId xmlns:p14="http://schemas.microsoft.com/office/powerpoint/2010/main" val="2815624037"/>
       </p:ext>
     </p:extLst>
   </p:cSld>
@@ -9907,6 +9918,59 @@
   <p:cSld>
     <p:spTree>
       <p:nvGrpSpPr>
+        <p:cNvPr id="1" name=""/>
+        <p:cNvGrpSpPr/>
+        <p:nvPr/>
+      </p:nvGrpSpPr>
+      <p:grpSpPr>
+        <a:xfrm>
+          <a:off x="0" y="0"/>
+          <a:ext cx="0" cy="0"/>
+          <a:chOff x="0" y="0"/>
+          <a:chExt cx="0" cy="0"/>
+        </a:xfrm>
+      </p:grpSpPr>
+      <p:sp>
+        <p:nvSpPr>
+          <p:cNvPr id="4098" name="Title 1"/>
+          <p:cNvSpPr>
+            <a:spLocks noGrp="1"/>
+          </p:cNvSpPr>
+          <p:nvPr>
+            <p:ph type="title"/>
+          </p:nvPr>
+        </p:nvSpPr>
+        <p:spPr/>
+        <p:txBody>
+          <a:bodyPr/>
+          <a:lstStyle/>
+          <a:p>
+            <a:pPr eaLnBrk="1" hangingPunct="1"/>
+            <a:r>
+              <a:rPr lang="en-US" altLang="en-US" dirty="0"/>
+              <a:t>Iterators</a:t>
+            </a:r>
+          </a:p>
+        </p:txBody>
+      </p:sp>
+    </p:spTree>
+    <p:extLst>
+      <p:ext uri="{BB962C8B-B14F-4D97-AF65-F5344CB8AC3E}">
+        <p14:creationId xmlns:p14="http://schemas.microsoft.com/office/powerpoint/2010/main" val="2358247247"/>
+      </p:ext>
+    </p:extLst>
+  </p:cSld>
+  <p:clrMapOvr>
+    <a:masterClrMapping/>
+  </p:clrMapOvr>
+</p:sld>
+</file>
+
+<file path=ppt/slides/slide21.xml><?xml version="1.0" encoding="utf-8"?>
+<p:sld xmlns:a="http://schemas.openxmlformats.org/drawingml/2006/main" xmlns:r="http://schemas.openxmlformats.org/officeDocument/2006/relationships" xmlns:p="http://schemas.openxmlformats.org/presentationml/2006/main">
+  <p:cSld>
+    <p:spTree>
+      <p:nvGrpSpPr>
         <p:cNvPr id="1" name="">
           <a:extLst>
             <a:ext uri="{FF2B5EF4-FFF2-40B4-BE49-F238E27FC236}">
@@ -10215,430 +10279,6 @@
     <p:extLst>
       <p:ext uri="{BB962C8B-B14F-4D97-AF65-F5344CB8AC3E}">
         <p14:creationId xmlns:p14="http://schemas.microsoft.com/office/powerpoint/2010/main" val="177715063"/>
-      </p:ext>
-    </p:extLst>
-  </p:cSld>
-  <p:clrMapOvr>
-    <a:masterClrMapping/>
-  </p:clrMapOvr>
-</p:sld>
-</file>
-
-<file path=ppt/slides/slide21.xml><?xml version="1.0" encoding="utf-8"?>
-<p:sld xmlns:a="http://schemas.openxmlformats.org/drawingml/2006/main" xmlns:r="http://schemas.openxmlformats.org/officeDocument/2006/relationships" xmlns:p="http://schemas.openxmlformats.org/presentationml/2006/main">
-  <p:cSld>
-    <p:spTree>
-      <p:nvGrpSpPr>
-        <p:cNvPr id="1" name=""/>
-        <p:cNvGrpSpPr/>
-        <p:nvPr/>
-      </p:nvGrpSpPr>
-      <p:grpSpPr>
-        <a:xfrm>
-          <a:off x="0" y="0"/>
-          <a:ext cx="0" cy="0"/>
-          <a:chOff x="0" y="0"/>
-          <a:chExt cx="0" cy="0"/>
-        </a:xfrm>
-      </p:grpSpPr>
-      <p:sp>
-        <p:nvSpPr>
-          <p:cNvPr id="2" name="Title 1"/>
-          <p:cNvSpPr>
-            <a:spLocks noGrp="1"/>
-          </p:cNvSpPr>
-          <p:nvPr>
-            <p:ph type="title"/>
-          </p:nvPr>
-        </p:nvSpPr>
-        <p:spPr>
-          <a:xfrm>
-            <a:off x="933282" y="756605"/>
-            <a:ext cx="8229600" cy="663547"/>
-          </a:xfrm>
-        </p:spPr>
-        <p:txBody>
-          <a:bodyPr>
-            <a:normAutofit/>
-          </a:bodyPr>
-          <a:lstStyle/>
-          <a:p>
-            <a:r>
-              <a:rPr lang="en-US" dirty="0"/>
-              <a:t>The </a:t>
-            </a:r>
-            <a:r>
-              <a:rPr lang="en-US" dirty="0">
-                <a:latin typeface="Courier"/>
-                <a:cs typeface="Courier"/>
-              </a:rPr>
-              <a:t>Iterator</a:t>
-            </a:r>
-            <a:r>
-              <a:rPr lang="en-US" dirty="0"/>
-              <a:t> Interface </a:t>
-            </a:r>
-            <a:r>
-              <a:rPr lang="en-US" sz="2400" dirty="0"/>
-              <a:t>(Classic)</a:t>
-            </a:r>
-            <a:endParaRPr lang="en-US" dirty="0"/>
-          </a:p>
-        </p:txBody>
-      </p:sp>
-      <p:sp>
-        <p:nvSpPr>
-          <p:cNvPr id="3" name="Content Placeholder 2"/>
-          <p:cNvSpPr>
-            <a:spLocks noGrp="1"/>
-          </p:cNvSpPr>
-          <p:nvPr>
-            <p:ph idx="1"/>
-          </p:nvPr>
-        </p:nvSpPr>
-        <p:spPr>
-          <a:xfrm>
-            <a:off x="1981200" y="1143001"/>
-            <a:ext cx="8229600" cy="4525963"/>
-          </a:xfrm>
-        </p:spPr>
-        <p:txBody>
-          <a:bodyPr>
-            <a:normAutofit/>
-          </a:bodyPr>
-          <a:lstStyle/>
-          <a:p>
-            <a:pPr>
-              <a:buNone/>
-            </a:pPr>
-            <a:endParaRPr lang="en-US" dirty="0"/>
-          </a:p>
-          <a:p>
-            <a:pPr>
-              <a:buNone/>
-            </a:pPr>
-            <a:endParaRPr lang="en-US" dirty="0"/>
-          </a:p>
-          <a:p>
-            <a:pPr>
-              <a:buNone/>
-            </a:pPr>
-            <a:endParaRPr lang="en-US" dirty="0"/>
-          </a:p>
-        </p:txBody>
-      </p:sp>
-      <p:sp>
-        <p:nvSpPr>
-          <p:cNvPr id="4" name="Footer Placeholder 3"/>
-          <p:cNvSpPr>
-            <a:spLocks noGrp="1"/>
-          </p:cNvSpPr>
-          <p:nvPr>
-            <p:ph type="ftr" sz="quarter" idx="11"/>
-          </p:nvPr>
-        </p:nvSpPr>
-        <p:spPr/>
-        <p:txBody>
-          <a:bodyPr/>
-          <a:lstStyle/>
-          <a:p>
-            <a:pPr marL="0" marR="0" lvl="0" indent="0" algn="l" defTabSz="914400" rtl="0" eaLnBrk="1" fontAlgn="auto" latinLnBrk="0" hangingPunct="1">
-              <a:lnSpc>
-                <a:spcPct val="100000"/>
-              </a:lnSpc>
-              <a:spcBef>
-                <a:spcPts val="0"/>
-              </a:spcBef>
-              <a:spcAft>
-                <a:spcPts val="0"/>
-              </a:spcAft>
-              <a:buClrTx/>
-              <a:buSzTx/>
-              <a:buFontTx/>
-              <a:buNone/>
-              <a:tabLst/>
-              <a:defRPr/>
-            </a:pPr>
-            <a:r>
-              <a:rPr kumimoji="0" lang="en-US" sz="1800" b="0" i="0" u="none" strike="noStrike" kern="1200" cap="none" spc="0" normalizeH="0" baseline="0" noProof="0" dirty="0">
-                <a:ln>
-                  <a:noFill/>
-                </a:ln>
-                <a:solidFill>
-                  <a:srgbClr val="000000"/>
-                </a:solidFill>
-                <a:effectLst/>
-                <a:uLnTx/>
-                <a:uFillTx/>
-                <a:latin typeface="Arial" panose="020B0604020202020204"/>
-                <a:ea typeface="+mn-ea"/>
-                <a:cs typeface="+mn-cs"/>
-              </a:rPr>
-              <a:t> </a:t>
-            </a:r>
-          </a:p>
-        </p:txBody>
-      </p:sp>
-      <p:sp>
-        <p:nvSpPr>
-          <p:cNvPr id="5" name="Slide Number Placeholder 4"/>
-          <p:cNvSpPr>
-            <a:spLocks noGrp="1"/>
-          </p:cNvSpPr>
-          <p:nvPr>
-            <p:ph type="sldNum" sz="quarter" idx="12"/>
-          </p:nvPr>
-        </p:nvSpPr>
-        <p:spPr/>
-        <p:txBody>
-          <a:bodyPr/>
-          <a:lstStyle/>
-          <a:p>
-            <a:pPr marL="0" marR="0" lvl="0" indent="0" algn="l" defTabSz="914400" rtl="0" eaLnBrk="1" fontAlgn="auto" latinLnBrk="0" hangingPunct="1">
-              <a:lnSpc>
-                <a:spcPct val="100000"/>
-              </a:lnSpc>
-              <a:spcBef>
-                <a:spcPts val="0"/>
-              </a:spcBef>
-              <a:spcAft>
-                <a:spcPts val="0"/>
-              </a:spcAft>
-              <a:buClrTx/>
-              <a:buSzTx/>
-              <a:buFontTx/>
-              <a:buNone/>
-              <a:tabLst/>
-              <a:defRPr/>
-            </a:pPr>
-            <a:r>
-              <a:rPr kumimoji="0" lang="en-US" sz="1800" b="0" i="0" u="none" strike="noStrike" kern="1200" cap="none" spc="0" normalizeH="0" baseline="0" noProof="0" dirty="0">
-                <a:ln>
-                  <a:noFill/>
-                </a:ln>
-                <a:solidFill>
-                  <a:srgbClr val="000000"/>
-                </a:solidFill>
-                <a:effectLst/>
-                <a:uLnTx/>
-                <a:uFillTx/>
-                <a:latin typeface="Arial" panose="020B0604020202020204"/>
-                <a:ea typeface="+mn-ea"/>
-                <a:cs typeface="+mn-cs"/>
-              </a:rPr>
-              <a:t> </a:t>
-            </a:r>
-          </a:p>
-        </p:txBody>
-      </p:sp>
-      <p:pic>
-        <p:nvPicPr>
-          <p:cNvPr id="6" name="Picture 5"/>
-          <p:cNvPicPr>
-            <a:picLocks noChangeAspect="1"/>
-          </p:cNvPicPr>
-          <p:nvPr/>
-        </p:nvPicPr>
-        <p:blipFill>
-          <a:blip r:embed="rId2" cstate="print">
-            <a:extLst>
-              <a:ext uri="{28A0092B-C50C-407E-A947-70E740481C1C}">
-                <a14:useLocalDpi xmlns:a14="http://schemas.microsoft.com/office/drawing/2010/main" val="0"/>
-              </a:ext>
-            </a:extLst>
-          </a:blip>
-          <a:stretch>
-            <a:fillRect/>
-          </a:stretch>
-        </p:blipFill>
-        <p:spPr>
-          <a:xfrm>
-            <a:off x="4551769" y="2282629"/>
-            <a:ext cx="7158752" cy="2438400"/>
-          </a:xfrm>
-          <a:prstGeom prst="rect">
-            <a:avLst/>
-          </a:prstGeom>
-        </p:spPr>
-      </p:pic>
-      <p:pic>
-        <p:nvPicPr>
-          <p:cNvPr id="7" name="Picture 6"/>
-          <p:cNvPicPr>
-            <a:picLocks noChangeAspect="1"/>
-          </p:cNvPicPr>
-          <p:nvPr/>
-        </p:nvPicPr>
-        <p:blipFill>
-          <a:blip r:embed="rId3"/>
-          <a:stretch>
-            <a:fillRect/>
-          </a:stretch>
-        </p:blipFill>
-        <p:spPr>
-          <a:xfrm>
-            <a:off x="511194" y="2245433"/>
-            <a:ext cx="3682057" cy="2475596"/>
-          </a:xfrm>
-          <a:prstGeom prst="rect">
-            <a:avLst/>
-          </a:prstGeom>
-        </p:spPr>
-      </p:pic>
-      <p:sp>
-        <p:nvSpPr>
-          <p:cNvPr id="9" name="Rectangle 8"/>
-          <p:cNvSpPr/>
-          <p:nvPr/>
-        </p:nvSpPr>
-        <p:spPr>
-          <a:xfrm>
-            <a:off x="554301" y="3012829"/>
-            <a:ext cx="1666963" cy="369642"/>
-          </a:xfrm>
-          <a:prstGeom prst="rect">
-            <a:avLst/>
-          </a:prstGeom>
-          <a:noFill/>
-          <a:ln>
-            <a:solidFill>
-              <a:srgbClr val="92D050"/>
-            </a:solidFill>
-          </a:ln>
-        </p:spPr>
-        <p:style>
-          <a:lnRef idx="2">
-            <a:schemeClr val="accent1">
-              <a:shade val="50000"/>
-            </a:schemeClr>
-          </a:lnRef>
-          <a:fillRef idx="1">
-            <a:schemeClr val="accent1"/>
-          </a:fillRef>
-          <a:effectRef idx="0">
-            <a:schemeClr val="accent1"/>
-          </a:effectRef>
-          <a:fontRef idx="minor">
-            <a:schemeClr val="lt1"/>
-          </a:fontRef>
-        </p:style>
-        <p:txBody>
-          <a:bodyPr rtlCol="0" anchor="ctr"/>
-          <a:lstStyle/>
-          <a:p>
-            <a:pPr marL="0" marR="0" lvl="0" indent="0" algn="ctr" defTabSz="914400" rtl="0" eaLnBrk="1" fontAlgn="auto" latinLnBrk="0" hangingPunct="1">
-              <a:lnSpc>
-                <a:spcPct val="100000"/>
-              </a:lnSpc>
-              <a:spcBef>
-                <a:spcPts val="0"/>
-              </a:spcBef>
-              <a:spcAft>
-                <a:spcPts val="0"/>
-              </a:spcAft>
-              <a:buClrTx/>
-              <a:buSzTx/>
-              <a:buFontTx/>
-              <a:buNone/>
-              <a:tabLst/>
-              <a:defRPr/>
-            </a:pPr>
-            <a:endParaRPr kumimoji="0" lang="en-US" sz="1800" b="0" i="0" u="none" strike="noStrike" kern="1200" cap="none" spc="0" normalizeH="0" baseline="0" noProof="0">
-              <a:ln>
-                <a:noFill/>
-              </a:ln>
-              <a:solidFill>
-                <a:srgbClr val="FFFFFF"/>
-              </a:solidFill>
-              <a:effectLst/>
-              <a:uLnTx/>
-              <a:uFillTx/>
-              <a:latin typeface="Arial" panose="020B0604020202020204"/>
-              <a:ea typeface="+mn-ea"/>
-              <a:cs typeface="+mn-cs"/>
-            </a:endParaRPr>
-          </a:p>
-        </p:txBody>
-      </p:sp>
-      <p:sp>
-        <p:nvSpPr>
-          <p:cNvPr id="10" name="Rectangle 9"/>
-          <p:cNvSpPr/>
-          <p:nvPr/>
-        </p:nvSpPr>
-        <p:spPr>
-          <a:xfrm>
-            <a:off x="511194" y="3719534"/>
-            <a:ext cx="1507769" cy="213195"/>
-          </a:xfrm>
-          <a:prstGeom prst="rect">
-            <a:avLst/>
-          </a:prstGeom>
-          <a:noFill/>
-          <a:ln>
-            <a:solidFill>
-              <a:srgbClr val="92D050"/>
-            </a:solidFill>
-          </a:ln>
-        </p:spPr>
-        <p:style>
-          <a:lnRef idx="2">
-            <a:schemeClr val="accent1">
-              <a:shade val="50000"/>
-            </a:schemeClr>
-          </a:lnRef>
-          <a:fillRef idx="1">
-            <a:schemeClr val="accent1"/>
-          </a:fillRef>
-          <a:effectRef idx="0">
-            <a:schemeClr val="accent1"/>
-          </a:effectRef>
-          <a:fontRef idx="minor">
-            <a:schemeClr val="lt1"/>
-          </a:fontRef>
-        </p:style>
-        <p:txBody>
-          <a:bodyPr rtlCol="0" anchor="ctr"/>
-          <a:lstStyle/>
-          <a:p>
-            <a:pPr marL="0" marR="0" lvl="0" indent="0" algn="ctr" defTabSz="914400" rtl="0" eaLnBrk="1" fontAlgn="auto" latinLnBrk="0" hangingPunct="1">
-              <a:lnSpc>
-                <a:spcPct val="100000"/>
-              </a:lnSpc>
-              <a:spcBef>
-                <a:spcPts val="0"/>
-              </a:spcBef>
-              <a:spcAft>
-                <a:spcPts val="0"/>
-              </a:spcAft>
-              <a:buClrTx/>
-              <a:buSzTx/>
-              <a:buFontTx/>
-              <a:buNone/>
-              <a:tabLst/>
-              <a:defRPr/>
-            </a:pPr>
-            <a:endParaRPr kumimoji="0" lang="en-US" sz="1800" b="0" i="0" u="none" strike="noStrike" kern="1200" cap="none" spc="0" normalizeH="0" baseline="0" noProof="0">
-              <a:ln>
-                <a:noFill/>
-              </a:ln>
-              <a:solidFill>
-                <a:srgbClr val="FFFFFF"/>
-              </a:solidFill>
-              <a:effectLst/>
-              <a:uLnTx/>
-              <a:uFillTx/>
-              <a:latin typeface="Arial" panose="020B0604020202020204"/>
-              <a:ea typeface="+mn-ea"/>
-              <a:cs typeface="+mn-cs"/>
-            </a:endParaRPr>
-          </a:p>
-        </p:txBody>
-      </p:sp>
-    </p:spTree>
-    <p:extLst>
-      <p:ext uri="{BB962C8B-B14F-4D97-AF65-F5344CB8AC3E}">
-        <p14:creationId xmlns:p14="http://schemas.microsoft.com/office/powerpoint/2010/main" val="2296321405"/>
       </p:ext>
     </p:extLst>
   </p:cSld>
@@ -10677,6 +10317,430 @@
         </p:nvSpPr>
         <p:spPr>
           <a:xfrm>
+            <a:off x="933282" y="756605"/>
+            <a:ext cx="8229600" cy="663547"/>
+          </a:xfrm>
+        </p:spPr>
+        <p:txBody>
+          <a:bodyPr>
+            <a:normAutofit/>
+          </a:bodyPr>
+          <a:lstStyle/>
+          <a:p>
+            <a:r>
+              <a:rPr lang="en-US" dirty="0"/>
+              <a:t>The </a:t>
+            </a:r>
+            <a:r>
+              <a:rPr lang="en-US" dirty="0">
+                <a:latin typeface="Courier"/>
+                <a:cs typeface="Courier"/>
+              </a:rPr>
+              <a:t>Iterator</a:t>
+            </a:r>
+            <a:r>
+              <a:rPr lang="en-US" dirty="0"/>
+              <a:t> Interface </a:t>
+            </a:r>
+            <a:r>
+              <a:rPr lang="en-US" sz="2400" dirty="0"/>
+              <a:t>(Classic)</a:t>
+            </a:r>
+            <a:endParaRPr lang="en-US" dirty="0"/>
+          </a:p>
+        </p:txBody>
+      </p:sp>
+      <p:sp>
+        <p:nvSpPr>
+          <p:cNvPr id="3" name="Content Placeholder 2"/>
+          <p:cNvSpPr>
+            <a:spLocks noGrp="1"/>
+          </p:cNvSpPr>
+          <p:nvPr>
+            <p:ph idx="1"/>
+          </p:nvPr>
+        </p:nvSpPr>
+        <p:spPr>
+          <a:xfrm>
+            <a:off x="1981200" y="1143001"/>
+            <a:ext cx="8229600" cy="4525963"/>
+          </a:xfrm>
+        </p:spPr>
+        <p:txBody>
+          <a:bodyPr>
+            <a:normAutofit/>
+          </a:bodyPr>
+          <a:lstStyle/>
+          <a:p>
+            <a:pPr>
+              <a:buNone/>
+            </a:pPr>
+            <a:endParaRPr lang="en-US" dirty="0"/>
+          </a:p>
+          <a:p>
+            <a:pPr>
+              <a:buNone/>
+            </a:pPr>
+            <a:endParaRPr lang="en-US" dirty="0"/>
+          </a:p>
+          <a:p>
+            <a:pPr>
+              <a:buNone/>
+            </a:pPr>
+            <a:endParaRPr lang="en-US" dirty="0"/>
+          </a:p>
+        </p:txBody>
+      </p:sp>
+      <p:sp>
+        <p:nvSpPr>
+          <p:cNvPr id="4" name="Footer Placeholder 3"/>
+          <p:cNvSpPr>
+            <a:spLocks noGrp="1"/>
+          </p:cNvSpPr>
+          <p:nvPr>
+            <p:ph type="ftr" sz="quarter" idx="11"/>
+          </p:nvPr>
+        </p:nvSpPr>
+        <p:spPr/>
+        <p:txBody>
+          <a:bodyPr/>
+          <a:lstStyle/>
+          <a:p>
+            <a:pPr marL="0" marR="0" lvl="0" indent="0" algn="l" defTabSz="914400" rtl="0" eaLnBrk="1" fontAlgn="auto" latinLnBrk="0" hangingPunct="1">
+              <a:lnSpc>
+                <a:spcPct val="100000"/>
+              </a:lnSpc>
+              <a:spcBef>
+                <a:spcPts val="0"/>
+              </a:spcBef>
+              <a:spcAft>
+                <a:spcPts val="0"/>
+              </a:spcAft>
+              <a:buClrTx/>
+              <a:buSzTx/>
+              <a:buFontTx/>
+              <a:buNone/>
+              <a:tabLst/>
+              <a:defRPr/>
+            </a:pPr>
+            <a:r>
+              <a:rPr kumimoji="0" lang="en-US" sz="1800" b="0" i="0" u="none" strike="noStrike" kern="1200" cap="none" spc="0" normalizeH="0" baseline="0" noProof="0" dirty="0">
+                <a:ln>
+                  <a:noFill/>
+                </a:ln>
+                <a:solidFill>
+                  <a:srgbClr val="000000"/>
+                </a:solidFill>
+                <a:effectLst/>
+                <a:uLnTx/>
+                <a:uFillTx/>
+                <a:latin typeface="Arial" panose="020B0604020202020204"/>
+                <a:ea typeface="+mn-ea"/>
+                <a:cs typeface="+mn-cs"/>
+              </a:rPr>
+              <a:t> </a:t>
+            </a:r>
+          </a:p>
+        </p:txBody>
+      </p:sp>
+      <p:sp>
+        <p:nvSpPr>
+          <p:cNvPr id="5" name="Slide Number Placeholder 4"/>
+          <p:cNvSpPr>
+            <a:spLocks noGrp="1"/>
+          </p:cNvSpPr>
+          <p:nvPr>
+            <p:ph type="sldNum" sz="quarter" idx="12"/>
+          </p:nvPr>
+        </p:nvSpPr>
+        <p:spPr/>
+        <p:txBody>
+          <a:bodyPr/>
+          <a:lstStyle/>
+          <a:p>
+            <a:pPr marL="0" marR="0" lvl="0" indent="0" algn="l" defTabSz="914400" rtl="0" eaLnBrk="1" fontAlgn="auto" latinLnBrk="0" hangingPunct="1">
+              <a:lnSpc>
+                <a:spcPct val="100000"/>
+              </a:lnSpc>
+              <a:spcBef>
+                <a:spcPts val="0"/>
+              </a:spcBef>
+              <a:spcAft>
+                <a:spcPts val="0"/>
+              </a:spcAft>
+              <a:buClrTx/>
+              <a:buSzTx/>
+              <a:buFontTx/>
+              <a:buNone/>
+              <a:tabLst/>
+              <a:defRPr/>
+            </a:pPr>
+            <a:r>
+              <a:rPr kumimoji="0" lang="en-US" sz="1800" b="0" i="0" u="none" strike="noStrike" kern="1200" cap="none" spc="0" normalizeH="0" baseline="0" noProof="0" dirty="0">
+                <a:ln>
+                  <a:noFill/>
+                </a:ln>
+                <a:solidFill>
+                  <a:srgbClr val="000000"/>
+                </a:solidFill>
+                <a:effectLst/>
+                <a:uLnTx/>
+                <a:uFillTx/>
+                <a:latin typeface="Arial" panose="020B0604020202020204"/>
+                <a:ea typeface="+mn-ea"/>
+                <a:cs typeface="+mn-cs"/>
+              </a:rPr>
+              <a:t> </a:t>
+            </a:r>
+          </a:p>
+        </p:txBody>
+      </p:sp>
+      <p:pic>
+        <p:nvPicPr>
+          <p:cNvPr id="6" name="Picture 5"/>
+          <p:cNvPicPr>
+            <a:picLocks noChangeAspect="1"/>
+          </p:cNvPicPr>
+          <p:nvPr/>
+        </p:nvPicPr>
+        <p:blipFill>
+          <a:blip r:embed="rId2" cstate="print">
+            <a:extLst>
+              <a:ext uri="{28A0092B-C50C-407E-A947-70E740481C1C}">
+                <a14:useLocalDpi xmlns:a14="http://schemas.microsoft.com/office/drawing/2010/main" val="0"/>
+              </a:ext>
+            </a:extLst>
+          </a:blip>
+          <a:stretch>
+            <a:fillRect/>
+          </a:stretch>
+        </p:blipFill>
+        <p:spPr>
+          <a:xfrm>
+            <a:off x="4551769" y="2282629"/>
+            <a:ext cx="7158752" cy="2438400"/>
+          </a:xfrm>
+          <a:prstGeom prst="rect">
+            <a:avLst/>
+          </a:prstGeom>
+        </p:spPr>
+      </p:pic>
+      <p:pic>
+        <p:nvPicPr>
+          <p:cNvPr id="7" name="Picture 6"/>
+          <p:cNvPicPr>
+            <a:picLocks noChangeAspect="1"/>
+          </p:cNvPicPr>
+          <p:nvPr/>
+        </p:nvPicPr>
+        <p:blipFill>
+          <a:blip r:embed="rId3"/>
+          <a:stretch>
+            <a:fillRect/>
+          </a:stretch>
+        </p:blipFill>
+        <p:spPr>
+          <a:xfrm>
+            <a:off x="511194" y="2245433"/>
+            <a:ext cx="3682057" cy="2475596"/>
+          </a:xfrm>
+          <a:prstGeom prst="rect">
+            <a:avLst/>
+          </a:prstGeom>
+        </p:spPr>
+      </p:pic>
+      <p:sp>
+        <p:nvSpPr>
+          <p:cNvPr id="9" name="Rectangle 8"/>
+          <p:cNvSpPr/>
+          <p:nvPr/>
+        </p:nvSpPr>
+        <p:spPr>
+          <a:xfrm>
+            <a:off x="554301" y="3012829"/>
+            <a:ext cx="1666963" cy="369642"/>
+          </a:xfrm>
+          <a:prstGeom prst="rect">
+            <a:avLst/>
+          </a:prstGeom>
+          <a:noFill/>
+          <a:ln>
+            <a:solidFill>
+              <a:srgbClr val="92D050"/>
+            </a:solidFill>
+          </a:ln>
+        </p:spPr>
+        <p:style>
+          <a:lnRef idx="2">
+            <a:schemeClr val="accent1">
+              <a:shade val="50000"/>
+            </a:schemeClr>
+          </a:lnRef>
+          <a:fillRef idx="1">
+            <a:schemeClr val="accent1"/>
+          </a:fillRef>
+          <a:effectRef idx="0">
+            <a:schemeClr val="accent1"/>
+          </a:effectRef>
+          <a:fontRef idx="minor">
+            <a:schemeClr val="lt1"/>
+          </a:fontRef>
+        </p:style>
+        <p:txBody>
+          <a:bodyPr rtlCol="0" anchor="ctr"/>
+          <a:lstStyle/>
+          <a:p>
+            <a:pPr marL="0" marR="0" lvl="0" indent="0" algn="ctr" defTabSz="914400" rtl="0" eaLnBrk="1" fontAlgn="auto" latinLnBrk="0" hangingPunct="1">
+              <a:lnSpc>
+                <a:spcPct val="100000"/>
+              </a:lnSpc>
+              <a:spcBef>
+                <a:spcPts val="0"/>
+              </a:spcBef>
+              <a:spcAft>
+                <a:spcPts val="0"/>
+              </a:spcAft>
+              <a:buClrTx/>
+              <a:buSzTx/>
+              <a:buFontTx/>
+              <a:buNone/>
+              <a:tabLst/>
+              <a:defRPr/>
+            </a:pPr>
+            <a:endParaRPr kumimoji="0" lang="en-US" sz="1800" b="0" i="0" u="none" strike="noStrike" kern="1200" cap="none" spc="0" normalizeH="0" baseline="0" noProof="0">
+              <a:ln>
+                <a:noFill/>
+              </a:ln>
+              <a:solidFill>
+                <a:srgbClr val="FFFFFF"/>
+              </a:solidFill>
+              <a:effectLst/>
+              <a:uLnTx/>
+              <a:uFillTx/>
+              <a:latin typeface="Arial" panose="020B0604020202020204"/>
+              <a:ea typeface="+mn-ea"/>
+              <a:cs typeface="+mn-cs"/>
+            </a:endParaRPr>
+          </a:p>
+        </p:txBody>
+      </p:sp>
+      <p:sp>
+        <p:nvSpPr>
+          <p:cNvPr id="10" name="Rectangle 9"/>
+          <p:cNvSpPr/>
+          <p:nvPr/>
+        </p:nvSpPr>
+        <p:spPr>
+          <a:xfrm>
+            <a:off x="511194" y="3719534"/>
+            <a:ext cx="1507769" cy="213195"/>
+          </a:xfrm>
+          <a:prstGeom prst="rect">
+            <a:avLst/>
+          </a:prstGeom>
+          <a:noFill/>
+          <a:ln>
+            <a:solidFill>
+              <a:srgbClr val="92D050"/>
+            </a:solidFill>
+          </a:ln>
+        </p:spPr>
+        <p:style>
+          <a:lnRef idx="2">
+            <a:schemeClr val="accent1">
+              <a:shade val="50000"/>
+            </a:schemeClr>
+          </a:lnRef>
+          <a:fillRef idx="1">
+            <a:schemeClr val="accent1"/>
+          </a:fillRef>
+          <a:effectRef idx="0">
+            <a:schemeClr val="accent1"/>
+          </a:effectRef>
+          <a:fontRef idx="minor">
+            <a:schemeClr val="lt1"/>
+          </a:fontRef>
+        </p:style>
+        <p:txBody>
+          <a:bodyPr rtlCol="0" anchor="ctr"/>
+          <a:lstStyle/>
+          <a:p>
+            <a:pPr marL="0" marR="0" lvl="0" indent="0" algn="ctr" defTabSz="914400" rtl="0" eaLnBrk="1" fontAlgn="auto" latinLnBrk="0" hangingPunct="1">
+              <a:lnSpc>
+                <a:spcPct val="100000"/>
+              </a:lnSpc>
+              <a:spcBef>
+                <a:spcPts val="0"/>
+              </a:spcBef>
+              <a:spcAft>
+                <a:spcPts val="0"/>
+              </a:spcAft>
+              <a:buClrTx/>
+              <a:buSzTx/>
+              <a:buFontTx/>
+              <a:buNone/>
+              <a:tabLst/>
+              <a:defRPr/>
+            </a:pPr>
+            <a:endParaRPr kumimoji="0" lang="en-US" sz="1800" b="0" i="0" u="none" strike="noStrike" kern="1200" cap="none" spc="0" normalizeH="0" baseline="0" noProof="0">
+              <a:ln>
+                <a:noFill/>
+              </a:ln>
+              <a:solidFill>
+                <a:srgbClr val="FFFFFF"/>
+              </a:solidFill>
+              <a:effectLst/>
+              <a:uLnTx/>
+              <a:uFillTx/>
+              <a:latin typeface="Arial" panose="020B0604020202020204"/>
+              <a:ea typeface="+mn-ea"/>
+              <a:cs typeface="+mn-cs"/>
+            </a:endParaRPr>
+          </a:p>
+        </p:txBody>
+      </p:sp>
+    </p:spTree>
+    <p:extLst>
+      <p:ext uri="{BB962C8B-B14F-4D97-AF65-F5344CB8AC3E}">
+        <p14:creationId xmlns:p14="http://schemas.microsoft.com/office/powerpoint/2010/main" val="2296321405"/>
+      </p:ext>
+    </p:extLst>
+  </p:cSld>
+  <p:clrMapOvr>
+    <a:masterClrMapping/>
+  </p:clrMapOvr>
+</p:sld>
+</file>
+
+<file path=ppt/slides/slide23.xml><?xml version="1.0" encoding="utf-8"?>
+<p:sld xmlns:a="http://schemas.openxmlformats.org/drawingml/2006/main" xmlns:r="http://schemas.openxmlformats.org/officeDocument/2006/relationships" xmlns:p="http://schemas.openxmlformats.org/presentationml/2006/main">
+  <p:cSld>
+    <p:spTree>
+      <p:nvGrpSpPr>
+        <p:cNvPr id="1" name=""/>
+        <p:cNvGrpSpPr/>
+        <p:nvPr/>
+      </p:nvGrpSpPr>
+      <p:grpSpPr>
+        <a:xfrm>
+          <a:off x="0" y="0"/>
+          <a:ext cx="0" cy="0"/>
+          <a:chOff x="0" y="0"/>
+          <a:chExt cx="0" cy="0"/>
+        </a:xfrm>
+      </p:grpSpPr>
+      <p:sp>
+        <p:nvSpPr>
+          <p:cNvPr id="2" name="Title 1"/>
+          <p:cNvSpPr>
+            <a:spLocks noGrp="1"/>
+          </p:cNvSpPr>
+          <p:nvPr>
+            <p:ph type="title"/>
+          </p:nvPr>
+        </p:nvSpPr>
+        <p:spPr>
+          <a:xfrm>
             <a:off x="913052" y="814444"/>
             <a:ext cx="8229600" cy="571500"/>
           </a:xfrm>
@@ -11174,7 +11238,7 @@
 </p:sld>
 </file>
 
-<file path=ppt/slides/slide23.xml><?xml version="1.0" encoding="utf-8"?>
+<file path=ppt/slides/slide24.xml><?xml version="1.0" encoding="utf-8"?>
 <p:sld xmlns:a="http://schemas.openxmlformats.org/drawingml/2006/main" xmlns:r="http://schemas.openxmlformats.org/officeDocument/2006/relationships" xmlns:p="http://schemas.openxmlformats.org/presentationml/2006/main">
   <p:cSld>
     <p:spTree>
@@ -12052,651 +12116,6 @@
     <p:extLst>
       <p:ext uri="{BB962C8B-B14F-4D97-AF65-F5344CB8AC3E}">
         <p14:creationId xmlns:p14="http://schemas.microsoft.com/office/powerpoint/2010/main" val="4171755163"/>
-      </p:ext>
-    </p:extLst>
-  </p:cSld>
-  <p:clrMapOvr>
-    <a:masterClrMapping/>
-  </p:clrMapOvr>
-</p:sld>
-</file>
-
-<file path=ppt/slides/slide24.xml><?xml version="1.0" encoding="utf-8"?>
-<p:sld xmlns:a="http://schemas.openxmlformats.org/drawingml/2006/main" xmlns:r="http://schemas.openxmlformats.org/officeDocument/2006/relationships" xmlns:p="http://schemas.openxmlformats.org/presentationml/2006/main">
-  <p:cSld>
-    <p:spTree>
-      <p:nvGrpSpPr>
-        <p:cNvPr id="1" name=""/>
-        <p:cNvGrpSpPr/>
-        <p:nvPr/>
-      </p:nvGrpSpPr>
-      <p:grpSpPr>
-        <a:xfrm>
-          <a:off x="0" y="0"/>
-          <a:ext cx="0" cy="0"/>
-          <a:chOff x="0" y="0"/>
-          <a:chExt cx="0" cy="0"/>
-        </a:xfrm>
-      </p:grpSpPr>
-      <p:sp>
-        <p:nvSpPr>
-          <p:cNvPr id="2" name="Title 1"/>
-          <p:cNvSpPr>
-            <a:spLocks noGrp="1"/>
-          </p:cNvSpPr>
-          <p:nvPr>
-            <p:ph type="title"/>
-          </p:nvPr>
-        </p:nvSpPr>
-        <p:spPr>
-          <a:xfrm>
-            <a:off x="936516" y="798063"/>
-            <a:ext cx="10417284" cy="674687"/>
-          </a:xfrm>
-        </p:spPr>
-        <p:txBody>
-          <a:bodyPr/>
-          <a:lstStyle/>
-          <a:p>
-            <a:r>
-              <a:rPr lang="en-US" dirty="0"/>
-              <a:t>Example: Using an Iterator</a:t>
-            </a:r>
-          </a:p>
-        </p:txBody>
-      </p:sp>
-      <p:sp>
-        <p:nvSpPr>
-          <p:cNvPr id="3" name="Content Placeholder 2"/>
-          <p:cNvSpPr>
-            <a:spLocks noGrp="1"/>
-          </p:cNvSpPr>
-          <p:nvPr>
-            <p:ph idx="1"/>
-          </p:nvPr>
-        </p:nvSpPr>
-        <p:spPr>
-          <a:xfrm>
-            <a:off x="936516" y="1644227"/>
-            <a:ext cx="10417284" cy="4995287"/>
-          </a:xfrm>
-        </p:spPr>
-        <p:txBody>
-          <a:bodyPr/>
-          <a:lstStyle/>
-          <a:p>
-            <a:r>
-              <a:rPr lang="en-US" dirty="0">
-                <a:solidFill>
-                  <a:schemeClr val="tx1"/>
-                </a:solidFill>
-              </a:rPr>
-              <a:t>You can use an iterator to print and/or delete elements:</a:t>
-            </a:r>
-          </a:p>
-        </p:txBody>
-      </p:sp>
-      <p:sp>
-        <p:nvSpPr>
-          <p:cNvPr id="4" name="Footer Placeholder 3"/>
-          <p:cNvSpPr>
-            <a:spLocks noGrp="1"/>
-          </p:cNvSpPr>
-          <p:nvPr>
-            <p:ph type="ftr" sz="quarter" idx="11"/>
-          </p:nvPr>
-        </p:nvSpPr>
-        <p:spPr/>
-        <p:txBody>
-          <a:bodyPr/>
-          <a:lstStyle/>
-          <a:p>
-            <a:pPr marL="0" marR="0" lvl="0" indent="0" algn="l" defTabSz="914400" rtl="0" eaLnBrk="1" fontAlgn="auto" latinLnBrk="0" hangingPunct="1">
-              <a:lnSpc>
-                <a:spcPct val="100000"/>
-              </a:lnSpc>
-              <a:spcBef>
-                <a:spcPts val="0"/>
-              </a:spcBef>
-              <a:spcAft>
-                <a:spcPts val="0"/>
-              </a:spcAft>
-              <a:buClrTx/>
-              <a:buSzTx/>
-              <a:buFontTx/>
-              <a:buNone/>
-              <a:tabLst/>
-              <a:defRPr/>
-            </a:pPr>
-            <a:r>
-              <a:rPr kumimoji="0" lang="en-US" sz="1800" b="0" i="0" u="none" strike="noStrike" kern="1200" cap="none" spc="0" normalizeH="0" baseline="0" noProof="0" dirty="0">
-                <a:ln>
-                  <a:noFill/>
-                </a:ln>
-                <a:solidFill>
-                  <a:srgbClr val="000000"/>
-                </a:solidFill>
-                <a:effectLst/>
-                <a:uLnTx/>
-                <a:uFillTx/>
-                <a:latin typeface="Arial" panose="020B0604020202020204"/>
-                <a:ea typeface="+mn-ea"/>
-                <a:cs typeface="+mn-cs"/>
-              </a:rPr>
-              <a:t> </a:t>
-            </a:r>
-          </a:p>
-        </p:txBody>
-      </p:sp>
-      <p:sp>
-        <p:nvSpPr>
-          <p:cNvPr id="5" name="Slide Number Placeholder 4"/>
-          <p:cNvSpPr>
-            <a:spLocks noGrp="1"/>
-          </p:cNvSpPr>
-          <p:nvPr>
-            <p:ph type="sldNum" sz="quarter" idx="12"/>
-          </p:nvPr>
-        </p:nvSpPr>
-        <p:spPr/>
-        <p:txBody>
-          <a:bodyPr/>
-          <a:lstStyle/>
-          <a:p>
-            <a:pPr marL="0" marR="0" lvl="0" indent="0" algn="l" defTabSz="914400" rtl="0" eaLnBrk="1" fontAlgn="auto" latinLnBrk="0" hangingPunct="1">
-              <a:lnSpc>
-                <a:spcPct val="100000"/>
-              </a:lnSpc>
-              <a:spcBef>
-                <a:spcPts val="0"/>
-              </a:spcBef>
-              <a:spcAft>
-                <a:spcPts val="0"/>
-              </a:spcAft>
-              <a:buClrTx/>
-              <a:buSzTx/>
-              <a:buFontTx/>
-              <a:buNone/>
-              <a:tabLst/>
-              <a:defRPr/>
-            </a:pPr>
-            <a:r>
-              <a:rPr kumimoji="0" lang="en-US" sz="1800" b="0" i="0" u="none" strike="noStrike" kern="1200" cap="none" spc="0" normalizeH="0" baseline="0" noProof="0" dirty="0">
-                <a:ln>
-                  <a:noFill/>
-                </a:ln>
-                <a:solidFill>
-                  <a:srgbClr val="000000"/>
-                </a:solidFill>
-                <a:effectLst/>
-                <a:uLnTx/>
-                <a:uFillTx/>
-                <a:latin typeface="Arial" panose="020B0604020202020204"/>
-                <a:ea typeface="+mn-ea"/>
-                <a:cs typeface="+mn-cs"/>
-              </a:rPr>
-              <a:t> </a:t>
-            </a:r>
-          </a:p>
-        </p:txBody>
-      </p:sp>
-      <p:pic>
-        <p:nvPicPr>
-          <p:cNvPr id="8" name="Picture 7"/>
-          <p:cNvPicPr>
-            <a:picLocks noChangeAspect="1"/>
-          </p:cNvPicPr>
-          <p:nvPr/>
-        </p:nvPicPr>
-        <p:blipFill>
-          <a:blip r:embed="rId2"/>
-          <a:stretch>
-            <a:fillRect/>
-          </a:stretch>
-        </p:blipFill>
-        <p:spPr>
-          <a:xfrm>
-            <a:off x="936516" y="2354719"/>
-            <a:ext cx="7039675" cy="3912562"/>
-          </a:xfrm>
-          <a:prstGeom prst="rect">
-            <a:avLst/>
-          </a:prstGeom>
-        </p:spPr>
-      </p:pic>
-      <p:pic>
-        <p:nvPicPr>
-          <p:cNvPr id="9" name="Picture 8"/>
-          <p:cNvPicPr>
-            <a:picLocks noChangeAspect="1"/>
-          </p:cNvPicPr>
-          <p:nvPr/>
-        </p:nvPicPr>
-        <p:blipFill>
-          <a:blip r:embed="rId3"/>
-          <a:stretch>
-            <a:fillRect/>
-          </a:stretch>
-        </p:blipFill>
-        <p:spPr>
-          <a:xfrm>
-            <a:off x="8754755" y="2561075"/>
-            <a:ext cx="1991019" cy="3498862"/>
-          </a:xfrm>
-          <a:prstGeom prst="rect">
-            <a:avLst/>
-          </a:prstGeom>
-        </p:spPr>
-      </p:pic>
-      <p:cxnSp>
-        <p:nvCxnSpPr>
-          <p:cNvPr id="11" name="Straight Arrow Connector 10"/>
-          <p:cNvCxnSpPr/>
-          <p:nvPr/>
-        </p:nvCxnSpPr>
-        <p:spPr>
-          <a:xfrm flipV="1">
-            <a:off x="3839671" y="4741933"/>
-            <a:ext cx="4911487" cy="16184"/>
-          </a:xfrm>
-          <a:prstGeom prst="straightConnector1">
-            <a:avLst/>
-          </a:prstGeom>
-          <a:ln>
-            <a:tailEnd type="triangle"/>
-          </a:ln>
-        </p:spPr>
-        <p:style>
-          <a:lnRef idx="1">
-            <a:schemeClr val="accent1"/>
-          </a:lnRef>
-          <a:fillRef idx="0">
-            <a:schemeClr val="accent1"/>
-          </a:fillRef>
-          <a:effectRef idx="0">
-            <a:schemeClr val="accent1"/>
-          </a:effectRef>
-          <a:fontRef idx="minor">
-            <a:schemeClr val="tx1"/>
-          </a:fontRef>
-        </p:style>
-      </p:cxnSp>
-      <p:sp>
-        <p:nvSpPr>
-          <p:cNvPr id="6" name="Content Placeholder 2">
-            <a:extLst>
-              <a:ext uri="{FF2B5EF4-FFF2-40B4-BE49-F238E27FC236}">
-                <a16:creationId xmlns:a16="http://schemas.microsoft.com/office/drawing/2014/main" id="{C71AF6B6-28F2-FF8F-CC71-81C306E4F2C4}"/>
-              </a:ext>
-            </a:extLst>
-          </p:cNvPr>
-          <p:cNvSpPr txBox="1">
-            <a:spLocks/>
-          </p:cNvSpPr>
-          <p:nvPr/>
-        </p:nvSpPr>
-        <p:spPr>
-          <a:xfrm>
-            <a:off x="1479881" y="31502"/>
-            <a:ext cx="8498307" cy="329884"/>
-          </a:xfrm>
-          <a:prstGeom prst="rect">
-            <a:avLst/>
-          </a:prstGeom>
-          <a:ln w="28575">
-            <a:solidFill>
-              <a:srgbClr val="FF0000"/>
-            </a:solidFill>
-          </a:ln>
-        </p:spPr>
-        <p:txBody>
-          <a:bodyPr vert="horz" lIns="91440" tIns="45720" rIns="91440" bIns="45720" rtlCol="0">
-            <a:normAutofit fontScale="70000" lnSpcReduction="20000"/>
-          </a:bodyPr>
-          <a:lstStyle>
-            <a:lvl1pPr marL="228600" indent="-228600" algn="l" defTabSz="914400" rtl="0" eaLnBrk="1" latinLnBrk="0" hangingPunct="1">
-              <a:lnSpc>
-                <a:spcPct val="90000"/>
-              </a:lnSpc>
-              <a:spcBef>
-                <a:spcPts val="1000"/>
-              </a:spcBef>
-              <a:buClr>
-                <a:srgbClr val="B30738"/>
-              </a:buClr>
-              <a:buFont typeface="Arial" panose="020B0604020202020204" pitchFamily="34" charset="0"/>
-              <a:buChar char="•"/>
-              <a:defRPr sz="2600" b="0" i="0" kern="1200">
-                <a:solidFill>
-                  <a:srgbClr val="002060"/>
-                </a:solidFill>
-                <a:latin typeface="Arial Narrow" panose="020B0604020202020204" pitchFamily="34" charset="0"/>
-                <a:ea typeface="+mn-ea"/>
-                <a:cs typeface="Arial Narrow" panose="020B0604020202020204" pitchFamily="34" charset="0"/>
-              </a:defRPr>
-            </a:lvl1pPr>
-            <a:lvl2pPr marL="685800" indent="-228600" algn="l" defTabSz="914400" rtl="0" eaLnBrk="1" latinLnBrk="0" hangingPunct="1">
-              <a:lnSpc>
-                <a:spcPct val="90000"/>
-              </a:lnSpc>
-              <a:spcBef>
-                <a:spcPts val="500"/>
-              </a:spcBef>
-              <a:buClr>
-                <a:srgbClr val="B30738"/>
-              </a:buClr>
-              <a:buFont typeface="Arial" panose="020B0604020202020204" pitchFamily="34" charset="0"/>
-              <a:buChar char="•"/>
-              <a:defRPr sz="2400" b="0" i="0" kern="1200">
-                <a:solidFill>
-                  <a:schemeClr val="accent2">
-                    <a:lumMod val="75000"/>
-                  </a:schemeClr>
-                </a:solidFill>
-                <a:latin typeface="Arial Narrow" panose="020B0604020202020204" pitchFamily="34" charset="0"/>
-                <a:ea typeface="+mn-ea"/>
-                <a:cs typeface="Arial Narrow" panose="020B0604020202020204" pitchFamily="34" charset="0"/>
-              </a:defRPr>
-            </a:lvl2pPr>
-            <a:lvl3pPr marL="1143000" indent="-228600" algn="l" defTabSz="914400" rtl="0" eaLnBrk="1" latinLnBrk="0" hangingPunct="1">
-              <a:lnSpc>
-                <a:spcPct val="90000"/>
-              </a:lnSpc>
-              <a:spcBef>
-                <a:spcPts val="500"/>
-              </a:spcBef>
-              <a:buClr>
-                <a:srgbClr val="B30738"/>
-              </a:buClr>
-              <a:buFont typeface="Arial" panose="020B0604020202020204" pitchFamily="34" charset="0"/>
-              <a:buChar char="•"/>
-              <a:defRPr sz="2000" b="0" i="0" kern="1200">
-                <a:solidFill>
-                  <a:schemeClr val="tx1">
-                    <a:lumMod val="65000"/>
-                    <a:lumOff val="35000"/>
-                  </a:schemeClr>
-                </a:solidFill>
-                <a:latin typeface="Arial Narrow" panose="020B0604020202020204" pitchFamily="34" charset="0"/>
-                <a:ea typeface="+mn-ea"/>
-                <a:cs typeface="Arial Narrow" panose="020B0604020202020204" pitchFamily="34" charset="0"/>
-              </a:defRPr>
-            </a:lvl3pPr>
-            <a:lvl4pPr marL="1600200" indent="-228600" algn="l" defTabSz="914400" rtl="0" eaLnBrk="1" latinLnBrk="0" hangingPunct="1">
-              <a:lnSpc>
-                <a:spcPct val="90000"/>
-              </a:lnSpc>
-              <a:spcBef>
-                <a:spcPts val="500"/>
-              </a:spcBef>
-              <a:buClr>
-                <a:srgbClr val="B30738"/>
-              </a:buClr>
-              <a:buFont typeface="Arial" panose="020B0604020202020204" pitchFamily="34" charset="0"/>
-              <a:buChar char="•"/>
-              <a:defRPr sz="1800" b="0" i="0" kern="1200">
-                <a:solidFill>
-                  <a:schemeClr val="tx1">
-                    <a:lumMod val="65000"/>
-                    <a:lumOff val="35000"/>
-                  </a:schemeClr>
-                </a:solidFill>
-                <a:latin typeface="Arial Narrow" panose="020B0604020202020204" pitchFamily="34" charset="0"/>
-                <a:ea typeface="+mn-ea"/>
-                <a:cs typeface="Arial Narrow" panose="020B0604020202020204" pitchFamily="34" charset="0"/>
-              </a:defRPr>
-            </a:lvl4pPr>
-            <a:lvl5pPr marL="2057400" indent="-228600" algn="l" defTabSz="914400" rtl="0" eaLnBrk="1" latinLnBrk="0" hangingPunct="1">
-              <a:lnSpc>
-                <a:spcPct val="90000"/>
-              </a:lnSpc>
-              <a:spcBef>
-                <a:spcPts val="500"/>
-              </a:spcBef>
-              <a:buClr>
-                <a:srgbClr val="B30738"/>
-              </a:buClr>
-              <a:buFont typeface="Arial" panose="020B0604020202020204" pitchFamily="34" charset="0"/>
-              <a:buChar char="•"/>
-              <a:defRPr sz="1600" b="0" i="0" kern="1200">
-                <a:solidFill>
-                  <a:schemeClr val="tx1">
-                    <a:lumMod val="65000"/>
-                    <a:lumOff val="35000"/>
-                  </a:schemeClr>
-                </a:solidFill>
-                <a:latin typeface="Arial Narrow" panose="020B0604020202020204" pitchFamily="34" charset="0"/>
-                <a:ea typeface="+mn-ea"/>
-                <a:cs typeface="Arial Narrow" panose="020B0604020202020204" pitchFamily="34" charset="0"/>
-              </a:defRPr>
-            </a:lvl5pPr>
-            <a:lvl6pPr marL="2514600" indent="-228600" algn="l" defTabSz="914400" rtl="0" eaLnBrk="1" latinLnBrk="0" hangingPunct="1">
-              <a:lnSpc>
-                <a:spcPct val="90000"/>
-              </a:lnSpc>
-              <a:spcBef>
-                <a:spcPts val="500"/>
-              </a:spcBef>
-              <a:buFont typeface="Arial" panose="020B0604020202020204" pitchFamily="34" charset="0"/>
-              <a:buChar char="•"/>
-              <a:defRPr sz="1800" kern="1200">
-                <a:solidFill>
-                  <a:schemeClr val="tx1"/>
-                </a:solidFill>
-                <a:latin typeface="+mn-lt"/>
-                <a:ea typeface="+mn-ea"/>
-                <a:cs typeface="+mn-cs"/>
-              </a:defRPr>
-            </a:lvl6pPr>
-            <a:lvl7pPr marL="2971800" indent="-228600" algn="l" defTabSz="914400" rtl="0" eaLnBrk="1" latinLnBrk="0" hangingPunct="1">
-              <a:lnSpc>
-                <a:spcPct val="90000"/>
-              </a:lnSpc>
-              <a:spcBef>
-                <a:spcPts val="500"/>
-              </a:spcBef>
-              <a:buFont typeface="Arial" panose="020B0604020202020204" pitchFamily="34" charset="0"/>
-              <a:buChar char="•"/>
-              <a:defRPr sz="1800" kern="1200">
-                <a:solidFill>
-                  <a:schemeClr val="tx1"/>
-                </a:solidFill>
-                <a:latin typeface="+mn-lt"/>
-                <a:ea typeface="+mn-ea"/>
-                <a:cs typeface="+mn-cs"/>
-              </a:defRPr>
-            </a:lvl7pPr>
-            <a:lvl8pPr marL="3429000" indent="-228600" algn="l" defTabSz="914400" rtl="0" eaLnBrk="1" latinLnBrk="0" hangingPunct="1">
-              <a:lnSpc>
-                <a:spcPct val="90000"/>
-              </a:lnSpc>
-              <a:spcBef>
-                <a:spcPts val="500"/>
-              </a:spcBef>
-              <a:buFont typeface="Arial" panose="020B0604020202020204" pitchFamily="34" charset="0"/>
-              <a:buChar char="•"/>
-              <a:defRPr sz="1800" kern="1200">
-                <a:solidFill>
-                  <a:schemeClr val="tx1"/>
-                </a:solidFill>
-                <a:latin typeface="+mn-lt"/>
-                <a:ea typeface="+mn-ea"/>
-                <a:cs typeface="+mn-cs"/>
-              </a:defRPr>
-            </a:lvl8pPr>
-            <a:lvl9pPr marL="3886200" indent="-228600" algn="l" defTabSz="914400" rtl="0" eaLnBrk="1" latinLnBrk="0" hangingPunct="1">
-              <a:lnSpc>
-                <a:spcPct val="90000"/>
-              </a:lnSpc>
-              <a:spcBef>
-                <a:spcPts val="500"/>
-              </a:spcBef>
-              <a:buFont typeface="Arial" panose="020B0604020202020204" pitchFamily="34" charset="0"/>
-              <a:buChar char="•"/>
-              <a:defRPr sz="1800" kern="1200">
-                <a:solidFill>
-                  <a:schemeClr val="tx1"/>
-                </a:solidFill>
-                <a:latin typeface="+mn-lt"/>
-                <a:ea typeface="+mn-ea"/>
-                <a:cs typeface="+mn-cs"/>
-              </a:defRPr>
-            </a:lvl9pPr>
-          </a:lstStyle>
-          <a:p>
-            <a:pPr marL="0" lvl="0" indent="0" algn="ctr">
-              <a:buNone/>
-              <a:defRPr/>
-            </a:pPr>
-            <a:r>
-              <a:rPr kumimoji="0" lang="en-US" sz="2600" b="0" i="0" u="none" strike="noStrike" kern="1200" cap="none" spc="0" normalizeH="0" baseline="0" noProof="0" dirty="0">
-                <a:ln>
-                  <a:noFill/>
-                </a:ln>
-                <a:solidFill>
-                  <a:srgbClr val="C00000"/>
-                </a:solidFill>
-                <a:effectLst/>
-                <a:uLnTx/>
-                <a:uFillTx/>
-                <a:latin typeface="Arial Narrow" panose="020B0604020202020204" pitchFamily="34" charset="0"/>
-                <a:ea typeface="+mn-ea"/>
-              </a:rPr>
-              <a:t>“</a:t>
-            </a:r>
-            <a:r>
-              <a:rPr lang="en-US" dirty="0">
-                <a:solidFill>
-                  <a:srgbClr val="C00000"/>
-                </a:solidFill>
-              </a:rPr>
-              <a:t>CSEN160_05_Lecture_DataStructursAndGenerics</a:t>
-            </a:r>
-            <a:r>
-              <a:rPr kumimoji="0" lang="en-US" sz="2600" b="0" i="0" u="none" strike="noStrike" kern="1200" cap="none" spc="0" normalizeH="0" baseline="0" noProof="0" dirty="0">
-                <a:ln>
-                  <a:noFill/>
-                </a:ln>
-                <a:solidFill>
-                  <a:srgbClr val="C00000"/>
-                </a:solidFill>
-                <a:effectLst/>
-                <a:uLnTx/>
-                <a:uFillTx/>
-                <a:latin typeface="Arial Narrow" panose="020B0604020202020204" pitchFamily="34" charset="0"/>
-                <a:ea typeface="+mn-ea"/>
-              </a:rPr>
-              <a:t>.</a:t>
-            </a:r>
-            <a:r>
-              <a:rPr kumimoji="0" lang="en-US" sz="2600" b="0" i="0" u="none" strike="noStrike" kern="1200" cap="none" spc="0" normalizeH="0" baseline="0" noProof="0" dirty="0" err="1">
-                <a:ln>
-                  <a:noFill/>
-                </a:ln>
-                <a:solidFill>
-                  <a:srgbClr val="C00000"/>
-                </a:solidFill>
-                <a:effectLst/>
-                <a:uLnTx/>
-                <a:uFillTx/>
-                <a:latin typeface="Arial Narrow" panose="020B0604020202020204" pitchFamily="34" charset="0"/>
-                <a:ea typeface="+mn-ea"/>
-              </a:rPr>
-              <a:t>S_ListMapSet.MyListIteratorExamples</a:t>
-            </a:r>
-            <a:r>
-              <a:rPr kumimoji="0" lang="en-US" sz="2600" b="0" i="0" u="none" strike="noStrike" kern="1200" cap="none" spc="0" normalizeH="0" baseline="0" noProof="0" dirty="0">
-                <a:ln>
-                  <a:noFill/>
-                </a:ln>
-                <a:solidFill>
-                  <a:srgbClr val="C00000"/>
-                </a:solidFill>
-                <a:effectLst/>
-                <a:uLnTx/>
-                <a:uFillTx/>
-                <a:latin typeface="Arial Narrow" panose="020B0604020202020204" pitchFamily="34" charset="0"/>
-                <a:ea typeface="+mn-ea"/>
-              </a:rPr>
-              <a:t>”</a:t>
-            </a:r>
-          </a:p>
-        </p:txBody>
-      </p:sp>
-      <p:sp>
-        <p:nvSpPr>
-          <p:cNvPr id="7" name="TextBox 6">
-            <a:extLst>
-              <a:ext uri="{FF2B5EF4-FFF2-40B4-BE49-F238E27FC236}">
-                <a16:creationId xmlns:a16="http://schemas.microsoft.com/office/drawing/2014/main" id="{5F250A9A-8DC2-FE02-7F81-51FE9E671BCB}"/>
-              </a:ext>
-            </a:extLst>
-          </p:cNvPr>
-          <p:cNvSpPr txBox="1"/>
-          <p:nvPr/>
-        </p:nvSpPr>
-        <p:spPr>
-          <a:xfrm>
-            <a:off x="3538760" y="2907879"/>
-            <a:ext cx="2787943" cy="369332"/>
-          </a:xfrm>
-          <a:prstGeom prst="rect">
-            <a:avLst/>
-          </a:prstGeom>
-          <a:noFill/>
-          <a:ln>
-            <a:solidFill>
-              <a:srgbClr val="92D050"/>
-            </a:solidFill>
-          </a:ln>
-        </p:spPr>
-        <p:txBody>
-          <a:bodyPr wrap="none" rtlCol="0">
-            <a:spAutoFit/>
-          </a:bodyPr>
-          <a:lstStyle/>
-          <a:p>
-            <a:pPr marL="0" marR="0" lvl="0" indent="0" algn="l" defTabSz="914400" rtl="0" eaLnBrk="1" fontAlgn="auto" latinLnBrk="0" hangingPunct="1">
-              <a:lnSpc>
-                <a:spcPct val="100000"/>
-              </a:lnSpc>
-              <a:spcBef>
-                <a:spcPts val="0"/>
-              </a:spcBef>
-              <a:spcAft>
-                <a:spcPts val="0"/>
-              </a:spcAft>
-              <a:buClrTx/>
-              <a:buSzTx/>
-              <a:buFontTx/>
-              <a:buNone/>
-              <a:tabLst/>
-              <a:defRPr/>
-            </a:pPr>
-            <a:r>
-              <a:rPr kumimoji="0" lang="en-US" sz="1800" b="1" i="0" u="none" strike="noStrike" kern="1200" cap="none" spc="0" normalizeH="0" baseline="0" noProof="0" dirty="0">
-                <a:ln>
-                  <a:noFill/>
-                </a:ln>
-                <a:solidFill>
-                  <a:srgbClr val="92D050"/>
-                </a:solidFill>
-                <a:effectLst/>
-                <a:uLnTx/>
-                <a:uFillTx/>
-                <a:latin typeface="Arial" panose="020B0604020202020204"/>
-                <a:ea typeface="+mn-ea"/>
-                <a:cs typeface="+mn-cs"/>
-              </a:rPr>
-              <a:t>Create 10 numbers 0-10</a:t>
-            </a:r>
-          </a:p>
-        </p:txBody>
-      </p:sp>
-    </p:spTree>
-    <p:extLst>
-      <p:ext uri="{BB962C8B-B14F-4D97-AF65-F5344CB8AC3E}">
-        <p14:creationId xmlns:p14="http://schemas.microsoft.com/office/powerpoint/2010/main" val="1198318106"/>
       </p:ext>
     </p:extLst>
   </p:cSld>
@@ -12745,6 +12164,651 @@
           <a:p>
             <a:r>
               <a:rPr lang="en-US" dirty="0"/>
+              <a:t>Example: Using an Iterator</a:t>
+            </a:r>
+          </a:p>
+        </p:txBody>
+      </p:sp>
+      <p:sp>
+        <p:nvSpPr>
+          <p:cNvPr id="3" name="Content Placeholder 2"/>
+          <p:cNvSpPr>
+            <a:spLocks noGrp="1"/>
+          </p:cNvSpPr>
+          <p:nvPr>
+            <p:ph idx="1"/>
+          </p:nvPr>
+        </p:nvSpPr>
+        <p:spPr>
+          <a:xfrm>
+            <a:off x="936516" y="1644227"/>
+            <a:ext cx="10417284" cy="4995287"/>
+          </a:xfrm>
+        </p:spPr>
+        <p:txBody>
+          <a:bodyPr/>
+          <a:lstStyle/>
+          <a:p>
+            <a:r>
+              <a:rPr lang="en-US" dirty="0">
+                <a:solidFill>
+                  <a:schemeClr val="tx1"/>
+                </a:solidFill>
+              </a:rPr>
+              <a:t>You can use an iterator to print and/or delete elements:</a:t>
+            </a:r>
+          </a:p>
+        </p:txBody>
+      </p:sp>
+      <p:sp>
+        <p:nvSpPr>
+          <p:cNvPr id="4" name="Footer Placeholder 3"/>
+          <p:cNvSpPr>
+            <a:spLocks noGrp="1"/>
+          </p:cNvSpPr>
+          <p:nvPr>
+            <p:ph type="ftr" sz="quarter" idx="11"/>
+          </p:nvPr>
+        </p:nvSpPr>
+        <p:spPr/>
+        <p:txBody>
+          <a:bodyPr/>
+          <a:lstStyle/>
+          <a:p>
+            <a:pPr marL="0" marR="0" lvl="0" indent="0" algn="l" defTabSz="914400" rtl="0" eaLnBrk="1" fontAlgn="auto" latinLnBrk="0" hangingPunct="1">
+              <a:lnSpc>
+                <a:spcPct val="100000"/>
+              </a:lnSpc>
+              <a:spcBef>
+                <a:spcPts val="0"/>
+              </a:spcBef>
+              <a:spcAft>
+                <a:spcPts val="0"/>
+              </a:spcAft>
+              <a:buClrTx/>
+              <a:buSzTx/>
+              <a:buFontTx/>
+              <a:buNone/>
+              <a:tabLst/>
+              <a:defRPr/>
+            </a:pPr>
+            <a:r>
+              <a:rPr kumimoji="0" lang="en-US" sz="1800" b="0" i="0" u="none" strike="noStrike" kern="1200" cap="none" spc="0" normalizeH="0" baseline="0" noProof="0" dirty="0">
+                <a:ln>
+                  <a:noFill/>
+                </a:ln>
+                <a:solidFill>
+                  <a:srgbClr val="000000"/>
+                </a:solidFill>
+                <a:effectLst/>
+                <a:uLnTx/>
+                <a:uFillTx/>
+                <a:latin typeface="Arial" panose="020B0604020202020204"/>
+                <a:ea typeface="+mn-ea"/>
+                <a:cs typeface="+mn-cs"/>
+              </a:rPr>
+              <a:t> </a:t>
+            </a:r>
+          </a:p>
+        </p:txBody>
+      </p:sp>
+      <p:sp>
+        <p:nvSpPr>
+          <p:cNvPr id="5" name="Slide Number Placeholder 4"/>
+          <p:cNvSpPr>
+            <a:spLocks noGrp="1"/>
+          </p:cNvSpPr>
+          <p:nvPr>
+            <p:ph type="sldNum" sz="quarter" idx="12"/>
+          </p:nvPr>
+        </p:nvSpPr>
+        <p:spPr/>
+        <p:txBody>
+          <a:bodyPr/>
+          <a:lstStyle/>
+          <a:p>
+            <a:pPr marL="0" marR="0" lvl="0" indent="0" algn="l" defTabSz="914400" rtl="0" eaLnBrk="1" fontAlgn="auto" latinLnBrk="0" hangingPunct="1">
+              <a:lnSpc>
+                <a:spcPct val="100000"/>
+              </a:lnSpc>
+              <a:spcBef>
+                <a:spcPts val="0"/>
+              </a:spcBef>
+              <a:spcAft>
+                <a:spcPts val="0"/>
+              </a:spcAft>
+              <a:buClrTx/>
+              <a:buSzTx/>
+              <a:buFontTx/>
+              <a:buNone/>
+              <a:tabLst/>
+              <a:defRPr/>
+            </a:pPr>
+            <a:r>
+              <a:rPr kumimoji="0" lang="en-US" sz="1800" b="0" i="0" u="none" strike="noStrike" kern="1200" cap="none" spc="0" normalizeH="0" baseline="0" noProof="0" dirty="0">
+                <a:ln>
+                  <a:noFill/>
+                </a:ln>
+                <a:solidFill>
+                  <a:srgbClr val="000000"/>
+                </a:solidFill>
+                <a:effectLst/>
+                <a:uLnTx/>
+                <a:uFillTx/>
+                <a:latin typeface="Arial" panose="020B0604020202020204"/>
+                <a:ea typeface="+mn-ea"/>
+                <a:cs typeface="+mn-cs"/>
+              </a:rPr>
+              <a:t> </a:t>
+            </a:r>
+          </a:p>
+        </p:txBody>
+      </p:sp>
+      <p:pic>
+        <p:nvPicPr>
+          <p:cNvPr id="8" name="Picture 7"/>
+          <p:cNvPicPr>
+            <a:picLocks noChangeAspect="1"/>
+          </p:cNvPicPr>
+          <p:nvPr/>
+        </p:nvPicPr>
+        <p:blipFill>
+          <a:blip r:embed="rId2"/>
+          <a:stretch>
+            <a:fillRect/>
+          </a:stretch>
+        </p:blipFill>
+        <p:spPr>
+          <a:xfrm>
+            <a:off x="936516" y="2354719"/>
+            <a:ext cx="7039675" cy="3912562"/>
+          </a:xfrm>
+          <a:prstGeom prst="rect">
+            <a:avLst/>
+          </a:prstGeom>
+        </p:spPr>
+      </p:pic>
+      <p:pic>
+        <p:nvPicPr>
+          <p:cNvPr id="9" name="Picture 8"/>
+          <p:cNvPicPr>
+            <a:picLocks noChangeAspect="1"/>
+          </p:cNvPicPr>
+          <p:nvPr/>
+        </p:nvPicPr>
+        <p:blipFill>
+          <a:blip r:embed="rId3"/>
+          <a:stretch>
+            <a:fillRect/>
+          </a:stretch>
+        </p:blipFill>
+        <p:spPr>
+          <a:xfrm>
+            <a:off x="8754755" y="2561075"/>
+            <a:ext cx="1991019" cy="3498862"/>
+          </a:xfrm>
+          <a:prstGeom prst="rect">
+            <a:avLst/>
+          </a:prstGeom>
+        </p:spPr>
+      </p:pic>
+      <p:cxnSp>
+        <p:nvCxnSpPr>
+          <p:cNvPr id="11" name="Straight Arrow Connector 10"/>
+          <p:cNvCxnSpPr/>
+          <p:nvPr/>
+        </p:nvCxnSpPr>
+        <p:spPr>
+          <a:xfrm flipV="1">
+            <a:off x="3839671" y="4741933"/>
+            <a:ext cx="4911487" cy="16184"/>
+          </a:xfrm>
+          <a:prstGeom prst="straightConnector1">
+            <a:avLst/>
+          </a:prstGeom>
+          <a:ln>
+            <a:tailEnd type="triangle"/>
+          </a:ln>
+        </p:spPr>
+        <p:style>
+          <a:lnRef idx="1">
+            <a:schemeClr val="accent1"/>
+          </a:lnRef>
+          <a:fillRef idx="0">
+            <a:schemeClr val="accent1"/>
+          </a:fillRef>
+          <a:effectRef idx="0">
+            <a:schemeClr val="accent1"/>
+          </a:effectRef>
+          <a:fontRef idx="minor">
+            <a:schemeClr val="tx1"/>
+          </a:fontRef>
+        </p:style>
+      </p:cxnSp>
+      <p:sp>
+        <p:nvSpPr>
+          <p:cNvPr id="6" name="Content Placeholder 2">
+            <a:extLst>
+              <a:ext uri="{FF2B5EF4-FFF2-40B4-BE49-F238E27FC236}">
+                <a16:creationId xmlns:a16="http://schemas.microsoft.com/office/drawing/2014/main" id="{C71AF6B6-28F2-FF8F-CC71-81C306E4F2C4}"/>
+              </a:ext>
+            </a:extLst>
+          </p:cNvPr>
+          <p:cNvSpPr txBox="1">
+            <a:spLocks/>
+          </p:cNvSpPr>
+          <p:nvPr/>
+        </p:nvSpPr>
+        <p:spPr>
+          <a:xfrm>
+            <a:off x="1479881" y="31502"/>
+            <a:ext cx="8498307" cy="329884"/>
+          </a:xfrm>
+          <a:prstGeom prst="rect">
+            <a:avLst/>
+          </a:prstGeom>
+          <a:ln w="28575">
+            <a:solidFill>
+              <a:srgbClr val="FF0000"/>
+            </a:solidFill>
+          </a:ln>
+        </p:spPr>
+        <p:txBody>
+          <a:bodyPr vert="horz" lIns="91440" tIns="45720" rIns="91440" bIns="45720" rtlCol="0">
+            <a:normAutofit fontScale="70000" lnSpcReduction="20000"/>
+          </a:bodyPr>
+          <a:lstStyle>
+            <a:lvl1pPr marL="228600" indent="-228600" algn="l" defTabSz="914400" rtl="0" eaLnBrk="1" latinLnBrk="0" hangingPunct="1">
+              <a:lnSpc>
+                <a:spcPct val="90000"/>
+              </a:lnSpc>
+              <a:spcBef>
+                <a:spcPts val="1000"/>
+              </a:spcBef>
+              <a:buClr>
+                <a:srgbClr val="B30738"/>
+              </a:buClr>
+              <a:buFont typeface="Arial" panose="020B0604020202020204" pitchFamily="34" charset="0"/>
+              <a:buChar char="•"/>
+              <a:defRPr sz="2600" b="0" i="0" kern="1200">
+                <a:solidFill>
+                  <a:srgbClr val="002060"/>
+                </a:solidFill>
+                <a:latin typeface="Arial Narrow" panose="020B0604020202020204" pitchFamily="34" charset="0"/>
+                <a:ea typeface="+mn-ea"/>
+                <a:cs typeface="Arial Narrow" panose="020B0604020202020204" pitchFamily="34" charset="0"/>
+              </a:defRPr>
+            </a:lvl1pPr>
+            <a:lvl2pPr marL="685800" indent="-228600" algn="l" defTabSz="914400" rtl="0" eaLnBrk="1" latinLnBrk="0" hangingPunct="1">
+              <a:lnSpc>
+                <a:spcPct val="90000"/>
+              </a:lnSpc>
+              <a:spcBef>
+                <a:spcPts val="500"/>
+              </a:spcBef>
+              <a:buClr>
+                <a:srgbClr val="B30738"/>
+              </a:buClr>
+              <a:buFont typeface="Arial" panose="020B0604020202020204" pitchFamily="34" charset="0"/>
+              <a:buChar char="•"/>
+              <a:defRPr sz="2400" b="0" i="0" kern="1200">
+                <a:solidFill>
+                  <a:schemeClr val="accent2">
+                    <a:lumMod val="75000"/>
+                  </a:schemeClr>
+                </a:solidFill>
+                <a:latin typeface="Arial Narrow" panose="020B0604020202020204" pitchFamily="34" charset="0"/>
+                <a:ea typeface="+mn-ea"/>
+                <a:cs typeface="Arial Narrow" panose="020B0604020202020204" pitchFamily="34" charset="0"/>
+              </a:defRPr>
+            </a:lvl2pPr>
+            <a:lvl3pPr marL="1143000" indent="-228600" algn="l" defTabSz="914400" rtl="0" eaLnBrk="1" latinLnBrk="0" hangingPunct="1">
+              <a:lnSpc>
+                <a:spcPct val="90000"/>
+              </a:lnSpc>
+              <a:spcBef>
+                <a:spcPts val="500"/>
+              </a:spcBef>
+              <a:buClr>
+                <a:srgbClr val="B30738"/>
+              </a:buClr>
+              <a:buFont typeface="Arial" panose="020B0604020202020204" pitchFamily="34" charset="0"/>
+              <a:buChar char="•"/>
+              <a:defRPr sz="2000" b="0" i="0" kern="1200">
+                <a:solidFill>
+                  <a:schemeClr val="tx1">
+                    <a:lumMod val="65000"/>
+                    <a:lumOff val="35000"/>
+                  </a:schemeClr>
+                </a:solidFill>
+                <a:latin typeface="Arial Narrow" panose="020B0604020202020204" pitchFamily="34" charset="0"/>
+                <a:ea typeface="+mn-ea"/>
+                <a:cs typeface="Arial Narrow" panose="020B0604020202020204" pitchFamily="34" charset="0"/>
+              </a:defRPr>
+            </a:lvl3pPr>
+            <a:lvl4pPr marL="1600200" indent="-228600" algn="l" defTabSz="914400" rtl="0" eaLnBrk="1" latinLnBrk="0" hangingPunct="1">
+              <a:lnSpc>
+                <a:spcPct val="90000"/>
+              </a:lnSpc>
+              <a:spcBef>
+                <a:spcPts val="500"/>
+              </a:spcBef>
+              <a:buClr>
+                <a:srgbClr val="B30738"/>
+              </a:buClr>
+              <a:buFont typeface="Arial" panose="020B0604020202020204" pitchFamily="34" charset="0"/>
+              <a:buChar char="•"/>
+              <a:defRPr sz="1800" b="0" i="0" kern="1200">
+                <a:solidFill>
+                  <a:schemeClr val="tx1">
+                    <a:lumMod val="65000"/>
+                    <a:lumOff val="35000"/>
+                  </a:schemeClr>
+                </a:solidFill>
+                <a:latin typeface="Arial Narrow" panose="020B0604020202020204" pitchFamily="34" charset="0"/>
+                <a:ea typeface="+mn-ea"/>
+                <a:cs typeface="Arial Narrow" panose="020B0604020202020204" pitchFamily="34" charset="0"/>
+              </a:defRPr>
+            </a:lvl4pPr>
+            <a:lvl5pPr marL="2057400" indent="-228600" algn="l" defTabSz="914400" rtl="0" eaLnBrk="1" latinLnBrk="0" hangingPunct="1">
+              <a:lnSpc>
+                <a:spcPct val="90000"/>
+              </a:lnSpc>
+              <a:spcBef>
+                <a:spcPts val="500"/>
+              </a:spcBef>
+              <a:buClr>
+                <a:srgbClr val="B30738"/>
+              </a:buClr>
+              <a:buFont typeface="Arial" panose="020B0604020202020204" pitchFamily="34" charset="0"/>
+              <a:buChar char="•"/>
+              <a:defRPr sz="1600" b="0" i="0" kern="1200">
+                <a:solidFill>
+                  <a:schemeClr val="tx1">
+                    <a:lumMod val="65000"/>
+                    <a:lumOff val="35000"/>
+                  </a:schemeClr>
+                </a:solidFill>
+                <a:latin typeface="Arial Narrow" panose="020B0604020202020204" pitchFamily="34" charset="0"/>
+                <a:ea typeface="+mn-ea"/>
+                <a:cs typeface="Arial Narrow" panose="020B0604020202020204" pitchFamily="34" charset="0"/>
+              </a:defRPr>
+            </a:lvl5pPr>
+            <a:lvl6pPr marL="2514600" indent="-228600" algn="l" defTabSz="914400" rtl="0" eaLnBrk="1" latinLnBrk="0" hangingPunct="1">
+              <a:lnSpc>
+                <a:spcPct val="90000"/>
+              </a:lnSpc>
+              <a:spcBef>
+                <a:spcPts val="500"/>
+              </a:spcBef>
+              <a:buFont typeface="Arial" panose="020B0604020202020204" pitchFamily="34" charset="0"/>
+              <a:buChar char="•"/>
+              <a:defRPr sz="1800" kern="1200">
+                <a:solidFill>
+                  <a:schemeClr val="tx1"/>
+                </a:solidFill>
+                <a:latin typeface="+mn-lt"/>
+                <a:ea typeface="+mn-ea"/>
+                <a:cs typeface="+mn-cs"/>
+              </a:defRPr>
+            </a:lvl6pPr>
+            <a:lvl7pPr marL="2971800" indent="-228600" algn="l" defTabSz="914400" rtl="0" eaLnBrk="1" latinLnBrk="0" hangingPunct="1">
+              <a:lnSpc>
+                <a:spcPct val="90000"/>
+              </a:lnSpc>
+              <a:spcBef>
+                <a:spcPts val="500"/>
+              </a:spcBef>
+              <a:buFont typeface="Arial" panose="020B0604020202020204" pitchFamily="34" charset="0"/>
+              <a:buChar char="•"/>
+              <a:defRPr sz="1800" kern="1200">
+                <a:solidFill>
+                  <a:schemeClr val="tx1"/>
+                </a:solidFill>
+                <a:latin typeface="+mn-lt"/>
+                <a:ea typeface="+mn-ea"/>
+                <a:cs typeface="+mn-cs"/>
+              </a:defRPr>
+            </a:lvl7pPr>
+            <a:lvl8pPr marL="3429000" indent="-228600" algn="l" defTabSz="914400" rtl="0" eaLnBrk="1" latinLnBrk="0" hangingPunct="1">
+              <a:lnSpc>
+                <a:spcPct val="90000"/>
+              </a:lnSpc>
+              <a:spcBef>
+                <a:spcPts val="500"/>
+              </a:spcBef>
+              <a:buFont typeface="Arial" panose="020B0604020202020204" pitchFamily="34" charset="0"/>
+              <a:buChar char="•"/>
+              <a:defRPr sz="1800" kern="1200">
+                <a:solidFill>
+                  <a:schemeClr val="tx1"/>
+                </a:solidFill>
+                <a:latin typeface="+mn-lt"/>
+                <a:ea typeface="+mn-ea"/>
+                <a:cs typeface="+mn-cs"/>
+              </a:defRPr>
+            </a:lvl8pPr>
+            <a:lvl9pPr marL="3886200" indent="-228600" algn="l" defTabSz="914400" rtl="0" eaLnBrk="1" latinLnBrk="0" hangingPunct="1">
+              <a:lnSpc>
+                <a:spcPct val="90000"/>
+              </a:lnSpc>
+              <a:spcBef>
+                <a:spcPts val="500"/>
+              </a:spcBef>
+              <a:buFont typeface="Arial" panose="020B0604020202020204" pitchFamily="34" charset="0"/>
+              <a:buChar char="•"/>
+              <a:defRPr sz="1800" kern="1200">
+                <a:solidFill>
+                  <a:schemeClr val="tx1"/>
+                </a:solidFill>
+                <a:latin typeface="+mn-lt"/>
+                <a:ea typeface="+mn-ea"/>
+                <a:cs typeface="+mn-cs"/>
+              </a:defRPr>
+            </a:lvl9pPr>
+          </a:lstStyle>
+          <a:p>
+            <a:pPr marL="0" lvl="0" indent="0" algn="ctr">
+              <a:buNone/>
+              <a:defRPr/>
+            </a:pPr>
+            <a:r>
+              <a:rPr kumimoji="0" lang="en-US" sz="2600" b="0" i="0" u="none" strike="noStrike" kern="1200" cap="none" spc="0" normalizeH="0" baseline="0" noProof="0" dirty="0">
+                <a:ln>
+                  <a:noFill/>
+                </a:ln>
+                <a:solidFill>
+                  <a:srgbClr val="C00000"/>
+                </a:solidFill>
+                <a:effectLst/>
+                <a:uLnTx/>
+                <a:uFillTx/>
+                <a:latin typeface="Arial Narrow" panose="020B0604020202020204" pitchFamily="34" charset="0"/>
+                <a:ea typeface="+mn-ea"/>
+              </a:rPr>
+              <a:t>“</a:t>
+            </a:r>
+            <a:r>
+              <a:rPr lang="en-US" dirty="0">
+                <a:solidFill>
+                  <a:srgbClr val="C00000"/>
+                </a:solidFill>
+              </a:rPr>
+              <a:t>CSEN160_05_Lecture_DataStructursAndGenerics</a:t>
+            </a:r>
+            <a:r>
+              <a:rPr kumimoji="0" lang="en-US" sz="2600" b="0" i="0" u="none" strike="noStrike" kern="1200" cap="none" spc="0" normalizeH="0" baseline="0" noProof="0" dirty="0">
+                <a:ln>
+                  <a:noFill/>
+                </a:ln>
+                <a:solidFill>
+                  <a:srgbClr val="C00000"/>
+                </a:solidFill>
+                <a:effectLst/>
+                <a:uLnTx/>
+                <a:uFillTx/>
+                <a:latin typeface="Arial Narrow" panose="020B0604020202020204" pitchFamily="34" charset="0"/>
+                <a:ea typeface="+mn-ea"/>
+              </a:rPr>
+              <a:t>.</a:t>
+            </a:r>
+            <a:r>
+              <a:rPr kumimoji="0" lang="en-US" sz="2600" b="0" i="0" u="none" strike="noStrike" kern="1200" cap="none" spc="0" normalizeH="0" baseline="0" noProof="0" dirty="0" err="1">
+                <a:ln>
+                  <a:noFill/>
+                </a:ln>
+                <a:solidFill>
+                  <a:srgbClr val="C00000"/>
+                </a:solidFill>
+                <a:effectLst/>
+                <a:uLnTx/>
+                <a:uFillTx/>
+                <a:latin typeface="Arial Narrow" panose="020B0604020202020204" pitchFamily="34" charset="0"/>
+                <a:ea typeface="+mn-ea"/>
+              </a:rPr>
+              <a:t>S_ListMapSet.MyListIteratorExamples</a:t>
+            </a:r>
+            <a:r>
+              <a:rPr kumimoji="0" lang="en-US" sz="2600" b="0" i="0" u="none" strike="noStrike" kern="1200" cap="none" spc="0" normalizeH="0" baseline="0" noProof="0" dirty="0">
+                <a:ln>
+                  <a:noFill/>
+                </a:ln>
+                <a:solidFill>
+                  <a:srgbClr val="C00000"/>
+                </a:solidFill>
+                <a:effectLst/>
+                <a:uLnTx/>
+                <a:uFillTx/>
+                <a:latin typeface="Arial Narrow" panose="020B0604020202020204" pitchFamily="34" charset="0"/>
+                <a:ea typeface="+mn-ea"/>
+              </a:rPr>
+              <a:t>”</a:t>
+            </a:r>
+          </a:p>
+        </p:txBody>
+      </p:sp>
+      <p:sp>
+        <p:nvSpPr>
+          <p:cNvPr id="7" name="TextBox 6">
+            <a:extLst>
+              <a:ext uri="{FF2B5EF4-FFF2-40B4-BE49-F238E27FC236}">
+                <a16:creationId xmlns:a16="http://schemas.microsoft.com/office/drawing/2014/main" id="{5F250A9A-8DC2-FE02-7F81-51FE9E671BCB}"/>
+              </a:ext>
+            </a:extLst>
+          </p:cNvPr>
+          <p:cNvSpPr txBox="1"/>
+          <p:nvPr/>
+        </p:nvSpPr>
+        <p:spPr>
+          <a:xfrm>
+            <a:off x="3538760" y="2907879"/>
+            <a:ext cx="2787943" cy="369332"/>
+          </a:xfrm>
+          <a:prstGeom prst="rect">
+            <a:avLst/>
+          </a:prstGeom>
+          <a:noFill/>
+          <a:ln>
+            <a:solidFill>
+              <a:srgbClr val="92D050"/>
+            </a:solidFill>
+          </a:ln>
+        </p:spPr>
+        <p:txBody>
+          <a:bodyPr wrap="none" rtlCol="0">
+            <a:spAutoFit/>
+          </a:bodyPr>
+          <a:lstStyle/>
+          <a:p>
+            <a:pPr marL="0" marR="0" lvl="0" indent="0" algn="l" defTabSz="914400" rtl="0" eaLnBrk="1" fontAlgn="auto" latinLnBrk="0" hangingPunct="1">
+              <a:lnSpc>
+                <a:spcPct val="100000"/>
+              </a:lnSpc>
+              <a:spcBef>
+                <a:spcPts val="0"/>
+              </a:spcBef>
+              <a:spcAft>
+                <a:spcPts val="0"/>
+              </a:spcAft>
+              <a:buClrTx/>
+              <a:buSzTx/>
+              <a:buFontTx/>
+              <a:buNone/>
+              <a:tabLst/>
+              <a:defRPr/>
+            </a:pPr>
+            <a:r>
+              <a:rPr kumimoji="0" lang="en-US" sz="1800" b="1" i="0" u="none" strike="noStrike" kern="1200" cap="none" spc="0" normalizeH="0" baseline="0" noProof="0" dirty="0">
+                <a:ln>
+                  <a:noFill/>
+                </a:ln>
+                <a:solidFill>
+                  <a:srgbClr val="92D050"/>
+                </a:solidFill>
+                <a:effectLst/>
+                <a:uLnTx/>
+                <a:uFillTx/>
+                <a:latin typeface="Arial" panose="020B0604020202020204"/>
+                <a:ea typeface="+mn-ea"/>
+                <a:cs typeface="+mn-cs"/>
+              </a:rPr>
+              <a:t>Create 10 numbers 0-10</a:t>
+            </a:r>
+          </a:p>
+        </p:txBody>
+      </p:sp>
+    </p:spTree>
+    <p:extLst>
+      <p:ext uri="{BB962C8B-B14F-4D97-AF65-F5344CB8AC3E}">
+        <p14:creationId xmlns:p14="http://schemas.microsoft.com/office/powerpoint/2010/main" val="1198318106"/>
+      </p:ext>
+    </p:extLst>
+  </p:cSld>
+  <p:clrMapOvr>
+    <a:masterClrMapping/>
+  </p:clrMapOvr>
+</p:sld>
+</file>
+
+<file path=ppt/slides/slide26.xml><?xml version="1.0" encoding="utf-8"?>
+<p:sld xmlns:a="http://schemas.openxmlformats.org/drawingml/2006/main" xmlns:r="http://schemas.openxmlformats.org/officeDocument/2006/relationships" xmlns:p="http://schemas.openxmlformats.org/presentationml/2006/main">
+  <p:cSld>
+    <p:spTree>
+      <p:nvGrpSpPr>
+        <p:cNvPr id="1" name=""/>
+        <p:cNvGrpSpPr/>
+        <p:nvPr/>
+      </p:nvGrpSpPr>
+      <p:grpSpPr>
+        <a:xfrm>
+          <a:off x="0" y="0"/>
+          <a:ext cx="0" cy="0"/>
+          <a:chOff x="0" y="0"/>
+          <a:chExt cx="0" cy="0"/>
+        </a:xfrm>
+      </p:grpSpPr>
+      <p:sp>
+        <p:nvSpPr>
+          <p:cNvPr id="2" name="Title 1"/>
+          <p:cNvSpPr>
+            <a:spLocks noGrp="1"/>
+          </p:cNvSpPr>
+          <p:nvPr>
+            <p:ph type="title"/>
+          </p:nvPr>
+        </p:nvSpPr>
+        <p:spPr>
+          <a:xfrm>
+            <a:off x="936516" y="798063"/>
+            <a:ext cx="10417284" cy="674687"/>
+          </a:xfrm>
+        </p:spPr>
+        <p:txBody>
+          <a:bodyPr/>
+          <a:lstStyle/>
+          <a:p>
+            <a:r>
+              <a:rPr lang="en-US" dirty="0"/>
               <a:t>Example: Using a </a:t>
             </a:r>
             <a:r>
@@ -13745,7 +13809,7 @@
 </p:sld>
 </file>
 
-<file path=ppt/slides/slide26.xml><?xml version="1.0" encoding="utf-8"?>
+<file path=ppt/slides/slide27.xml><?xml version="1.0" encoding="utf-8"?>
 <p:sld xmlns:a="http://schemas.openxmlformats.org/drawingml/2006/main" xmlns:r="http://schemas.openxmlformats.org/officeDocument/2006/relationships" xmlns:p="http://schemas.openxmlformats.org/presentationml/2006/main">
   <p:cSld>
     <p:spTree>
@@ -13789,245 +13853,6 @@
     <p:extLst>
       <p:ext uri="{BB962C8B-B14F-4D97-AF65-F5344CB8AC3E}">
         <p14:creationId xmlns:p14="http://schemas.microsoft.com/office/powerpoint/2010/main" val="1970918962"/>
-      </p:ext>
-    </p:extLst>
-  </p:cSld>
-  <p:clrMapOvr>
-    <a:masterClrMapping/>
-  </p:clrMapOvr>
-</p:sld>
-</file>
-
-<file path=ppt/slides/slide27.xml><?xml version="1.0" encoding="utf-8"?>
-<p:sld xmlns:a="http://schemas.openxmlformats.org/drawingml/2006/main" xmlns:r="http://schemas.openxmlformats.org/officeDocument/2006/relationships" xmlns:p="http://schemas.openxmlformats.org/presentationml/2006/main">
-  <p:cSld>
-    <p:spTree>
-      <p:nvGrpSpPr>
-        <p:cNvPr id="1" name=""/>
-        <p:cNvGrpSpPr/>
-        <p:nvPr/>
-      </p:nvGrpSpPr>
-      <p:grpSpPr>
-        <a:xfrm>
-          <a:off x="0" y="0"/>
-          <a:ext cx="0" cy="0"/>
-          <a:chOff x="0" y="0"/>
-          <a:chExt cx="0" cy="0"/>
-        </a:xfrm>
-      </p:grpSpPr>
-      <p:sp>
-        <p:nvSpPr>
-          <p:cNvPr id="14338" name="Title 1"/>
-          <p:cNvSpPr>
-            <a:spLocks noGrp="1"/>
-          </p:cNvSpPr>
-          <p:nvPr>
-            <p:ph type="title"/>
-          </p:nvPr>
-        </p:nvSpPr>
-        <p:spPr>
-          <a:xfrm>
-            <a:off x="936516" y="810202"/>
-            <a:ext cx="3453413" cy="670641"/>
-          </a:xfrm>
-        </p:spPr>
-        <p:txBody>
-          <a:bodyPr/>
-          <a:lstStyle/>
-          <a:p>
-            <a:pPr eaLnBrk="1" hangingPunct="1"/>
-            <a:r>
-              <a:rPr lang="en-US" altLang="en-US" dirty="0"/>
-              <a:t>Lists</a:t>
-            </a:r>
-          </a:p>
-        </p:txBody>
-      </p:sp>
-      <p:sp>
-        <p:nvSpPr>
-          <p:cNvPr id="3" name="Content Placeholder 2"/>
-          <p:cNvSpPr>
-            <a:spLocks noGrp="1"/>
-          </p:cNvSpPr>
-          <p:nvPr>
-            <p:ph idx="1"/>
-          </p:nvPr>
-        </p:nvSpPr>
-        <p:spPr>
-          <a:xfrm>
-            <a:off x="936516" y="1656365"/>
-            <a:ext cx="10400426" cy="4995287"/>
-          </a:xfrm>
-        </p:spPr>
-        <p:txBody>
-          <a:bodyPr rtlCol="0">
-            <a:normAutofit/>
-          </a:bodyPr>
-          <a:lstStyle/>
-          <a:p>
-            <a:pPr marL="0" indent="0">
-              <a:buNone/>
-              <a:defRPr/>
-            </a:pPr>
-            <a:endParaRPr lang="en-US" b="1" dirty="0">
-              <a:solidFill>
-                <a:schemeClr val="tx1"/>
-              </a:solidFill>
-            </a:endParaRPr>
-          </a:p>
-          <a:p>
-            <a:pPr marL="0" indent="0">
-              <a:buNone/>
-              <a:defRPr/>
-            </a:pPr>
-            <a:r>
-              <a:rPr lang="en-US" b="1" dirty="0">
-                <a:solidFill>
-                  <a:schemeClr val="tx1"/>
-                </a:solidFill>
-              </a:rPr>
-              <a:t>Important:</a:t>
-            </a:r>
-          </a:p>
-          <a:p>
-            <a:pPr>
-              <a:defRPr/>
-            </a:pPr>
-            <a:r>
-              <a:rPr lang="en-US" dirty="0">
-                <a:solidFill>
-                  <a:schemeClr val="tx1"/>
-                </a:solidFill>
-              </a:rPr>
-              <a:t>Lists memorize the sequence</a:t>
-            </a:r>
-          </a:p>
-          <a:p>
-            <a:pPr>
-              <a:defRPr/>
-            </a:pPr>
-            <a:r>
-              <a:rPr lang="en-US" dirty="0">
-                <a:solidFill>
-                  <a:schemeClr val="tx1"/>
-                </a:solidFill>
-              </a:rPr>
-              <a:t>Elements can be double or triple </a:t>
-            </a:r>
-          </a:p>
-          <a:p>
-            <a:pPr marL="0" indent="0">
-              <a:buNone/>
-              <a:defRPr/>
-            </a:pPr>
-            <a:endParaRPr lang="en-US" dirty="0">
-              <a:solidFill>
-                <a:schemeClr val="tx1"/>
-              </a:solidFill>
-            </a:endParaRPr>
-          </a:p>
-          <a:p>
-            <a:pPr marL="0" indent="0">
-              <a:buNone/>
-              <a:defRPr/>
-            </a:pPr>
-            <a:r>
-              <a:rPr lang="en-US" b="1" dirty="0">
-                <a:solidFill>
-                  <a:schemeClr val="tx1"/>
-                </a:solidFill>
-              </a:rPr>
-              <a:t>List elements:</a:t>
-            </a:r>
-          </a:p>
-          <a:p>
-            <a:pPr>
-              <a:defRPr/>
-            </a:pPr>
-            <a:r>
-              <a:rPr lang="en-US" dirty="0" err="1">
-                <a:solidFill>
-                  <a:schemeClr val="tx1"/>
-                </a:solidFill>
-              </a:rPr>
-              <a:t>java.util.ArrayList</a:t>
-            </a:r>
-            <a:endParaRPr lang="en-US" dirty="0">
-              <a:solidFill>
-                <a:schemeClr val="tx1"/>
-              </a:solidFill>
-            </a:endParaRPr>
-          </a:p>
-          <a:p>
-            <a:pPr>
-              <a:defRPr/>
-            </a:pPr>
-            <a:r>
-              <a:rPr lang="en-US" dirty="0" err="1">
-                <a:solidFill>
-                  <a:schemeClr val="tx1"/>
-                </a:solidFill>
-              </a:rPr>
-              <a:t>java.util.LinkedList</a:t>
-            </a:r>
-            <a:endParaRPr lang="en-US" dirty="0">
-              <a:solidFill>
-                <a:schemeClr val="tx1"/>
-              </a:solidFill>
-            </a:endParaRPr>
-          </a:p>
-          <a:p>
-            <a:pPr>
-              <a:defRPr/>
-            </a:pPr>
-            <a:r>
-              <a:rPr lang="en-US" dirty="0" err="1">
-                <a:solidFill>
-                  <a:schemeClr val="tx1"/>
-                </a:solidFill>
-              </a:rPr>
-              <a:t>java.util.concurrent.CopyonWriteArrayList</a:t>
-            </a:r>
-            <a:endParaRPr lang="en-US" dirty="0">
-              <a:solidFill>
-                <a:schemeClr val="tx1"/>
-              </a:solidFill>
-            </a:endParaRPr>
-          </a:p>
-          <a:p>
-            <a:pPr>
-              <a:defRPr/>
-            </a:pPr>
-            <a:r>
-              <a:rPr lang="en-US" dirty="0" err="1">
-                <a:solidFill>
-                  <a:schemeClr val="tx1"/>
-                </a:solidFill>
-              </a:rPr>
-              <a:t>java.util.Vector</a:t>
-            </a:r>
-            <a:endParaRPr lang="en-US" dirty="0">
-              <a:solidFill>
-                <a:schemeClr val="tx1"/>
-              </a:solidFill>
-            </a:endParaRPr>
-          </a:p>
-          <a:p>
-            <a:pPr>
-              <a:defRPr/>
-            </a:pPr>
-            <a:endParaRPr lang="en-US" dirty="0">
-              <a:solidFill>
-                <a:schemeClr val="tx1"/>
-              </a:solidFill>
-            </a:endParaRPr>
-          </a:p>
-        </p:txBody>
-      </p:sp>
-    </p:spTree>
-    <p:extLst>
-      <p:ext uri="{BB962C8B-B14F-4D97-AF65-F5344CB8AC3E}">
-        <p14:creationId xmlns:p14="http://schemas.microsoft.com/office/powerpoint/2010/main" val="1037063627"/>
       </p:ext>
     </p:extLst>
   </p:cSld>
@@ -14067,30 +13892,17 @@
         <p:spPr>
           <a:xfrm>
             <a:off x="936516" y="810202"/>
-            <a:ext cx="4873565" cy="670641"/>
+            <a:ext cx="3453413" cy="670641"/>
           </a:xfrm>
         </p:spPr>
         <p:txBody>
-          <a:bodyPr>
-            <a:normAutofit fontScale="90000"/>
-          </a:bodyPr>
+          <a:bodyPr/>
           <a:lstStyle/>
           <a:p>
-            <a:r>
-              <a:rPr lang="en-US" altLang="en-US" dirty="0" err="1"/>
-              <a:t>ArrayList</a:t>
-            </a:r>
+            <a:pPr eaLnBrk="1" hangingPunct="1"/>
             <a:r>
               <a:rPr lang="en-US" altLang="en-US" dirty="0"/>
-              <a:t> or </a:t>
-            </a:r>
-            <a:r>
-              <a:rPr lang="en-US" altLang="en-US" dirty="0" err="1"/>
-              <a:t>LinkedList</a:t>
-            </a:r>
-            <a:r>
-              <a:rPr lang="en-US" altLang="en-US" dirty="0"/>
-              <a:t>:</a:t>
+              <a:t>Lists</a:t>
             </a:r>
           </a:p>
         </p:txBody>
@@ -14133,18 +13945,13 @@
               <a:defRPr/>
             </a:pPr>
             <a:r>
-              <a:rPr lang="en-US" b="1" dirty="0" err="1">
+              <a:rPr lang="en-US" b="1" dirty="0">
                 <a:solidFill>
                   <a:schemeClr val="tx1"/>
                 </a:solidFill>
               </a:rPr>
-              <a:t>ArraList</a:t>
-            </a:r>
-            <a:endParaRPr lang="en-US" b="1" dirty="0">
-              <a:solidFill>
-                <a:schemeClr val="tx1"/>
-              </a:solidFill>
-            </a:endParaRPr>
+              <a:t>Important:</a:t>
+            </a:r>
           </a:p>
           <a:p>
             <a:pPr>
@@ -14156,69 +13963,25 @@
                   <a:schemeClr val="tx1"/>
                 </a:solidFill>
               </a:rPr>
-              <a:t>Access to an element: </a:t>
-            </a:r>
-            <a:r>
-              <a:rPr lang="en-US" b="1" dirty="0">
-                <a:solidFill>
-                  <a:srgbClr val="92D050"/>
-                </a:solidFill>
-              </a:rPr>
-              <a:t>fast</a:t>
-            </a:r>
+              <a:t>Lists memorize the sequence</a:t>
+            </a:r>
+          </a:p>
+          <a:p>
+            <a:pPr>
+              <a:defRPr/>
+            </a:pPr>
             <a:r>
               <a:rPr lang="en-US" dirty="0">
                 <a:solidFill>
                   <a:schemeClr val="tx1"/>
                 </a:solidFill>
               </a:rPr>
-              <a:t> </a:t>
-            </a:r>
-          </a:p>
-          <a:p>
-            <a:pPr>
-              <a:defRPr/>
-            </a:pPr>
-            <a:r>
-              <a:rPr lang="en-US" dirty="0">
-                <a:solidFill>
-                  <a:schemeClr val="tx1"/>
-                </a:solidFill>
-              </a:rPr>
-              <a:t>Add or delete element in the middle: </a:t>
-            </a:r>
-            <a:r>
-              <a:rPr lang="en-US" b="1" dirty="0">
-                <a:solidFill>
-                  <a:srgbClr val="FF0000"/>
-                </a:solidFill>
-              </a:rPr>
-              <a:t>slow</a:t>
-            </a:r>
-          </a:p>
-          <a:p>
-            <a:pPr>
-              <a:defRPr/>
-            </a:pPr>
-            <a:r>
-              <a:rPr lang="en-US" dirty="0">
-                <a:solidFill>
-                  <a:schemeClr val="tx1"/>
-                </a:solidFill>
-              </a:rPr>
-              <a:t>Size of an array can be too </a:t>
-            </a:r>
-            <a:r>
-              <a:rPr lang="en-US" b="1" dirty="0">
-                <a:solidFill>
-                  <a:srgbClr val="FF0000"/>
-                </a:solidFill>
-              </a:rPr>
-              <a:t>small</a:t>
-            </a:r>
-          </a:p>
-          <a:p>
-            <a:pPr>
+              <a:t>Elements can be double or triple </a:t>
+            </a:r>
+          </a:p>
+          <a:p>
+            <a:pPr marL="0" indent="0">
+              <a:buNone/>
               <a:defRPr/>
             </a:pPr>
             <a:endParaRPr lang="en-US" dirty="0">
@@ -14233,67 +13996,88 @@
               <a:defRPr/>
             </a:pPr>
             <a:r>
-              <a:rPr lang="en-US" b="1" dirty="0" err="1">
+              <a:rPr lang="en-US" b="1" dirty="0">
                 <a:solidFill>
                   <a:schemeClr val="tx1"/>
                 </a:solidFill>
               </a:rPr>
-              <a:t>LinkedList</a:t>
-            </a:r>
-            <a:r>
-              <a:rPr lang="en-US" b="1" dirty="0">
+              <a:t>List elements:</a:t>
+            </a:r>
+          </a:p>
+          <a:p>
+            <a:pPr>
+              <a:defRPr/>
+            </a:pPr>
+            <a:r>
+              <a:rPr lang="en-US" dirty="0" err="1">
                 <a:solidFill>
                   <a:schemeClr val="tx1"/>
                 </a:solidFill>
               </a:rPr>
-              <a:t>:</a:t>
-            </a:r>
+              <a:t>java.util.ArrayList</a:t>
+            </a:r>
+            <a:endParaRPr lang="en-US" dirty="0">
+              <a:solidFill>
+                <a:schemeClr val="tx1"/>
+              </a:solidFill>
+            </a:endParaRPr>
           </a:p>
           <a:p>
             <a:pPr>
               <a:defRPr/>
             </a:pPr>
             <a:r>
-              <a:rPr lang="en-US" dirty="0">
+              <a:rPr lang="en-US" dirty="0" err="1">
                 <a:solidFill>
                   <a:schemeClr val="tx1"/>
                 </a:solidFill>
               </a:rPr>
-              <a:t>Access to an element: </a:t>
-            </a:r>
-            <a:r>
-              <a:rPr lang="en-US" b="1" dirty="0">
-                <a:solidFill>
-                  <a:srgbClr val="FF0000"/>
-                </a:solidFill>
-              </a:rPr>
-              <a:t>slow</a:t>
-            </a:r>
+              <a:t>java.util.LinkedList</a:t>
+            </a:r>
+            <a:endParaRPr lang="en-US" dirty="0">
+              <a:solidFill>
+                <a:schemeClr val="tx1"/>
+              </a:solidFill>
+            </a:endParaRPr>
           </a:p>
           <a:p>
             <a:pPr>
               <a:defRPr/>
             </a:pPr>
             <a:r>
-              <a:rPr lang="en-US" dirty="0">
+              <a:rPr lang="en-US" dirty="0" err="1">
                 <a:solidFill>
                   <a:schemeClr val="tx1"/>
                 </a:solidFill>
               </a:rPr>
-              <a:t>Add or delete element in the middle: </a:t>
-            </a:r>
-            <a:r>
-              <a:rPr lang="en-US" b="1" dirty="0">
-                <a:solidFill>
-                  <a:srgbClr val="92D050"/>
-                </a:solidFill>
-              </a:rPr>
-              <a:t>fast</a:t>
-            </a:r>
-          </a:p>
-          <a:p>
-            <a:pPr marL="0" indent="0">
-              <a:buNone/>
+              <a:t>java.util.concurrent.CopyonWriteArrayList</a:t>
+            </a:r>
+            <a:endParaRPr lang="en-US" dirty="0">
+              <a:solidFill>
+                <a:schemeClr val="tx1"/>
+              </a:solidFill>
+            </a:endParaRPr>
+          </a:p>
+          <a:p>
+            <a:pPr>
+              <a:defRPr/>
+            </a:pPr>
+            <a:r>
+              <a:rPr lang="en-US" dirty="0" err="1">
+                <a:solidFill>
+                  <a:schemeClr val="tx1"/>
+                </a:solidFill>
+              </a:rPr>
+              <a:t>java.util.Vector</a:t>
+            </a:r>
+            <a:endParaRPr lang="en-US" dirty="0">
+              <a:solidFill>
+                <a:schemeClr val="tx1"/>
+              </a:solidFill>
+            </a:endParaRPr>
+          </a:p>
+          <a:p>
+            <a:pPr>
               <a:defRPr/>
             </a:pPr>
             <a:endParaRPr lang="en-US" dirty="0">
@@ -14307,7 +14091,7 @@
     </p:spTree>
     <p:extLst>
       <p:ext uri="{BB962C8B-B14F-4D97-AF65-F5344CB8AC3E}">
-        <p14:creationId xmlns:p14="http://schemas.microsoft.com/office/powerpoint/2010/main" val="3152802886"/>
+        <p14:creationId xmlns:p14="http://schemas.microsoft.com/office/powerpoint/2010/main" val="1037063627"/>
       </p:ext>
     </p:extLst>
   </p:cSld>
@@ -14347,17 +14131,30 @@
         <p:spPr>
           <a:xfrm>
             <a:off x="936516" y="810202"/>
-            <a:ext cx="3453413" cy="670641"/>
+            <a:ext cx="4873565" cy="670641"/>
           </a:xfrm>
         </p:spPr>
         <p:txBody>
-          <a:bodyPr/>
+          <a:bodyPr>
+            <a:normAutofit fontScale="90000"/>
+          </a:bodyPr>
           <a:lstStyle/>
           <a:p>
-            <a:pPr eaLnBrk="1" hangingPunct="1"/>
+            <a:r>
+              <a:rPr lang="en-US" altLang="en-US" dirty="0" err="1"/>
+              <a:t>ArrayList</a:t>
+            </a:r>
             <a:r>
               <a:rPr lang="en-US" altLang="en-US" dirty="0"/>
-              <a:t>Interface List</a:t>
+              <a:t> or </a:t>
+            </a:r>
+            <a:r>
+              <a:rPr lang="en-US" altLang="en-US" dirty="0" err="1"/>
+              <a:t>LinkedList</a:t>
+            </a:r>
+            <a:r>
+              <a:rPr lang="en-US" altLang="en-US" dirty="0"/>
+              <a:t>:</a:t>
             </a:r>
           </a:p>
         </p:txBody>
@@ -14400,12 +14197,88 @@
               <a:defRPr/>
             </a:pPr>
             <a:r>
+              <a:rPr lang="en-US" b="1" dirty="0" err="1">
+                <a:solidFill>
+                  <a:schemeClr val="tx1"/>
+                </a:solidFill>
+              </a:rPr>
+              <a:t>ArraList</a:t>
+            </a:r>
+            <a:endParaRPr lang="en-US" b="1" dirty="0">
+              <a:solidFill>
+                <a:schemeClr val="tx1"/>
+              </a:solidFill>
+            </a:endParaRPr>
+          </a:p>
+          <a:p>
+            <a:pPr>
+              <a:defRPr/>
+            </a:pPr>
+            <a:r>
+              <a:rPr lang="en-US" dirty="0">
+                <a:solidFill>
+                  <a:schemeClr val="tx1"/>
+                </a:solidFill>
+              </a:rPr>
+              <a:t>Access to an element: </a:t>
+            </a:r>
+            <a:r>
               <a:rPr lang="en-US" b="1" dirty="0">
                 <a:solidFill>
+                  <a:srgbClr val="92D050"/>
+                </a:solidFill>
+              </a:rPr>
+              <a:t>fast</a:t>
+            </a:r>
+            <a:r>
+              <a:rPr lang="en-US" dirty="0">
+                <a:solidFill>
                   <a:schemeClr val="tx1"/>
                 </a:solidFill>
               </a:rPr>
-              <a:t>List:</a:t>
+              <a:t> </a:t>
+            </a:r>
+          </a:p>
+          <a:p>
+            <a:pPr>
+              <a:defRPr/>
+            </a:pPr>
+            <a:r>
+              <a:rPr lang="en-US" dirty="0">
+                <a:solidFill>
+                  <a:schemeClr val="tx1"/>
+                </a:solidFill>
+              </a:rPr>
+              <a:t>Add or delete element in the middle: </a:t>
+            </a:r>
+            <a:r>
+              <a:rPr lang="en-US" b="1" dirty="0">
+                <a:solidFill>
+                  <a:srgbClr val="FF0000"/>
+                </a:solidFill>
+              </a:rPr>
+              <a:t>slow</a:t>
+            </a:r>
+          </a:p>
+          <a:p>
+            <a:pPr>
+              <a:defRPr/>
+            </a:pPr>
+            <a:r>
+              <a:rPr lang="en-US" dirty="0">
+                <a:solidFill>
+                  <a:schemeClr val="tx1"/>
+                </a:solidFill>
+              </a:rPr>
+              <a:t>Size of an array can be too </a:t>
+            </a:r>
+            <a:r>
+              <a:rPr lang="en-US" b="1" dirty="0">
+                <a:solidFill>
+                  <a:srgbClr val="FF0000"/>
+                </a:solidFill>
+              </a:rPr>
+              <a:t>small</a:t>
             </a:r>
           </a:p>
           <a:p>
@@ -14419,6 +14292,28 @@
             </a:endParaRPr>
           </a:p>
           <a:p>
+            <a:pPr marL="0" indent="0">
+              <a:buNone/>
+              <a:defRPr/>
+            </a:pPr>
+            <a:r>
+              <a:rPr lang="en-US" b="1" dirty="0" err="1">
+                <a:solidFill>
+                  <a:schemeClr val="tx1"/>
+                </a:solidFill>
+              </a:rPr>
+              <a:t>LinkedList</a:t>
+            </a:r>
+            <a:r>
+              <a:rPr lang="en-US" b="1" dirty="0">
+                <a:solidFill>
+                  <a:schemeClr val="tx1"/>
+                </a:solidFill>
+              </a:rPr>
+              <a:t>:</a:t>
+            </a:r>
+          </a:p>
+          <a:p>
             <a:pPr>
               <a:defRPr/>
             </a:pPr>
@@ -14428,116 +14323,41 @@
                   <a:schemeClr val="tx1"/>
                 </a:solidFill>
               </a:rPr>
-              <a:t>Use always the interface </a:t>
-            </a:r>
-            <a:br>
+              <a:t>Access to an element: </a:t>
+            </a:r>
+            <a:r>
+              <a:rPr lang="en-US" b="1" dirty="0">
+                <a:solidFill>
+                  <a:srgbClr val="FF0000"/>
+                </a:solidFill>
+              </a:rPr>
+              <a:t>slow</a:t>
+            </a:r>
+          </a:p>
+          <a:p>
+            <a:pPr>
+              <a:defRPr/>
+            </a:pPr>
+            <a:r>
               <a:rPr lang="en-US" dirty="0">
                 <a:solidFill>
                   <a:schemeClr val="tx1"/>
                 </a:solidFill>
               </a:rPr>
-            </a:br>
-            <a:r>
-              <a:rPr lang="en-US" dirty="0">
-                <a:solidFill>
-                  <a:schemeClr val="tx1"/>
-                </a:solidFill>
-              </a:rPr>
-              <a:t>when working with lists</a:t>
-            </a:r>
-          </a:p>
-          <a:p>
-            <a:pPr lvl="1">
-              <a:defRPr/>
-            </a:pPr>
-            <a:r>
-              <a:rPr lang="en-US" dirty="0">
-                <a:solidFill>
-                  <a:schemeClr val="tx1"/>
-                </a:solidFill>
-              </a:rPr>
-              <a:t>List </a:t>
-            </a:r>
-            <a:r>
-              <a:rPr lang="en-US" dirty="0" err="1">
-                <a:solidFill>
-                  <a:schemeClr val="tx1"/>
-                </a:solidFill>
-              </a:rPr>
-              <a:t>myList</a:t>
-            </a:r>
-            <a:r>
-              <a:rPr lang="en-US" dirty="0">
-                <a:solidFill>
-                  <a:schemeClr val="tx1"/>
-                </a:solidFill>
-              </a:rPr>
-              <a:t>=new </a:t>
-            </a:r>
-            <a:r>
-              <a:rPr lang="en-US" dirty="0" err="1">
-                <a:solidFill>
-                  <a:schemeClr val="tx1"/>
-                </a:solidFill>
-              </a:rPr>
-              <a:t>ArrayList</a:t>
-            </a:r>
-            <a:r>
-              <a:rPr lang="en-US" dirty="0">
-                <a:solidFill>
-                  <a:schemeClr val="tx1"/>
-                </a:solidFill>
-              </a:rPr>
-              <a:t>();</a:t>
-            </a:r>
-          </a:p>
-          <a:p>
-            <a:pPr lvl="1">
-              <a:defRPr/>
-            </a:pPr>
-            <a:r>
-              <a:rPr lang="en-US" dirty="0">
-                <a:solidFill>
-                  <a:schemeClr val="tx1"/>
-                </a:solidFill>
-              </a:rPr>
-              <a:t>List </a:t>
-            </a:r>
-            <a:r>
-              <a:rPr lang="en-US" dirty="0" err="1">
-                <a:solidFill>
-                  <a:schemeClr val="tx1"/>
-                </a:solidFill>
-              </a:rPr>
-              <a:t>myList</a:t>
-            </a:r>
-            <a:r>
-              <a:rPr lang="en-US" dirty="0">
-                <a:solidFill>
-                  <a:schemeClr val="tx1"/>
-                </a:solidFill>
-              </a:rPr>
-              <a:t>=new </a:t>
-            </a:r>
-            <a:r>
-              <a:rPr lang="en-US" dirty="0" err="1">
-                <a:solidFill>
-                  <a:schemeClr val="tx1"/>
-                </a:solidFill>
-              </a:rPr>
-              <a:t>LinkedList</a:t>
-            </a:r>
-            <a:r>
-              <a:rPr lang="en-US" dirty="0">
-                <a:solidFill>
-                  <a:schemeClr val="tx1"/>
-                </a:solidFill>
-              </a:rPr>
-              <a:t>();</a:t>
-            </a:r>
-          </a:p>
-          <a:p>
-            <a:pPr>
+              <a:t>Add or delete element in the middle: </a:t>
+            </a:r>
+            <a:r>
+              <a:rPr lang="en-US" b="1" dirty="0">
+                <a:solidFill>
+                  <a:srgbClr val="92D050"/>
+                </a:solidFill>
+              </a:rPr>
+              <a:t>fast</a:t>
+            </a:r>
+          </a:p>
+          <a:p>
+            <a:pPr marL="0" indent="0">
+              <a:buNone/>
               <a:defRPr/>
             </a:pPr>
             <a:endParaRPr lang="en-US" dirty="0">
@@ -14546,384 +14366,12 @@
               </a:solidFill>
             </a:endParaRPr>
           </a:p>
-          <a:p>
-            <a:pPr>
-              <a:defRPr/>
-            </a:pPr>
-            <a:r>
-              <a:rPr lang="en-US" dirty="0">
-                <a:solidFill>
-                  <a:schemeClr val="tx1"/>
-                </a:solidFill>
-              </a:rPr>
-              <a:t>To switch the list implementation, </a:t>
-            </a:r>
-            <a:br>
-              <a:rPr lang="en-US" dirty="0">
-                <a:solidFill>
-                  <a:schemeClr val="tx1"/>
-                </a:solidFill>
-              </a:rPr>
-            </a:br>
-            <a:r>
-              <a:rPr lang="en-US" b="1" dirty="0">
-                <a:solidFill>
-                  <a:srgbClr val="00B050"/>
-                </a:solidFill>
-              </a:rPr>
-              <a:t>only one line needs to be changed</a:t>
-            </a:r>
-          </a:p>
-          <a:p>
-            <a:pPr>
-              <a:defRPr/>
-            </a:pPr>
-            <a:endParaRPr lang="en-US" dirty="0">
-              <a:solidFill>
-                <a:schemeClr val="tx1"/>
-              </a:solidFill>
-            </a:endParaRPr>
-          </a:p>
-          <a:p>
-            <a:pPr>
-              <a:defRPr/>
-            </a:pPr>
-            <a:endParaRPr lang="en-US" dirty="0">
-              <a:solidFill>
-                <a:schemeClr val="tx1"/>
-              </a:solidFill>
-            </a:endParaRPr>
-          </a:p>
-        </p:txBody>
-      </p:sp>
-      <p:pic>
-        <p:nvPicPr>
-          <p:cNvPr id="2" name="Picture 1"/>
-          <p:cNvPicPr>
-            <a:picLocks noChangeAspect="1"/>
-          </p:cNvPicPr>
-          <p:nvPr/>
-        </p:nvPicPr>
-        <p:blipFill>
-          <a:blip r:embed="rId2"/>
-          <a:stretch>
-            <a:fillRect/>
-          </a:stretch>
-        </p:blipFill>
-        <p:spPr>
-          <a:xfrm>
-            <a:off x="6643334" y="765695"/>
-            <a:ext cx="2880991" cy="5825162"/>
-          </a:xfrm>
-          <a:prstGeom prst="rect">
-            <a:avLst/>
-          </a:prstGeom>
-        </p:spPr>
-      </p:pic>
-      <p:sp>
-        <p:nvSpPr>
-          <p:cNvPr id="4" name="Rectangle 3"/>
-          <p:cNvSpPr/>
-          <p:nvPr/>
-        </p:nvSpPr>
-        <p:spPr>
-          <a:xfrm>
-            <a:off x="6643334" y="789473"/>
-            <a:ext cx="2880991" cy="606403"/>
-          </a:xfrm>
-          <a:prstGeom prst="rect">
-            <a:avLst/>
-          </a:prstGeom>
-          <a:noFill/>
-          <a:ln>
-            <a:solidFill>
-              <a:srgbClr val="92D050"/>
-            </a:solidFill>
-          </a:ln>
-        </p:spPr>
-        <p:style>
-          <a:lnRef idx="2">
-            <a:schemeClr val="accent1">
-              <a:shade val="50000"/>
-            </a:schemeClr>
-          </a:lnRef>
-          <a:fillRef idx="1">
-            <a:schemeClr val="accent1"/>
-          </a:fillRef>
-          <a:effectRef idx="0">
-            <a:schemeClr val="accent1"/>
-          </a:effectRef>
-          <a:fontRef idx="minor">
-            <a:schemeClr val="lt1"/>
-          </a:fontRef>
-        </p:style>
-        <p:txBody>
-          <a:bodyPr rtlCol="0" anchor="ctr"/>
-          <a:lstStyle/>
-          <a:p>
-            <a:pPr marL="0" marR="0" lvl="0" indent="0" algn="ctr" defTabSz="914400" rtl="0" eaLnBrk="1" fontAlgn="auto" latinLnBrk="0" hangingPunct="1">
-              <a:lnSpc>
-                <a:spcPct val="100000"/>
-              </a:lnSpc>
-              <a:spcBef>
-                <a:spcPts val="0"/>
-              </a:spcBef>
-              <a:spcAft>
-                <a:spcPts val="0"/>
-              </a:spcAft>
-              <a:buClrTx/>
-              <a:buSzTx/>
-              <a:buFontTx/>
-              <a:buNone/>
-              <a:tabLst/>
-              <a:defRPr/>
-            </a:pPr>
-            <a:endParaRPr kumimoji="0" lang="en-US" sz="1800" b="0" i="0" u="none" strike="noStrike" kern="1200" cap="none" spc="0" normalizeH="0" baseline="0" noProof="0">
-              <a:ln>
-                <a:noFill/>
-              </a:ln>
-              <a:solidFill>
-                <a:srgbClr val="FFFFFF"/>
-              </a:solidFill>
-              <a:effectLst/>
-              <a:uLnTx/>
-              <a:uFillTx/>
-              <a:latin typeface="Arial" panose="020B0604020202020204"/>
-              <a:ea typeface="+mn-ea"/>
-              <a:cs typeface="+mn-cs"/>
-            </a:endParaRPr>
-          </a:p>
-        </p:txBody>
-      </p:sp>
-      <p:sp>
-        <p:nvSpPr>
-          <p:cNvPr id="6" name="Rectangle 5"/>
-          <p:cNvSpPr/>
-          <p:nvPr/>
-        </p:nvSpPr>
-        <p:spPr>
-          <a:xfrm>
-            <a:off x="6643334" y="2111172"/>
-            <a:ext cx="2880991" cy="308347"/>
-          </a:xfrm>
-          <a:prstGeom prst="rect">
-            <a:avLst/>
-          </a:prstGeom>
-          <a:noFill/>
-          <a:ln>
-            <a:solidFill>
-              <a:srgbClr val="92D050"/>
-            </a:solidFill>
-          </a:ln>
-        </p:spPr>
-        <p:style>
-          <a:lnRef idx="2">
-            <a:schemeClr val="accent1">
-              <a:shade val="50000"/>
-            </a:schemeClr>
-          </a:lnRef>
-          <a:fillRef idx="1">
-            <a:schemeClr val="accent1"/>
-          </a:fillRef>
-          <a:effectRef idx="0">
-            <a:schemeClr val="accent1"/>
-          </a:effectRef>
-          <a:fontRef idx="minor">
-            <a:schemeClr val="lt1"/>
-          </a:fontRef>
-        </p:style>
-        <p:txBody>
-          <a:bodyPr rtlCol="0" anchor="ctr"/>
-          <a:lstStyle/>
-          <a:p>
-            <a:pPr marL="0" marR="0" lvl="0" indent="0" algn="ctr" defTabSz="914400" rtl="0" eaLnBrk="1" fontAlgn="auto" latinLnBrk="0" hangingPunct="1">
-              <a:lnSpc>
-                <a:spcPct val="100000"/>
-              </a:lnSpc>
-              <a:spcBef>
-                <a:spcPts val="0"/>
-              </a:spcBef>
-              <a:spcAft>
-                <a:spcPts val="0"/>
-              </a:spcAft>
-              <a:buClrTx/>
-              <a:buSzTx/>
-              <a:buFontTx/>
-              <a:buNone/>
-              <a:tabLst/>
-              <a:defRPr/>
-            </a:pPr>
-            <a:endParaRPr kumimoji="0" lang="en-US" sz="1800" b="0" i="0" u="none" strike="noStrike" kern="1200" cap="none" spc="0" normalizeH="0" baseline="0" noProof="0">
-              <a:ln>
-                <a:noFill/>
-              </a:ln>
-              <a:solidFill>
-                <a:srgbClr val="FFFFFF"/>
-              </a:solidFill>
-              <a:effectLst/>
-              <a:uLnTx/>
-              <a:uFillTx/>
-              <a:latin typeface="Arial" panose="020B0604020202020204"/>
-              <a:ea typeface="+mn-ea"/>
-              <a:cs typeface="+mn-cs"/>
-            </a:endParaRPr>
-          </a:p>
-        </p:txBody>
-      </p:sp>
-      <p:sp>
-        <p:nvSpPr>
-          <p:cNvPr id="7" name="Rectangle 6"/>
-          <p:cNvSpPr/>
-          <p:nvPr/>
-        </p:nvSpPr>
-        <p:spPr>
-          <a:xfrm>
-            <a:off x="6643334" y="2525834"/>
-            <a:ext cx="2880991" cy="884959"/>
-          </a:xfrm>
-          <a:prstGeom prst="rect">
-            <a:avLst/>
-          </a:prstGeom>
-          <a:noFill/>
-          <a:ln>
-            <a:solidFill>
-              <a:srgbClr val="92D050"/>
-            </a:solidFill>
-          </a:ln>
-        </p:spPr>
-        <p:style>
-          <a:lnRef idx="2">
-            <a:schemeClr val="accent1">
-              <a:shade val="50000"/>
-            </a:schemeClr>
-          </a:lnRef>
-          <a:fillRef idx="1">
-            <a:schemeClr val="accent1"/>
-          </a:fillRef>
-          <a:effectRef idx="0">
-            <a:schemeClr val="accent1"/>
-          </a:effectRef>
-          <a:fontRef idx="minor">
-            <a:schemeClr val="lt1"/>
-          </a:fontRef>
-        </p:style>
-        <p:txBody>
-          <a:bodyPr rtlCol="0" anchor="ctr"/>
-          <a:lstStyle/>
-          <a:p>
-            <a:pPr marL="0" marR="0" lvl="0" indent="0" algn="ctr" defTabSz="914400" rtl="0" eaLnBrk="1" fontAlgn="auto" latinLnBrk="0" hangingPunct="1">
-              <a:lnSpc>
-                <a:spcPct val="100000"/>
-              </a:lnSpc>
-              <a:spcBef>
-                <a:spcPts val="0"/>
-              </a:spcBef>
-              <a:spcAft>
-                <a:spcPts val="0"/>
-              </a:spcAft>
-              <a:buClrTx/>
-              <a:buSzTx/>
-              <a:buFontTx/>
-              <a:buNone/>
-              <a:tabLst/>
-              <a:defRPr/>
-            </a:pPr>
-            <a:endParaRPr kumimoji="0" lang="en-US" sz="1800" b="0" i="0" u="none" strike="noStrike" kern="1200" cap="none" spc="0" normalizeH="0" baseline="0" noProof="0">
-              <a:ln>
-                <a:noFill/>
-              </a:ln>
-              <a:solidFill>
-                <a:srgbClr val="FFFFFF"/>
-              </a:solidFill>
-              <a:effectLst/>
-              <a:uLnTx/>
-              <a:uFillTx/>
-              <a:latin typeface="Arial" panose="020B0604020202020204"/>
-              <a:ea typeface="+mn-ea"/>
-              <a:cs typeface="+mn-cs"/>
-            </a:endParaRPr>
-          </a:p>
-        </p:txBody>
-      </p:sp>
-      <p:sp>
-        <p:nvSpPr>
-          <p:cNvPr id="8" name="Rectangle 7"/>
-          <p:cNvSpPr/>
-          <p:nvPr/>
-        </p:nvSpPr>
-        <p:spPr>
-          <a:xfrm>
-            <a:off x="6646031" y="3855377"/>
-            <a:ext cx="2880991" cy="1412538"/>
-          </a:xfrm>
-          <a:prstGeom prst="rect">
-            <a:avLst/>
-          </a:prstGeom>
-          <a:noFill/>
-          <a:ln>
-            <a:solidFill>
-              <a:srgbClr val="92D050"/>
-            </a:solidFill>
-          </a:ln>
-        </p:spPr>
-        <p:style>
-          <a:lnRef idx="2">
-            <a:schemeClr val="accent1">
-              <a:shade val="50000"/>
-            </a:schemeClr>
-          </a:lnRef>
-          <a:fillRef idx="1">
-            <a:schemeClr val="accent1"/>
-          </a:fillRef>
-          <a:effectRef idx="0">
-            <a:schemeClr val="accent1"/>
-          </a:effectRef>
-          <a:fontRef idx="minor">
-            <a:schemeClr val="lt1"/>
-          </a:fontRef>
-        </p:style>
-        <p:txBody>
-          <a:bodyPr rtlCol="0" anchor="ctr"/>
-          <a:lstStyle/>
-          <a:p>
-            <a:pPr marL="0" marR="0" lvl="0" indent="0" algn="ctr" defTabSz="914400" rtl="0" eaLnBrk="1" fontAlgn="auto" latinLnBrk="0" hangingPunct="1">
-              <a:lnSpc>
-                <a:spcPct val="100000"/>
-              </a:lnSpc>
-              <a:spcBef>
-                <a:spcPts val="0"/>
-              </a:spcBef>
-              <a:spcAft>
-                <a:spcPts val="0"/>
-              </a:spcAft>
-              <a:buClrTx/>
-              <a:buSzTx/>
-              <a:buFontTx/>
-              <a:buNone/>
-              <a:tabLst/>
-              <a:defRPr/>
-            </a:pPr>
-            <a:endParaRPr kumimoji="0" lang="en-US" sz="1800" b="0" i="0" u="none" strike="noStrike" kern="1200" cap="none" spc="0" normalizeH="0" baseline="0" noProof="0">
-              <a:ln>
-                <a:noFill/>
-              </a:ln>
-              <a:solidFill>
-                <a:srgbClr val="FFFFFF"/>
-              </a:solidFill>
-              <a:effectLst/>
-              <a:uLnTx/>
-              <a:uFillTx/>
-              <a:latin typeface="Arial" panose="020B0604020202020204"/>
-              <a:ea typeface="+mn-ea"/>
-              <a:cs typeface="+mn-cs"/>
-            </a:endParaRPr>
-          </a:p>
         </p:txBody>
       </p:sp>
     </p:spTree>
     <p:extLst>
       <p:ext uri="{BB962C8B-B14F-4D97-AF65-F5344CB8AC3E}">
-        <p14:creationId xmlns:p14="http://schemas.microsoft.com/office/powerpoint/2010/main" val="3400033194"/>
+        <p14:creationId xmlns:p14="http://schemas.microsoft.com/office/powerpoint/2010/main" val="3152802886"/>
       </p:ext>
     </p:extLst>
   </p:cSld>
@@ -15168,6 +14616,268 @@
           <a:chExt cx="0" cy="0"/>
         </a:xfrm>
       </p:grpSpPr>
+      <p:sp>
+        <p:nvSpPr>
+          <p:cNvPr id="14338" name="Title 1"/>
+          <p:cNvSpPr>
+            <a:spLocks noGrp="1"/>
+          </p:cNvSpPr>
+          <p:nvPr>
+            <p:ph type="title"/>
+          </p:nvPr>
+        </p:nvSpPr>
+        <p:spPr>
+          <a:xfrm>
+            <a:off x="936516" y="810202"/>
+            <a:ext cx="3453413" cy="670641"/>
+          </a:xfrm>
+        </p:spPr>
+        <p:txBody>
+          <a:bodyPr/>
+          <a:lstStyle/>
+          <a:p>
+            <a:pPr eaLnBrk="1" hangingPunct="1"/>
+            <a:r>
+              <a:rPr lang="en-US" altLang="en-US" dirty="0"/>
+              <a:t>Interface List</a:t>
+            </a:r>
+          </a:p>
+        </p:txBody>
+      </p:sp>
+      <p:sp>
+        <p:nvSpPr>
+          <p:cNvPr id="3" name="Content Placeholder 2"/>
+          <p:cNvSpPr>
+            <a:spLocks noGrp="1"/>
+          </p:cNvSpPr>
+          <p:nvPr>
+            <p:ph idx="1"/>
+          </p:nvPr>
+        </p:nvSpPr>
+        <p:spPr>
+          <a:xfrm>
+            <a:off x="936516" y="1656365"/>
+            <a:ext cx="10400426" cy="4995287"/>
+          </a:xfrm>
+        </p:spPr>
+        <p:txBody>
+          <a:bodyPr rtlCol="0">
+            <a:normAutofit/>
+          </a:bodyPr>
+          <a:lstStyle/>
+          <a:p>
+            <a:pPr marL="0" indent="0">
+              <a:buNone/>
+              <a:defRPr/>
+            </a:pPr>
+            <a:endParaRPr lang="en-US" b="1" dirty="0">
+              <a:solidFill>
+                <a:schemeClr val="tx1"/>
+              </a:solidFill>
+            </a:endParaRPr>
+          </a:p>
+          <a:p>
+            <a:pPr marL="0" indent="0">
+              <a:buNone/>
+              <a:defRPr/>
+            </a:pPr>
+            <a:r>
+              <a:rPr lang="en-US" b="1" dirty="0">
+                <a:solidFill>
+                  <a:schemeClr val="tx1"/>
+                </a:solidFill>
+              </a:rPr>
+              <a:t>List:</a:t>
+            </a:r>
+          </a:p>
+          <a:p>
+            <a:pPr>
+              <a:defRPr/>
+            </a:pPr>
+            <a:endParaRPr lang="en-US" dirty="0">
+              <a:solidFill>
+                <a:schemeClr val="tx1"/>
+              </a:solidFill>
+            </a:endParaRPr>
+          </a:p>
+          <a:p>
+            <a:pPr>
+              <a:defRPr/>
+            </a:pPr>
+            <a:r>
+              <a:rPr lang="en-US" dirty="0">
+                <a:solidFill>
+                  <a:schemeClr val="tx1"/>
+                </a:solidFill>
+              </a:rPr>
+              <a:t>Use always the interface </a:t>
+            </a:r>
+            <a:br>
+              <a:rPr lang="en-US" dirty="0">
+                <a:solidFill>
+                  <a:schemeClr val="tx1"/>
+                </a:solidFill>
+              </a:rPr>
+            </a:br>
+            <a:r>
+              <a:rPr lang="en-US" dirty="0">
+                <a:solidFill>
+                  <a:schemeClr val="tx1"/>
+                </a:solidFill>
+              </a:rPr>
+              <a:t>when working with lists</a:t>
+            </a:r>
+          </a:p>
+          <a:p>
+            <a:pPr lvl="1">
+              <a:defRPr/>
+            </a:pPr>
+            <a:r>
+              <a:rPr lang="en-US" dirty="0">
+                <a:solidFill>
+                  <a:schemeClr val="tx1"/>
+                </a:solidFill>
+              </a:rPr>
+              <a:t>List </a:t>
+            </a:r>
+            <a:r>
+              <a:rPr lang="en-US" dirty="0" err="1">
+                <a:solidFill>
+                  <a:schemeClr val="tx1"/>
+                </a:solidFill>
+              </a:rPr>
+              <a:t>myList</a:t>
+            </a:r>
+            <a:r>
+              <a:rPr lang="en-US" dirty="0">
+                <a:solidFill>
+                  <a:schemeClr val="tx1"/>
+                </a:solidFill>
+              </a:rPr>
+              <a:t>=new </a:t>
+            </a:r>
+            <a:r>
+              <a:rPr lang="en-US" dirty="0" err="1">
+                <a:solidFill>
+                  <a:schemeClr val="tx1"/>
+                </a:solidFill>
+              </a:rPr>
+              <a:t>ArrayList</a:t>
+            </a:r>
+            <a:r>
+              <a:rPr lang="en-US" dirty="0">
+                <a:solidFill>
+                  <a:schemeClr val="tx1"/>
+                </a:solidFill>
+              </a:rPr>
+              <a:t>();</a:t>
+            </a:r>
+          </a:p>
+          <a:p>
+            <a:pPr lvl="1">
+              <a:defRPr/>
+            </a:pPr>
+            <a:r>
+              <a:rPr lang="en-US" dirty="0">
+                <a:solidFill>
+                  <a:schemeClr val="tx1"/>
+                </a:solidFill>
+              </a:rPr>
+              <a:t>List </a:t>
+            </a:r>
+            <a:r>
+              <a:rPr lang="en-US" dirty="0" err="1">
+                <a:solidFill>
+                  <a:schemeClr val="tx1"/>
+                </a:solidFill>
+              </a:rPr>
+              <a:t>myList</a:t>
+            </a:r>
+            <a:r>
+              <a:rPr lang="en-US" dirty="0">
+                <a:solidFill>
+                  <a:schemeClr val="tx1"/>
+                </a:solidFill>
+              </a:rPr>
+              <a:t>=new </a:t>
+            </a:r>
+            <a:r>
+              <a:rPr lang="en-US" dirty="0" err="1">
+                <a:solidFill>
+                  <a:schemeClr val="tx1"/>
+                </a:solidFill>
+              </a:rPr>
+              <a:t>LinkedList</a:t>
+            </a:r>
+            <a:r>
+              <a:rPr lang="en-US" dirty="0">
+                <a:solidFill>
+                  <a:schemeClr val="tx1"/>
+                </a:solidFill>
+              </a:rPr>
+              <a:t>();</a:t>
+            </a:r>
+          </a:p>
+          <a:p>
+            <a:pPr>
+              <a:defRPr/>
+            </a:pPr>
+            <a:endParaRPr lang="en-US" dirty="0">
+              <a:solidFill>
+                <a:schemeClr val="tx1"/>
+              </a:solidFill>
+            </a:endParaRPr>
+          </a:p>
+          <a:p>
+            <a:pPr>
+              <a:defRPr/>
+            </a:pPr>
+            <a:r>
+              <a:rPr lang="en-US" dirty="0">
+                <a:solidFill>
+                  <a:schemeClr val="tx1"/>
+                </a:solidFill>
+              </a:rPr>
+              <a:t>To switch the list implementation, </a:t>
+            </a:r>
+            <a:br>
+              <a:rPr lang="en-US" dirty="0">
+                <a:solidFill>
+                  <a:schemeClr val="tx1"/>
+                </a:solidFill>
+              </a:rPr>
+            </a:br>
+            <a:r>
+              <a:rPr lang="en-US" b="1" dirty="0">
+                <a:solidFill>
+                  <a:srgbClr val="00B050"/>
+                </a:solidFill>
+              </a:rPr>
+              <a:t>only one line needs to be changed</a:t>
+            </a:r>
+          </a:p>
+          <a:p>
+            <a:pPr>
+              <a:defRPr/>
+            </a:pPr>
+            <a:endParaRPr lang="en-US" dirty="0">
+              <a:solidFill>
+                <a:schemeClr val="tx1"/>
+              </a:solidFill>
+            </a:endParaRPr>
+          </a:p>
+          <a:p>
+            <a:pPr>
+              <a:defRPr/>
+            </a:pPr>
+            <a:endParaRPr lang="en-US" dirty="0">
+              <a:solidFill>
+                <a:schemeClr val="tx1"/>
+              </a:solidFill>
+            </a:endParaRPr>
+          </a:p>
+        </p:txBody>
+      </p:sp>
       <p:pic>
         <p:nvPicPr>
           <p:cNvPr id="2" name="Picture 1"/>
@@ -15184,7 +14894,7 @@
         </p:blipFill>
         <p:spPr>
           <a:xfrm>
-            <a:off x="8051342" y="765695"/>
+            <a:off x="6643334" y="765695"/>
             <a:ext cx="2880991" cy="5825162"/>
           </a:xfrm>
           <a:prstGeom prst="rect">
@@ -15192,36 +14902,6 @@
           </a:prstGeom>
         </p:spPr>
       </p:pic>
-      <p:sp>
-        <p:nvSpPr>
-          <p:cNvPr id="14338" name="Title 1"/>
-          <p:cNvSpPr>
-            <a:spLocks noGrp="1"/>
-          </p:cNvSpPr>
-          <p:nvPr>
-            <p:ph type="title"/>
-          </p:nvPr>
-        </p:nvSpPr>
-        <p:spPr>
-          <a:xfrm>
-            <a:off x="936516" y="810202"/>
-            <a:ext cx="3453413" cy="1556718"/>
-          </a:xfrm>
-        </p:spPr>
-        <p:txBody>
-          <a:bodyPr>
-            <a:normAutofit fontScale="90000"/>
-          </a:bodyPr>
-          <a:lstStyle/>
-          <a:p>
-            <a:pPr eaLnBrk="1" hangingPunct="1"/>
-            <a:r>
-              <a:rPr lang="en-US" altLang="en-US" dirty="0"/>
-              <a:t>Interface List versus Collection</a:t>
-            </a:r>
-          </a:p>
-        </p:txBody>
-      </p:sp>
       <p:sp>
         <p:nvSpPr>
           <p:cNvPr id="4" name="Rectangle 3"/>
@@ -15230,7 +14910,7 @@
         </p:nvSpPr>
         <p:spPr>
           <a:xfrm>
-            <a:off x="8051342" y="789473"/>
+            <a:off x="6643334" y="789473"/>
             <a:ext cx="2880991" cy="606403"/>
           </a:xfrm>
           <a:prstGeom prst="rect">
@@ -15305,8 +14985,8 @@
         </p:nvSpPr>
         <p:spPr>
           <a:xfrm>
-            <a:off x="8051342" y="2111173"/>
-            <a:ext cx="2880991" cy="166736"/>
+            <a:off x="6643334" y="2111172"/>
+            <a:ext cx="2880991" cy="308347"/>
           </a:xfrm>
           <a:prstGeom prst="rect">
             <a:avLst/>
@@ -15380,7 +15060,7 @@
         </p:nvSpPr>
         <p:spPr>
           <a:xfrm>
-            <a:off x="8051342" y="2525834"/>
+            <a:off x="6643334" y="2525834"/>
             <a:ext cx="2880991" cy="884959"/>
           </a:xfrm>
           <a:prstGeom prst="rect">
@@ -15455,7 +15135,7 @@
         </p:nvSpPr>
         <p:spPr>
           <a:xfrm>
-            <a:off x="8054039" y="3855377"/>
+            <a:off x="6646031" y="3855377"/>
             <a:ext cx="2880991" cy="1412538"/>
           </a:xfrm>
           <a:prstGeom prst="rect">
@@ -15522,461 +15202,10 @@
           </a:p>
         </p:txBody>
       </p:sp>
-      <p:pic>
-        <p:nvPicPr>
-          <p:cNvPr id="10" name="Picture 9"/>
-          <p:cNvPicPr>
-            <a:picLocks noChangeAspect="1"/>
-          </p:cNvPicPr>
-          <p:nvPr/>
-        </p:nvPicPr>
-        <p:blipFill>
-          <a:blip r:embed="rId3"/>
-          <a:stretch>
-            <a:fillRect/>
-          </a:stretch>
-        </p:blipFill>
-        <p:spPr>
-          <a:xfrm>
-            <a:off x="5095252" y="765695"/>
-            <a:ext cx="2729745" cy="3966660"/>
-          </a:xfrm>
-          <a:prstGeom prst="rect">
-            <a:avLst/>
-          </a:prstGeom>
-        </p:spPr>
-      </p:pic>
-      <p:sp>
-        <p:nvSpPr>
-          <p:cNvPr id="13" name="Rectangle 12"/>
-          <p:cNvSpPr/>
-          <p:nvPr/>
-        </p:nvSpPr>
-        <p:spPr>
-          <a:xfrm>
-            <a:off x="5092555" y="765696"/>
-            <a:ext cx="2880991" cy="346960"/>
-          </a:xfrm>
-          <a:prstGeom prst="rect">
-            <a:avLst/>
-          </a:prstGeom>
-          <a:noFill/>
-          <a:ln>
-            <a:solidFill>
-              <a:srgbClr val="92D050"/>
-            </a:solidFill>
-          </a:ln>
-        </p:spPr>
-        <p:style>
-          <a:lnRef idx="2">
-            <a:schemeClr val="accent1">
-              <a:shade val="50000"/>
-            </a:schemeClr>
-          </a:lnRef>
-          <a:fillRef idx="1">
-            <a:schemeClr val="accent1"/>
-          </a:fillRef>
-          <a:effectRef idx="0">
-            <a:schemeClr val="accent1"/>
-          </a:effectRef>
-          <a:fontRef idx="minor">
-            <a:schemeClr val="lt1"/>
-          </a:fontRef>
-        </p:style>
-        <p:txBody>
-          <a:bodyPr rtlCol="0" anchor="ctr"/>
-          <a:lstStyle/>
-          <a:p>
-            <a:pPr marL="0" marR="0" lvl="0" indent="0" algn="ctr" defTabSz="914400" rtl="0" eaLnBrk="1" fontAlgn="auto" latinLnBrk="0" hangingPunct="1">
-              <a:lnSpc>
-                <a:spcPct val="100000"/>
-              </a:lnSpc>
-              <a:spcBef>
-                <a:spcPts val="0"/>
-              </a:spcBef>
-              <a:spcAft>
-                <a:spcPts val="0"/>
-              </a:spcAft>
-              <a:buClrTx/>
-              <a:buSzTx/>
-              <a:buFontTx/>
-              <a:buNone/>
-              <a:tabLst/>
-              <a:defRPr/>
-            </a:pPr>
-            <a:endParaRPr kumimoji="0" lang="en-US" sz="1800" b="0" i="0" u="none" strike="noStrike" kern="1200" cap="none" spc="0" normalizeH="0" baseline="0" noProof="0">
-              <a:ln>
-                <a:noFill/>
-              </a:ln>
-              <a:solidFill>
-                <a:srgbClr val="FFFFFF"/>
-              </a:solidFill>
-              <a:effectLst/>
-              <a:uLnTx/>
-              <a:uFillTx/>
-              <a:latin typeface="Arial" panose="020B0604020202020204"/>
-              <a:ea typeface="+mn-ea"/>
-              <a:cs typeface="+mn-cs"/>
-            </a:endParaRPr>
-          </a:p>
-        </p:txBody>
-      </p:sp>
-      <p:sp>
-        <p:nvSpPr>
-          <p:cNvPr id="14" name="Rectangle 13"/>
-          <p:cNvSpPr/>
-          <p:nvPr/>
-        </p:nvSpPr>
-        <p:spPr>
-          <a:xfrm>
-            <a:off x="5131453" y="2749025"/>
-            <a:ext cx="2880991" cy="843839"/>
-          </a:xfrm>
-          <a:prstGeom prst="rect">
-            <a:avLst/>
-          </a:prstGeom>
-          <a:noFill/>
-          <a:ln>
-            <a:solidFill>
-              <a:srgbClr val="92D050"/>
-            </a:solidFill>
-          </a:ln>
-        </p:spPr>
-        <p:style>
-          <a:lnRef idx="2">
-            <a:schemeClr val="accent1">
-              <a:shade val="50000"/>
-            </a:schemeClr>
-          </a:lnRef>
-          <a:fillRef idx="1">
-            <a:schemeClr val="accent1"/>
-          </a:fillRef>
-          <a:effectRef idx="0">
-            <a:schemeClr val="accent1"/>
-          </a:effectRef>
-          <a:fontRef idx="minor">
-            <a:schemeClr val="lt1"/>
-          </a:fontRef>
-        </p:style>
-        <p:txBody>
-          <a:bodyPr rtlCol="0" anchor="ctr"/>
-          <a:lstStyle/>
-          <a:p>
-            <a:pPr marL="0" marR="0" lvl="0" indent="0" algn="ctr" defTabSz="914400" rtl="0" eaLnBrk="1" fontAlgn="auto" latinLnBrk="0" hangingPunct="1">
-              <a:lnSpc>
-                <a:spcPct val="100000"/>
-              </a:lnSpc>
-              <a:spcBef>
-                <a:spcPts val="0"/>
-              </a:spcBef>
-              <a:spcAft>
-                <a:spcPts val="0"/>
-              </a:spcAft>
-              <a:buClrTx/>
-              <a:buSzTx/>
-              <a:buFontTx/>
-              <a:buNone/>
-              <a:tabLst/>
-              <a:defRPr/>
-            </a:pPr>
-            <a:endParaRPr kumimoji="0" lang="en-US" sz="1800" b="0" i="0" u="none" strike="noStrike" kern="1200" cap="none" spc="0" normalizeH="0" baseline="0" noProof="0">
-              <a:ln>
-                <a:noFill/>
-              </a:ln>
-              <a:solidFill>
-                <a:srgbClr val="FFFFFF"/>
-              </a:solidFill>
-              <a:effectLst/>
-              <a:uLnTx/>
-              <a:uFillTx/>
-              <a:latin typeface="Arial" panose="020B0604020202020204"/>
-              <a:ea typeface="+mn-ea"/>
-              <a:cs typeface="+mn-cs"/>
-            </a:endParaRPr>
-          </a:p>
-        </p:txBody>
-      </p:sp>
-      <p:sp>
-        <p:nvSpPr>
-          <p:cNvPr id="15" name="Content Placeholder 2"/>
-          <p:cNvSpPr>
-            <a:spLocks noGrp="1"/>
-          </p:cNvSpPr>
-          <p:nvPr>
-            <p:ph idx="1"/>
-          </p:nvPr>
-        </p:nvSpPr>
-        <p:spPr>
-          <a:xfrm>
-            <a:off x="936516" y="2592360"/>
-            <a:ext cx="4040086" cy="3998497"/>
-          </a:xfrm>
-        </p:spPr>
-        <p:txBody>
-          <a:bodyPr rtlCol="0">
-            <a:normAutofit/>
-          </a:bodyPr>
-          <a:lstStyle/>
-          <a:p>
-            <a:pPr marL="0" indent="0">
-              <a:buNone/>
-              <a:defRPr/>
-            </a:pPr>
-            <a:r>
-              <a:rPr lang="en-US" b="1" dirty="0">
-                <a:solidFill>
-                  <a:schemeClr val="tx1"/>
-                </a:solidFill>
-              </a:rPr>
-              <a:t>Collection interface:</a:t>
-            </a:r>
-          </a:p>
-          <a:p>
-            <a:pPr>
-              <a:defRPr/>
-            </a:pPr>
-            <a:r>
-              <a:rPr lang="en-US" dirty="0">
-                <a:solidFill>
-                  <a:schemeClr val="tx1"/>
-                </a:solidFill>
-              </a:rPr>
-              <a:t>Collection </a:t>
-            </a:r>
-            <a:r>
-              <a:rPr lang="en-US" dirty="0">
-                <a:solidFill>
-                  <a:srgbClr val="00B050"/>
-                </a:solidFill>
-              </a:rPr>
-              <a:t>includes</a:t>
-            </a:r>
-            <a:r>
-              <a:rPr lang="en-US" dirty="0">
-                <a:solidFill>
-                  <a:schemeClr val="tx1"/>
-                </a:solidFill>
-              </a:rPr>
-              <a:t> also Set(s)</a:t>
-            </a:r>
-          </a:p>
-          <a:p>
-            <a:pPr>
-              <a:defRPr/>
-            </a:pPr>
-            <a:r>
-              <a:rPr lang="en-US" dirty="0">
-                <a:solidFill>
-                  <a:schemeClr val="tx1"/>
-                </a:solidFill>
-              </a:rPr>
-              <a:t>Index is </a:t>
-            </a:r>
-            <a:r>
-              <a:rPr lang="en-US" b="1" dirty="0">
-                <a:solidFill>
-                  <a:srgbClr val="FF0000"/>
-                </a:solidFill>
-              </a:rPr>
-              <a:t>missing</a:t>
-            </a:r>
-          </a:p>
-          <a:p>
-            <a:pPr>
-              <a:defRPr/>
-            </a:pPr>
-            <a:r>
-              <a:rPr lang="en-US" dirty="0">
-                <a:solidFill>
-                  <a:schemeClr val="tx1"/>
-                </a:solidFill>
-              </a:rPr>
-              <a:t>Use it when you want to make your container selection even </a:t>
-            </a:r>
-            <a:r>
-              <a:rPr lang="en-US" b="1" dirty="0">
-                <a:solidFill>
-                  <a:srgbClr val="00B050"/>
-                </a:solidFill>
-              </a:rPr>
-              <a:t>more generic </a:t>
-            </a:r>
-            <a:r>
-              <a:rPr lang="en-US" dirty="0">
-                <a:solidFill>
-                  <a:schemeClr val="tx1"/>
-                </a:solidFill>
-              </a:rPr>
-              <a:t>as with List</a:t>
-            </a:r>
-          </a:p>
-          <a:p>
-            <a:pPr>
-              <a:defRPr/>
-            </a:pPr>
-            <a:r>
-              <a:rPr lang="en-US" b="1" dirty="0">
-                <a:solidFill>
-                  <a:srgbClr val="00B050"/>
-                </a:solidFill>
-              </a:rPr>
-              <a:t>Usually</a:t>
-            </a:r>
-            <a:r>
-              <a:rPr lang="en-US" dirty="0">
-                <a:solidFill>
-                  <a:schemeClr val="tx1"/>
-                </a:solidFill>
-              </a:rPr>
-              <a:t> you access everything via Iterator</a:t>
-            </a:r>
-          </a:p>
-          <a:p>
-            <a:pPr>
-              <a:defRPr/>
-            </a:pPr>
-            <a:endParaRPr lang="en-US" dirty="0">
-              <a:solidFill>
-                <a:schemeClr val="tx1"/>
-              </a:solidFill>
-            </a:endParaRPr>
-          </a:p>
-        </p:txBody>
-      </p:sp>
-      <p:sp>
-        <p:nvSpPr>
-          <p:cNvPr id="5" name="TextBox 4">
-            <a:extLst>
-              <a:ext uri="{FF2B5EF4-FFF2-40B4-BE49-F238E27FC236}">
-                <a16:creationId xmlns:a16="http://schemas.microsoft.com/office/drawing/2014/main" id="{E658FF7A-5104-E498-8FC2-DB4EDB362147}"/>
-              </a:ext>
-            </a:extLst>
-          </p:cNvPr>
-          <p:cNvSpPr txBox="1"/>
-          <p:nvPr/>
-        </p:nvSpPr>
-        <p:spPr>
-          <a:xfrm>
-            <a:off x="10530513" y="3429000"/>
-            <a:ext cx="1816770" cy="369332"/>
-          </a:xfrm>
-          <a:prstGeom prst="rect">
-            <a:avLst/>
-          </a:prstGeom>
-          <a:noFill/>
-        </p:spPr>
-        <p:txBody>
-          <a:bodyPr wrap="square">
-            <a:spAutoFit/>
-          </a:bodyPr>
-          <a:lstStyle/>
-          <a:p>
-            <a:pPr marL="0" marR="0" lvl="0" indent="0" algn="l" defTabSz="914400" rtl="0" eaLnBrk="1" fontAlgn="auto" latinLnBrk="0" hangingPunct="1">
-              <a:lnSpc>
-                <a:spcPct val="100000"/>
-              </a:lnSpc>
-              <a:spcBef>
-                <a:spcPts val="0"/>
-              </a:spcBef>
-              <a:spcAft>
-                <a:spcPts val="0"/>
-              </a:spcAft>
-              <a:buClrTx/>
-              <a:buSzTx/>
-              <a:buFontTx/>
-              <a:buNone/>
-              <a:tabLst/>
-              <a:defRPr/>
-            </a:pPr>
-            <a:r>
-              <a:rPr kumimoji="0" lang="en-US" sz="1800" b="1" i="0" u="none" strike="noStrike" kern="1200" cap="none" spc="0" normalizeH="0" baseline="0" noProof="0" dirty="0">
-                <a:ln>
-                  <a:noFill/>
-                </a:ln>
-                <a:solidFill>
-                  <a:srgbClr val="000000"/>
-                </a:solidFill>
-                <a:effectLst/>
-                <a:uLnTx/>
-                <a:uFillTx/>
-                <a:latin typeface="Arial" panose="020B0604020202020204"/>
-                <a:ea typeface="+mn-ea"/>
-                <a:cs typeface="+mn-cs"/>
-              </a:rPr>
-              <a:t>List Interface</a:t>
-            </a:r>
-          </a:p>
-        </p:txBody>
-      </p:sp>
-      <p:sp>
-        <p:nvSpPr>
-          <p:cNvPr id="9" name="TextBox 8">
-            <a:extLst>
-              <a:ext uri="{FF2B5EF4-FFF2-40B4-BE49-F238E27FC236}">
-                <a16:creationId xmlns:a16="http://schemas.microsoft.com/office/drawing/2014/main" id="{B31D747F-4813-6464-EA6C-3D58528A8D45}"/>
-              </a:ext>
-            </a:extLst>
-          </p:cNvPr>
-          <p:cNvSpPr txBox="1"/>
-          <p:nvPr/>
-        </p:nvSpPr>
-        <p:spPr>
-          <a:xfrm>
-            <a:off x="5131453" y="4732355"/>
-            <a:ext cx="2505754" cy="369332"/>
-          </a:xfrm>
-          <a:prstGeom prst="rect">
-            <a:avLst/>
-          </a:prstGeom>
-          <a:noFill/>
-        </p:spPr>
-        <p:txBody>
-          <a:bodyPr wrap="square">
-            <a:spAutoFit/>
-          </a:bodyPr>
-          <a:lstStyle/>
-          <a:p>
-            <a:pPr marL="0" marR="0" lvl="0" indent="0" algn="l" defTabSz="914400" rtl="0" eaLnBrk="1" fontAlgn="auto" latinLnBrk="0" hangingPunct="1">
-              <a:lnSpc>
-                <a:spcPct val="100000"/>
-              </a:lnSpc>
-              <a:spcBef>
-                <a:spcPts val="0"/>
-              </a:spcBef>
-              <a:spcAft>
-                <a:spcPts val="0"/>
-              </a:spcAft>
-              <a:buClrTx/>
-              <a:buSzTx/>
-              <a:buFontTx/>
-              <a:buNone/>
-              <a:tabLst/>
-              <a:defRPr/>
-            </a:pPr>
-            <a:r>
-              <a:rPr kumimoji="0" lang="en-US" sz="1800" b="1" i="0" u="none" strike="noStrike" kern="1200" cap="none" spc="0" normalizeH="0" baseline="0" noProof="0" dirty="0">
-                <a:ln>
-                  <a:noFill/>
-                </a:ln>
-                <a:solidFill>
-                  <a:srgbClr val="000000"/>
-                </a:solidFill>
-                <a:effectLst/>
-                <a:uLnTx/>
-                <a:uFillTx/>
-                <a:latin typeface="Arial" panose="020B0604020202020204"/>
-                <a:ea typeface="+mn-ea"/>
-                <a:cs typeface="+mn-cs"/>
-              </a:rPr>
-              <a:t>Collection Interface</a:t>
-            </a:r>
-          </a:p>
-        </p:txBody>
-      </p:sp>
     </p:spTree>
     <p:extLst>
       <p:ext uri="{BB962C8B-B14F-4D97-AF65-F5344CB8AC3E}">
-        <p14:creationId xmlns:p14="http://schemas.microsoft.com/office/powerpoint/2010/main" val="3892110910"/>
+        <p14:creationId xmlns:p14="http://schemas.microsoft.com/office/powerpoint/2010/main" val="3400033194"/>
       </p:ext>
     </p:extLst>
   </p:cSld>
@@ -16003,6 +15232,841 @@
           <a:chExt cx="0" cy="0"/>
         </a:xfrm>
       </p:grpSpPr>
+      <p:pic>
+        <p:nvPicPr>
+          <p:cNvPr id="2" name="Picture 1"/>
+          <p:cNvPicPr>
+            <a:picLocks noChangeAspect="1"/>
+          </p:cNvPicPr>
+          <p:nvPr/>
+        </p:nvPicPr>
+        <p:blipFill>
+          <a:blip r:embed="rId2"/>
+          <a:stretch>
+            <a:fillRect/>
+          </a:stretch>
+        </p:blipFill>
+        <p:spPr>
+          <a:xfrm>
+            <a:off x="8051342" y="765695"/>
+            <a:ext cx="2880991" cy="5825162"/>
+          </a:xfrm>
+          <a:prstGeom prst="rect">
+            <a:avLst/>
+          </a:prstGeom>
+        </p:spPr>
+      </p:pic>
+      <p:sp>
+        <p:nvSpPr>
+          <p:cNvPr id="14338" name="Title 1"/>
+          <p:cNvSpPr>
+            <a:spLocks noGrp="1"/>
+          </p:cNvSpPr>
+          <p:nvPr>
+            <p:ph type="title"/>
+          </p:nvPr>
+        </p:nvSpPr>
+        <p:spPr>
+          <a:xfrm>
+            <a:off x="936516" y="810202"/>
+            <a:ext cx="3453413" cy="1556718"/>
+          </a:xfrm>
+        </p:spPr>
+        <p:txBody>
+          <a:bodyPr>
+            <a:normAutofit fontScale="90000"/>
+          </a:bodyPr>
+          <a:lstStyle/>
+          <a:p>
+            <a:pPr eaLnBrk="1" hangingPunct="1"/>
+            <a:r>
+              <a:rPr lang="en-US" altLang="en-US" dirty="0"/>
+              <a:t>Interface List versus Collection</a:t>
+            </a:r>
+          </a:p>
+        </p:txBody>
+      </p:sp>
+      <p:sp>
+        <p:nvSpPr>
+          <p:cNvPr id="4" name="Rectangle 3"/>
+          <p:cNvSpPr/>
+          <p:nvPr/>
+        </p:nvSpPr>
+        <p:spPr>
+          <a:xfrm>
+            <a:off x="8051342" y="789473"/>
+            <a:ext cx="2880991" cy="606403"/>
+          </a:xfrm>
+          <a:prstGeom prst="rect">
+            <a:avLst/>
+          </a:prstGeom>
+          <a:noFill/>
+          <a:ln>
+            <a:solidFill>
+              <a:srgbClr val="92D050"/>
+            </a:solidFill>
+          </a:ln>
+        </p:spPr>
+        <p:style>
+          <a:lnRef idx="2">
+            <a:schemeClr val="accent1">
+              <a:shade val="50000"/>
+            </a:schemeClr>
+          </a:lnRef>
+          <a:fillRef idx="1">
+            <a:schemeClr val="accent1"/>
+          </a:fillRef>
+          <a:effectRef idx="0">
+            <a:schemeClr val="accent1"/>
+          </a:effectRef>
+          <a:fontRef idx="minor">
+            <a:schemeClr val="lt1"/>
+          </a:fontRef>
+        </p:style>
+        <p:txBody>
+          <a:bodyPr rtlCol="0" anchor="ctr"/>
+          <a:lstStyle/>
+          <a:p>
+            <a:pPr marL="0" marR="0" lvl="0" indent="0" algn="ctr" defTabSz="914400" rtl="0" eaLnBrk="1" fontAlgn="auto" latinLnBrk="0" hangingPunct="1">
+              <a:lnSpc>
+                <a:spcPct val="100000"/>
+              </a:lnSpc>
+              <a:spcBef>
+                <a:spcPts val="0"/>
+              </a:spcBef>
+              <a:spcAft>
+                <a:spcPts val="0"/>
+              </a:spcAft>
+              <a:buClrTx/>
+              <a:buSzTx/>
+              <a:buFontTx/>
+              <a:buNone/>
+              <a:tabLst/>
+              <a:defRPr/>
+            </a:pPr>
+            <a:endParaRPr kumimoji="0" lang="en-US" sz="1800" b="0" i="0" u="none" strike="noStrike" kern="1200" cap="none" spc="0" normalizeH="0" baseline="0" noProof="0">
+              <a:ln>
+                <a:noFill/>
+              </a:ln>
+              <a:solidFill>
+                <a:srgbClr val="FFFFFF"/>
+              </a:solidFill>
+              <a:effectLst/>
+              <a:uLnTx/>
+              <a:uFillTx/>
+              <a:latin typeface="Arial" panose="020B0604020202020204"/>
+              <a:ea typeface="+mn-ea"/>
+              <a:cs typeface="+mn-cs"/>
+            </a:endParaRPr>
+          </a:p>
+        </p:txBody>
+      </p:sp>
+      <p:sp>
+        <p:nvSpPr>
+          <p:cNvPr id="6" name="Rectangle 5"/>
+          <p:cNvSpPr/>
+          <p:nvPr/>
+        </p:nvSpPr>
+        <p:spPr>
+          <a:xfrm>
+            <a:off x="8051342" y="2111173"/>
+            <a:ext cx="2880991" cy="166736"/>
+          </a:xfrm>
+          <a:prstGeom prst="rect">
+            <a:avLst/>
+          </a:prstGeom>
+          <a:noFill/>
+          <a:ln>
+            <a:solidFill>
+              <a:srgbClr val="92D050"/>
+            </a:solidFill>
+          </a:ln>
+        </p:spPr>
+        <p:style>
+          <a:lnRef idx="2">
+            <a:schemeClr val="accent1">
+              <a:shade val="50000"/>
+            </a:schemeClr>
+          </a:lnRef>
+          <a:fillRef idx="1">
+            <a:schemeClr val="accent1"/>
+          </a:fillRef>
+          <a:effectRef idx="0">
+            <a:schemeClr val="accent1"/>
+          </a:effectRef>
+          <a:fontRef idx="minor">
+            <a:schemeClr val="lt1"/>
+          </a:fontRef>
+        </p:style>
+        <p:txBody>
+          <a:bodyPr rtlCol="0" anchor="ctr"/>
+          <a:lstStyle/>
+          <a:p>
+            <a:pPr marL="0" marR="0" lvl="0" indent="0" algn="ctr" defTabSz="914400" rtl="0" eaLnBrk="1" fontAlgn="auto" latinLnBrk="0" hangingPunct="1">
+              <a:lnSpc>
+                <a:spcPct val="100000"/>
+              </a:lnSpc>
+              <a:spcBef>
+                <a:spcPts val="0"/>
+              </a:spcBef>
+              <a:spcAft>
+                <a:spcPts val="0"/>
+              </a:spcAft>
+              <a:buClrTx/>
+              <a:buSzTx/>
+              <a:buFontTx/>
+              <a:buNone/>
+              <a:tabLst/>
+              <a:defRPr/>
+            </a:pPr>
+            <a:endParaRPr kumimoji="0" lang="en-US" sz="1800" b="0" i="0" u="none" strike="noStrike" kern="1200" cap="none" spc="0" normalizeH="0" baseline="0" noProof="0">
+              <a:ln>
+                <a:noFill/>
+              </a:ln>
+              <a:solidFill>
+                <a:srgbClr val="FFFFFF"/>
+              </a:solidFill>
+              <a:effectLst/>
+              <a:uLnTx/>
+              <a:uFillTx/>
+              <a:latin typeface="Arial" panose="020B0604020202020204"/>
+              <a:ea typeface="+mn-ea"/>
+              <a:cs typeface="+mn-cs"/>
+            </a:endParaRPr>
+          </a:p>
+        </p:txBody>
+      </p:sp>
+      <p:sp>
+        <p:nvSpPr>
+          <p:cNvPr id="7" name="Rectangle 6"/>
+          <p:cNvSpPr/>
+          <p:nvPr/>
+        </p:nvSpPr>
+        <p:spPr>
+          <a:xfrm>
+            <a:off x="8051342" y="2525834"/>
+            <a:ext cx="2880991" cy="884959"/>
+          </a:xfrm>
+          <a:prstGeom prst="rect">
+            <a:avLst/>
+          </a:prstGeom>
+          <a:noFill/>
+          <a:ln>
+            <a:solidFill>
+              <a:srgbClr val="92D050"/>
+            </a:solidFill>
+          </a:ln>
+        </p:spPr>
+        <p:style>
+          <a:lnRef idx="2">
+            <a:schemeClr val="accent1">
+              <a:shade val="50000"/>
+            </a:schemeClr>
+          </a:lnRef>
+          <a:fillRef idx="1">
+            <a:schemeClr val="accent1"/>
+          </a:fillRef>
+          <a:effectRef idx="0">
+            <a:schemeClr val="accent1"/>
+          </a:effectRef>
+          <a:fontRef idx="minor">
+            <a:schemeClr val="lt1"/>
+          </a:fontRef>
+        </p:style>
+        <p:txBody>
+          <a:bodyPr rtlCol="0" anchor="ctr"/>
+          <a:lstStyle/>
+          <a:p>
+            <a:pPr marL="0" marR="0" lvl="0" indent="0" algn="ctr" defTabSz="914400" rtl="0" eaLnBrk="1" fontAlgn="auto" latinLnBrk="0" hangingPunct="1">
+              <a:lnSpc>
+                <a:spcPct val="100000"/>
+              </a:lnSpc>
+              <a:spcBef>
+                <a:spcPts val="0"/>
+              </a:spcBef>
+              <a:spcAft>
+                <a:spcPts val="0"/>
+              </a:spcAft>
+              <a:buClrTx/>
+              <a:buSzTx/>
+              <a:buFontTx/>
+              <a:buNone/>
+              <a:tabLst/>
+              <a:defRPr/>
+            </a:pPr>
+            <a:endParaRPr kumimoji="0" lang="en-US" sz="1800" b="0" i="0" u="none" strike="noStrike" kern="1200" cap="none" spc="0" normalizeH="0" baseline="0" noProof="0">
+              <a:ln>
+                <a:noFill/>
+              </a:ln>
+              <a:solidFill>
+                <a:srgbClr val="FFFFFF"/>
+              </a:solidFill>
+              <a:effectLst/>
+              <a:uLnTx/>
+              <a:uFillTx/>
+              <a:latin typeface="Arial" panose="020B0604020202020204"/>
+              <a:ea typeface="+mn-ea"/>
+              <a:cs typeface="+mn-cs"/>
+            </a:endParaRPr>
+          </a:p>
+        </p:txBody>
+      </p:sp>
+      <p:sp>
+        <p:nvSpPr>
+          <p:cNvPr id="8" name="Rectangle 7"/>
+          <p:cNvSpPr/>
+          <p:nvPr/>
+        </p:nvSpPr>
+        <p:spPr>
+          <a:xfrm>
+            <a:off x="8054039" y="3855377"/>
+            <a:ext cx="2880991" cy="1412538"/>
+          </a:xfrm>
+          <a:prstGeom prst="rect">
+            <a:avLst/>
+          </a:prstGeom>
+          <a:noFill/>
+          <a:ln>
+            <a:solidFill>
+              <a:srgbClr val="92D050"/>
+            </a:solidFill>
+          </a:ln>
+        </p:spPr>
+        <p:style>
+          <a:lnRef idx="2">
+            <a:schemeClr val="accent1">
+              <a:shade val="50000"/>
+            </a:schemeClr>
+          </a:lnRef>
+          <a:fillRef idx="1">
+            <a:schemeClr val="accent1"/>
+          </a:fillRef>
+          <a:effectRef idx="0">
+            <a:schemeClr val="accent1"/>
+          </a:effectRef>
+          <a:fontRef idx="minor">
+            <a:schemeClr val="lt1"/>
+          </a:fontRef>
+        </p:style>
+        <p:txBody>
+          <a:bodyPr rtlCol="0" anchor="ctr"/>
+          <a:lstStyle/>
+          <a:p>
+            <a:pPr marL="0" marR="0" lvl="0" indent="0" algn="ctr" defTabSz="914400" rtl="0" eaLnBrk="1" fontAlgn="auto" latinLnBrk="0" hangingPunct="1">
+              <a:lnSpc>
+                <a:spcPct val="100000"/>
+              </a:lnSpc>
+              <a:spcBef>
+                <a:spcPts val="0"/>
+              </a:spcBef>
+              <a:spcAft>
+                <a:spcPts val="0"/>
+              </a:spcAft>
+              <a:buClrTx/>
+              <a:buSzTx/>
+              <a:buFontTx/>
+              <a:buNone/>
+              <a:tabLst/>
+              <a:defRPr/>
+            </a:pPr>
+            <a:endParaRPr kumimoji="0" lang="en-US" sz="1800" b="0" i="0" u="none" strike="noStrike" kern="1200" cap="none" spc="0" normalizeH="0" baseline="0" noProof="0">
+              <a:ln>
+                <a:noFill/>
+              </a:ln>
+              <a:solidFill>
+                <a:srgbClr val="FFFFFF"/>
+              </a:solidFill>
+              <a:effectLst/>
+              <a:uLnTx/>
+              <a:uFillTx/>
+              <a:latin typeface="Arial" panose="020B0604020202020204"/>
+              <a:ea typeface="+mn-ea"/>
+              <a:cs typeface="+mn-cs"/>
+            </a:endParaRPr>
+          </a:p>
+        </p:txBody>
+      </p:sp>
+      <p:pic>
+        <p:nvPicPr>
+          <p:cNvPr id="10" name="Picture 9"/>
+          <p:cNvPicPr>
+            <a:picLocks noChangeAspect="1"/>
+          </p:cNvPicPr>
+          <p:nvPr/>
+        </p:nvPicPr>
+        <p:blipFill>
+          <a:blip r:embed="rId3"/>
+          <a:stretch>
+            <a:fillRect/>
+          </a:stretch>
+        </p:blipFill>
+        <p:spPr>
+          <a:xfrm>
+            <a:off x="5095252" y="765695"/>
+            <a:ext cx="2729745" cy="3966660"/>
+          </a:xfrm>
+          <a:prstGeom prst="rect">
+            <a:avLst/>
+          </a:prstGeom>
+        </p:spPr>
+      </p:pic>
+      <p:sp>
+        <p:nvSpPr>
+          <p:cNvPr id="13" name="Rectangle 12"/>
+          <p:cNvSpPr/>
+          <p:nvPr/>
+        </p:nvSpPr>
+        <p:spPr>
+          <a:xfrm>
+            <a:off x="5092555" y="765696"/>
+            <a:ext cx="2880991" cy="346960"/>
+          </a:xfrm>
+          <a:prstGeom prst="rect">
+            <a:avLst/>
+          </a:prstGeom>
+          <a:noFill/>
+          <a:ln>
+            <a:solidFill>
+              <a:srgbClr val="92D050"/>
+            </a:solidFill>
+          </a:ln>
+        </p:spPr>
+        <p:style>
+          <a:lnRef idx="2">
+            <a:schemeClr val="accent1">
+              <a:shade val="50000"/>
+            </a:schemeClr>
+          </a:lnRef>
+          <a:fillRef idx="1">
+            <a:schemeClr val="accent1"/>
+          </a:fillRef>
+          <a:effectRef idx="0">
+            <a:schemeClr val="accent1"/>
+          </a:effectRef>
+          <a:fontRef idx="minor">
+            <a:schemeClr val="lt1"/>
+          </a:fontRef>
+        </p:style>
+        <p:txBody>
+          <a:bodyPr rtlCol="0" anchor="ctr"/>
+          <a:lstStyle/>
+          <a:p>
+            <a:pPr marL="0" marR="0" lvl="0" indent="0" algn="ctr" defTabSz="914400" rtl="0" eaLnBrk="1" fontAlgn="auto" latinLnBrk="0" hangingPunct="1">
+              <a:lnSpc>
+                <a:spcPct val="100000"/>
+              </a:lnSpc>
+              <a:spcBef>
+                <a:spcPts val="0"/>
+              </a:spcBef>
+              <a:spcAft>
+                <a:spcPts val="0"/>
+              </a:spcAft>
+              <a:buClrTx/>
+              <a:buSzTx/>
+              <a:buFontTx/>
+              <a:buNone/>
+              <a:tabLst/>
+              <a:defRPr/>
+            </a:pPr>
+            <a:endParaRPr kumimoji="0" lang="en-US" sz="1800" b="0" i="0" u="none" strike="noStrike" kern="1200" cap="none" spc="0" normalizeH="0" baseline="0" noProof="0">
+              <a:ln>
+                <a:noFill/>
+              </a:ln>
+              <a:solidFill>
+                <a:srgbClr val="FFFFFF"/>
+              </a:solidFill>
+              <a:effectLst/>
+              <a:uLnTx/>
+              <a:uFillTx/>
+              <a:latin typeface="Arial" panose="020B0604020202020204"/>
+              <a:ea typeface="+mn-ea"/>
+              <a:cs typeface="+mn-cs"/>
+            </a:endParaRPr>
+          </a:p>
+        </p:txBody>
+      </p:sp>
+      <p:sp>
+        <p:nvSpPr>
+          <p:cNvPr id="14" name="Rectangle 13"/>
+          <p:cNvSpPr/>
+          <p:nvPr/>
+        </p:nvSpPr>
+        <p:spPr>
+          <a:xfrm>
+            <a:off x="5131453" y="2749025"/>
+            <a:ext cx="2880991" cy="843839"/>
+          </a:xfrm>
+          <a:prstGeom prst="rect">
+            <a:avLst/>
+          </a:prstGeom>
+          <a:noFill/>
+          <a:ln>
+            <a:solidFill>
+              <a:srgbClr val="92D050"/>
+            </a:solidFill>
+          </a:ln>
+        </p:spPr>
+        <p:style>
+          <a:lnRef idx="2">
+            <a:schemeClr val="accent1">
+              <a:shade val="50000"/>
+            </a:schemeClr>
+          </a:lnRef>
+          <a:fillRef idx="1">
+            <a:schemeClr val="accent1"/>
+          </a:fillRef>
+          <a:effectRef idx="0">
+            <a:schemeClr val="accent1"/>
+          </a:effectRef>
+          <a:fontRef idx="minor">
+            <a:schemeClr val="lt1"/>
+          </a:fontRef>
+        </p:style>
+        <p:txBody>
+          <a:bodyPr rtlCol="0" anchor="ctr"/>
+          <a:lstStyle/>
+          <a:p>
+            <a:pPr marL="0" marR="0" lvl="0" indent="0" algn="ctr" defTabSz="914400" rtl="0" eaLnBrk="1" fontAlgn="auto" latinLnBrk="0" hangingPunct="1">
+              <a:lnSpc>
+                <a:spcPct val="100000"/>
+              </a:lnSpc>
+              <a:spcBef>
+                <a:spcPts val="0"/>
+              </a:spcBef>
+              <a:spcAft>
+                <a:spcPts val="0"/>
+              </a:spcAft>
+              <a:buClrTx/>
+              <a:buSzTx/>
+              <a:buFontTx/>
+              <a:buNone/>
+              <a:tabLst/>
+              <a:defRPr/>
+            </a:pPr>
+            <a:endParaRPr kumimoji="0" lang="en-US" sz="1800" b="0" i="0" u="none" strike="noStrike" kern="1200" cap="none" spc="0" normalizeH="0" baseline="0" noProof="0">
+              <a:ln>
+                <a:noFill/>
+              </a:ln>
+              <a:solidFill>
+                <a:srgbClr val="FFFFFF"/>
+              </a:solidFill>
+              <a:effectLst/>
+              <a:uLnTx/>
+              <a:uFillTx/>
+              <a:latin typeface="Arial" panose="020B0604020202020204"/>
+              <a:ea typeface="+mn-ea"/>
+              <a:cs typeface="+mn-cs"/>
+            </a:endParaRPr>
+          </a:p>
+        </p:txBody>
+      </p:sp>
+      <p:sp>
+        <p:nvSpPr>
+          <p:cNvPr id="15" name="Content Placeholder 2"/>
+          <p:cNvSpPr>
+            <a:spLocks noGrp="1"/>
+          </p:cNvSpPr>
+          <p:nvPr>
+            <p:ph idx="1"/>
+          </p:nvPr>
+        </p:nvSpPr>
+        <p:spPr>
+          <a:xfrm>
+            <a:off x="936516" y="2592360"/>
+            <a:ext cx="4040086" cy="3998497"/>
+          </a:xfrm>
+        </p:spPr>
+        <p:txBody>
+          <a:bodyPr rtlCol="0">
+            <a:normAutofit/>
+          </a:bodyPr>
+          <a:lstStyle/>
+          <a:p>
+            <a:pPr marL="0" indent="0">
+              <a:buNone/>
+              <a:defRPr/>
+            </a:pPr>
+            <a:r>
+              <a:rPr lang="en-US" b="1" dirty="0">
+                <a:solidFill>
+                  <a:schemeClr val="tx1"/>
+                </a:solidFill>
+              </a:rPr>
+              <a:t>Collection interface:</a:t>
+            </a:r>
+          </a:p>
+          <a:p>
+            <a:pPr>
+              <a:defRPr/>
+            </a:pPr>
+            <a:r>
+              <a:rPr lang="en-US" dirty="0">
+                <a:solidFill>
+                  <a:schemeClr val="tx1"/>
+                </a:solidFill>
+              </a:rPr>
+              <a:t>Collection </a:t>
+            </a:r>
+            <a:r>
+              <a:rPr lang="en-US" dirty="0">
+                <a:solidFill>
+                  <a:srgbClr val="00B050"/>
+                </a:solidFill>
+              </a:rPr>
+              <a:t>includes</a:t>
+            </a:r>
+            <a:r>
+              <a:rPr lang="en-US" dirty="0">
+                <a:solidFill>
+                  <a:schemeClr val="tx1"/>
+                </a:solidFill>
+              </a:rPr>
+              <a:t> also Set(s)</a:t>
+            </a:r>
+          </a:p>
+          <a:p>
+            <a:pPr>
+              <a:defRPr/>
+            </a:pPr>
+            <a:r>
+              <a:rPr lang="en-US" dirty="0">
+                <a:solidFill>
+                  <a:schemeClr val="tx1"/>
+                </a:solidFill>
+              </a:rPr>
+              <a:t>Index is </a:t>
+            </a:r>
+            <a:r>
+              <a:rPr lang="en-US" b="1" dirty="0">
+                <a:solidFill>
+                  <a:srgbClr val="FF0000"/>
+                </a:solidFill>
+              </a:rPr>
+              <a:t>missing</a:t>
+            </a:r>
+          </a:p>
+          <a:p>
+            <a:pPr>
+              <a:defRPr/>
+            </a:pPr>
+            <a:r>
+              <a:rPr lang="en-US" dirty="0">
+                <a:solidFill>
+                  <a:schemeClr val="tx1"/>
+                </a:solidFill>
+              </a:rPr>
+              <a:t>Use it when you want to make your container selection even </a:t>
+            </a:r>
+            <a:r>
+              <a:rPr lang="en-US" b="1" dirty="0">
+                <a:solidFill>
+                  <a:srgbClr val="00B050"/>
+                </a:solidFill>
+              </a:rPr>
+              <a:t>more generic </a:t>
+            </a:r>
+            <a:r>
+              <a:rPr lang="en-US" dirty="0">
+                <a:solidFill>
+                  <a:schemeClr val="tx1"/>
+                </a:solidFill>
+              </a:rPr>
+              <a:t>as with List</a:t>
+            </a:r>
+          </a:p>
+          <a:p>
+            <a:pPr>
+              <a:defRPr/>
+            </a:pPr>
+            <a:r>
+              <a:rPr lang="en-US" b="1" dirty="0">
+                <a:solidFill>
+                  <a:srgbClr val="00B050"/>
+                </a:solidFill>
+              </a:rPr>
+              <a:t>Usually</a:t>
+            </a:r>
+            <a:r>
+              <a:rPr lang="en-US" dirty="0">
+                <a:solidFill>
+                  <a:schemeClr val="tx1"/>
+                </a:solidFill>
+              </a:rPr>
+              <a:t> you access everything via Iterator</a:t>
+            </a:r>
+          </a:p>
+          <a:p>
+            <a:pPr>
+              <a:defRPr/>
+            </a:pPr>
+            <a:endParaRPr lang="en-US" dirty="0">
+              <a:solidFill>
+                <a:schemeClr val="tx1"/>
+              </a:solidFill>
+            </a:endParaRPr>
+          </a:p>
+        </p:txBody>
+      </p:sp>
+      <p:sp>
+        <p:nvSpPr>
+          <p:cNvPr id="5" name="TextBox 4">
+            <a:extLst>
+              <a:ext uri="{FF2B5EF4-FFF2-40B4-BE49-F238E27FC236}">
+                <a16:creationId xmlns:a16="http://schemas.microsoft.com/office/drawing/2014/main" id="{E658FF7A-5104-E498-8FC2-DB4EDB362147}"/>
+              </a:ext>
+            </a:extLst>
+          </p:cNvPr>
+          <p:cNvSpPr txBox="1"/>
+          <p:nvPr/>
+        </p:nvSpPr>
+        <p:spPr>
+          <a:xfrm>
+            <a:off x="10530513" y="3429000"/>
+            <a:ext cx="1816770" cy="369332"/>
+          </a:xfrm>
+          <a:prstGeom prst="rect">
+            <a:avLst/>
+          </a:prstGeom>
+          <a:noFill/>
+        </p:spPr>
+        <p:txBody>
+          <a:bodyPr wrap="square">
+            <a:spAutoFit/>
+          </a:bodyPr>
+          <a:lstStyle/>
+          <a:p>
+            <a:pPr marL="0" marR="0" lvl="0" indent="0" algn="l" defTabSz="914400" rtl="0" eaLnBrk="1" fontAlgn="auto" latinLnBrk="0" hangingPunct="1">
+              <a:lnSpc>
+                <a:spcPct val="100000"/>
+              </a:lnSpc>
+              <a:spcBef>
+                <a:spcPts val="0"/>
+              </a:spcBef>
+              <a:spcAft>
+                <a:spcPts val="0"/>
+              </a:spcAft>
+              <a:buClrTx/>
+              <a:buSzTx/>
+              <a:buFontTx/>
+              <a:buNone/>
+              <a:tabLst/>
+              <a:defRPr/>
+            </a:pPr>
+            <a:r>
+              <a:rPr kumimoji="0" lang="en-US" sz="1800" b="1" i="0" u="none" strike="noStrike" kern="1200" cap="none" spc="0" normalizeH="0" baseline="0" noProof="0" dirty="0">
+                <a:ln>
+                  <a:noFill/>
+                </a:ln>
+                <a:solidFill>
+                  <a:srgbClr val="000000"/>
+                </a:solidFill>
+                <a:effectLst/>
+                <a:uLnTx/>
+                <a:uFillTx/>
+                <a:latin typeface="Arial" panose="020B0604020202020204"/>
+                <a:ea typeface="+mn-ea"/>
+                <a:cs typeface="+mn-cs"/>
+              </a:rPr>
+              <a:t>List Interface</a:t>
+            </a:r>
+          </a:p>
+        </p:txBody>
+      </p:sp>
+      <p:sp>
+        <p:nvSpPr>
+          <p:cNvPr id="9" name="TextBox 8">
+            <a:extLst>
+              <a:ext uri="{FF2B5EF4-FFF2-40B4-BE49-F238E27FC236}">
+                <a16:creationId xmlns:a16="http://schemas.microsoft.com/office/drawing/2014/main" id="{B31D747F-4813-6464-EA6C-3D58528A8D45}"/>
+              </a:ext>
+            </a:extLst>
+          </p:cNvPr>
+          <p:cNvSpPr txBox="1"/>
+          <p:nvPr/>
+        </p:nvSpPr>
+        <p:spPr>
+          <a:xfrm>
+            <a:off x="5131453" y="4732355"/>
+            <a:ext cx="2505754" cy="369332"/>
+          </a:xfrm>
+          <a:prstGeom prst="rect">
+            <a:avLst/>
+          </a:prstGeom>
+          <a:noFill/>
+        </p:spPr>
+        <p:txBody>
+          <a:bodyPr wrap="square">
+            <a:spAutoFit/>
+          </a:bodyPr>
+          <a:lstStyle/>
+          <a:p>
+            <a:pPr marL="0" marR="0" lvl="0" indent="0" algn="l" defTabSz="914400" rtl="0" eaLnBrk="1" fontAlgn="auto" latinLnBrk="0" hangingPunct="1">
+              <a:lnSpc>
+                <a:spcPct val="100000"/>
+              </a:lnSpc>
+              <a:spcBef>
+                <a:spcPts val="0"/>
+              </a:spcBef>
+              <a:spcAft>
+                <a:spcPts val="0"/>
+              </a:spcAft>
+              <a:buClrTx/>
+              <a:buSzTx/>
+              <a:buFontTx/>
+              <a:buNone/>
+              <a:tabLst/>
+              <a:defRPr/>
+            </a:pPr>
+            <a:r>
+              <a:rPr kumimoji="0" lang="en-US" sz="1800" b="1" i="0" u="none" strike="noStrike" kern="1200" cap="none" spc="0" normalizeH="0" baseline="0" noProof="0" dirty="0">
+                <a:ln>
+                  <a:noFill/>
+                </a:ln>
+                <a:solidFill>
+                  <a:srgbClr val="000000"/>
+                </a:solidFill>
+                <a:effectLst/>
+                <a:uLnTx/>
+                <a:uFillTx/>
+                <a:latin typeface="Arial" panose="020B0604020202020204"/>
+                <a:ea typeface="+mn-ea"/>
+                <a:cs typeface="+mn-cs"/>
+              </a:rPr>
+              <a:t>Collection Interface</a:t>
+            </a:r>
+          </a:p>
+        </p:txBody>
+      </p:sp>
+    </p:spTree>
+    <p:extLst>
+      <p:ext uri="{BB962C8B-B14F-4D97-AF65-F5344CB8AC3E}">
+        <p14:creationId xmlns:p14="http://schemas.microsoft.com/office/powerpoint/2010/main" val="3892110910"/>
+      </p:ext>
+    </p:extLst>
+  </p:cSld>
+  <p:clrMapOvr>
+    <a:masterClrMapping/>
+  </p:clrMapOvr>
+</p:sld>
+</file>
+
+<file path=ppt/slides/slide32.xml><?xml version="1.0" encoding="utf-8"?>
+<p:sld xmlns:a="http://schemas.openxmlformats.org/drawingml/2006/main" xmlns:r="http://schemas.openxmlformats.org/officeDocument/2006/relationships" xmlns:p="http://schemas.openxmlformats.org/presentationml/2006/main">
+  <p:cSld>
+    <p:spTree>
+      <p:nvGrpSpPr>
+        <p:cNvPr id="1" name=""/>
+        <p:cNvGrpSpPr/>
+        <p:nvPr/>
+      </p:nvGrpSpPr>
+      <p:grpSpPr>
+        <a:xfrm>
+          <a:off x="0" y="0"/>
+          <a:ext cx="0" cy="0"/>
+          <a:chOff x="0" y="0"/>
+          <a:chExt cx="0" cy="0"/>
+        </a:xfrm>
+      </p:grpSpPr>
       <p:sp>
         <p:nvSpPr>
           <p:cNvPr id="14338" name="Title 1"/>
@@ -16515,7 +16579,7 @@
 </p:sld>
 </file>
 
-<file path=ppt/slides/slide32.xml><?xml version="1.0" encoding="utf-8"?>
+<file path=ppt/slides/slide33.xml><?xml version="1.0" encoding="utf-8"?>
 <p:sld xmlns:a="http://schemas.openxmlformats.org/drawingml/2006/main" xmlns:r="http://schemas.openxmlformats.org/officeDocument/2006/relationships" xmlns:p="http://schemas.openxmlformats.org/presentationml/2006/main">
   <p:cSld>
     <p:spTree>
@@ -17567,7 +17631,7 @@
 </p:sld>
 </file>
 
-<file path=ppt/slides/slide33.xml><?xml version="1.0" encoding="utf-8"?>
+<file path=ppt/slides/slide34.xml><?xml version="1.0" encoding="utf-8"?>
 <p:sld xmlns:a="http://schemas.openxmlformats.org/drawingml/2006/main" xmlns:r="http://schemas.openxmlformats.org/officeDocument/2006/relationships" xmlns:p="http://schemas.openxmlformats.org/presentationml/2006/main">
   <p:cSld>
     <p:spTree>
@@ -17639,7 +17703,7 @@
 </p:sld>
 </file>
 
-<file path=ppt/slides/slide34.xml><?xml version="1.0" encoding="utf-8"?>
+<file path=ppt/slides/slide35.xml><?xml version="1.0" encoding="utf-8"?>
 <p:sld xmlns:a="http://schemas.openxmlformats.org/drawingml/2006/main" xmlns:r="http://schemas.openxmlformats.org/officeDocument/2006/relationships" xmlns:p="http://schemas.openxmlformats.org/presentationml/2006/main">
   <p:cSld>
     <p:spTree>
@@ -18330,7 +18394,7 @@
 </p:sld>
 </file>
 
-<file path=ppt/slides/slide35.xml><?xml version="1.0" encoding="utf-8"?>
+<file path=ppt/slides/slide36.xml><?xml version="1.0" encoding="utf-8"?>
 <p:sld xmlns:a="http://schemas.openxmlformats.org/drawingml/2006/main" xmlns:r="http://schemas.openxmlformats.org/officeDocument/2006/relationships" xmlns:p="http://schemas.openxmlformats.org/presentationml/2006/main">
   <p:cSld>
     <p:spTree>
@@ -18784,7 +18848,7 @@
 </p:sld>
 </file>
 
-<file path=ppt/slides/slide36.xml><?xml version="1.0" encoding="utf-8"?>
+<file path=ppt/slides/slide37.xml><?xml version="1.0" encoding="utf-8"?>
 <p:sld xmlns:a="http://schemas.openxmlformats.org/drawingml/2006/main" xmlns:r="http://schemas.openxmlformats.org/officeDocument/2006/relationships" xmlns:p="http://schemas.openxmlformats.org/presentationml/2006/main">
   <p:cSld>
     <p:spTree>
@@ -19650,440 +19714,6 @@
     <p:extLst>
       <p:ext uri="{BB962C8B-B14F-4D97-AF65-F5344CB8AC3E}">
         <p14:creationId xmlns:p14="http://schemas.microsoft.com/office/powerpoint/2010/main" val="161260686"/>
-      </p:ext>
-    </p:extLst>
-  </p:cSld>
-  <p:clrMapOvr>
-    <a:masterClrMapping/>
-  </p:clrMapOvr>
-</p:sld>
-</file>
-
-<file path=ppt/slides/slide37.xml><?xml version="1.0" encoding="utf-8"?>
-<p:sld xmlns:a="http://schemas.openxmlformats.org/drawingml/2006/main" xmlns:r="http://schemas.openxmlformats.org/officeDocument/2006/relationships" xmlns:p="http://schemas.openxmlformats.org/presentationml/2006/main">
-  <p:cSld>
-    <p:spTree>
-      <p:nvGrpSpPr>
-        <p:cNvPr id="1" name=""/>
-        <p:cNvGrpSpPr/>
-        <p:nvPr/>
-      </p:nvGrpSpPr>
-      <p:grpSpPr>
-        <a:xfrm>
-          <a:off x="0" y="0"/>
-          <a:ext cx="0" cy="0"/>
-          <a:chOff x="0" y="0"/>
-          <a:chExt cx="0" cy="0"/>
-        </a:xfrm>
-      </p:grpSpPr>
-      <p:sp>
-        <p:nvSpPr>
-          <p:cNvPr id="14338" name="Title 1"/>
-          <p:cNvSpPr>
-            <a:spLocks noGrp="1"/>
-          </p:cNvSpPr>
-          <p:nvPr>
-            <p:ph type="title"/>
-          </p:nvPr>
-        </p:nvSpPr>
-        <p:spPr>
-          <a:xfrm>
-            <a:off x="936516" y="810202"/>
-            <a:ext cx="7240486" cy="670641"/>
-          </a:xfrm>
-        </p:spPr>
-        <p:txBody>
-          <a:bodyPr>
-            <a:normAutofit fontScale="90000"/>
-          </a:bodyPr>
-          <a:lstStyle/>
-          <a:p>
-            <a:pPr eaLnBrk="1" hangingPunct="1"/>
-            <a:r>
-              <a:rPr lang="en-US" altLang="en-US" dirty="0"/>
-              <a:t>Set interface vs Collection interface</a:t>
-            </a:r>
-          </a:p>
-        </p:txBody>
-      </p:sp>
-      <p:sp>
-        <p:nvSpPr>
-          <p:cNvPr id="3" name="Content Placeholder 2"/>
-          <p:cNvSpPr>
-            <a:spLocks noGrp="1"/>
-          </p:cNvSpPr>
-          <p:nvPr>
-            <p:ph idx="1"/>
-          </p:nvPr>
-        </p:nvSpPr>
-        <p:spPr>
-          <a:xfrm>
-            <a:off x="673526" y="1656365"/>
-            <a:ext cx="3627392" cy="4995287"/>
-          </a:xfrm>
-        </p:spPr>
-        <p:txBody>
-          <a:bodyPr rtlCol="0">
-            <a:normAutofit/>
-          </a:bodyPr>
-          <a:lstStyle/>
-          <a:p>
-            <a:pPr marL="0" indent="0">
-              <a:buNone/>
-              <a:defRPr/>
-            </a:pPr>
-            <a:r>
-              <a:rPr lang="en-US" b="1" dirty="0">
-                <a:solidFill>
-                  <a:schemeClr val="tx1"/>
-                </a:solidFill>
-              </a:rPr>
-              <a:t>Why the same?</a:t>
-            </a:r>
-          </a:p>
-          <a:p>
-            <a:pPr lvl="1">
-              <a:defRPr/>
-            </a:pPr>
-            <a:r>
-              <a:rPr lang="en-US" dirty="0">
-                <a:solidFill>
-                  <a:schemeClr val="tx1"/>
-                </a:solidFill>
-              </a:rPr>
-              <a:t>Differences, set enforces:</a:t>
-            </a:r>
-          </a:p>
-          <a:p>
-            <a:pPr lvl="2">
-              <a:defRPr/>
-            </a:pPr>
-            <a:r>
-              <a:rPr lang="en-US" b="1" dirty="0">
-                <a:solidFill>
-                  <a:srgbClr val="FF0000"/>
-                </a:solidFill>
-              </a:rPr>
-              <a:t>set logic</a:t>
-            </a:r>
-          </a:p>
-          <a:p>
-            <a:pPr lvl="2">
-              <a:defRPr/>
-            </a:pPr>
-            <a:r>
-              <a:rPr lang="en-US" b="1" dirty="0">
-                <a:solidFill>
-                  <a:srgbClr val="FF0000"/>
-                </a:solidFill>
-              </a:rPr>
-              <a:t>no duplicates</a:t>
-            </a:r>
-          </a:p>
-          <a:p>
-            <a:pPr lvl="2">
-              <a:defRPr/>
-            </a:pPr>
-            <a:r>
-              <a:rPr lang="en-US" b="1" dirty="0">
-                <a:solidFill>
-                  <a:srgbClr val="FF0000"/>
-                </a:solidFill>
-              </a:rPr>
-              <a:t>Unordered</a:t>
-            </a:r>
-            <a:endParaRPr lang="en-US" b="1" dirty="0">
-              <a:solidFill>
-                <a:schemeClr val="tx1"/>
-              </a:solidFill>
-            </a:endParaRPr>
-          </a:p>
-          <a:p>
-            <a:pPr lvl="2">
-              <a:defRPr/>
-            </a:pPr>
-            <a:endParaRPr lang="en-US" b="1" dirty="0">
-              <a:solidFill>
-                <a:schemeClr val="tx1"/>
-              </a:solidFill>
-            </a:endParaRPr>
-          </a:p>
-          <a:p>
-            <a:pPr marL="457200" lvl="1" indent="0">
-              <a:buNone/>
-              <a:defRPr/>
-            </a:pPr>
-            <a:r>
-              <a:rPr lang="en-US" dirty="0">
-                <a:solidFill>
-                  <a:schemeClr val="tx1"/>
-                </a:solidFill>
-              </a:rPr>
-              <a:t>While </a:t>
-            </a:r>
-            <a:r>
-              <a:rPr lang="en-US" b="1" dirty="0">
-                <a:solidFill>
-                  <a:srgbClr val="00B0F0"/>
-                </a:solidFill>
-              </a:rPr>
-              <a:t>Collection does not.</a:t>
-            </a:r>
-            <a:r>
-              <a:rPr lang="en-US" dirty="0">
-                <a:solidFill>
-                  <a:schemeClr val="tx1"/>
-                </a:solidFill>
-              </a:rPr>
-              <a:t> </a:t>
-            </a:r>
-            <a:br>
-              <a:rPr lang="en-US" dirty="0">
-                <a:solidFill>
-                  <a:schemeClr val="tx1"/>
-                </a:solidFill>
-              </a:rPr>
-            </a:br>
-            <a:br>
-              <a:rPr lang="en-US" dirty="0">
-                <a:solidFill>
-                  <a:schemeClr val="tx1"/>
-                </a:solidFill>
-              </a:rPr>
-            </a:br>
-            <a:r>
-              <a:rPr lang="en-US" dirty="0">
-                <a:solidFill>
-                  <a:schemeClr val="tx1"/>
-                </a:solidFill>
-              </a:rPr>
-              <a:t>If you need a Collection and you have no requirement for </a:t>
-            </a:r>
-            <a:r>
-              <a:rPr lang="en-US" b="1" dirty="0">
-                <a:solidFill>
-                  <a:schemeClr val="tx1"/>
-                </a:solidFill>
-              </a:rPr>
-              <a:t>avoiding duplicates</a:t>
-            </a:r>
-            <a:r>
-              <a:rPr lang="en-US" dirty="0">
-                <a:solidFill>
-                  <a:schemeClr val="tx1"/>
-                </a:solidFill>
-              </a:rPr>
-              <a:t> then use a Collection. </a:t>
-            </a:r>
-            <a:br>
-              <a:rPr lang="en-US" dirty="0">
-                <a:solidFill>
-                  <a:schemeClr val="tx1"/>
-                </a:solidFill>
-              </a:rPr>
-            </a:br>
-            <a:br>
-              <a:rPr lang="en-US" dirty="0">
-                <a:solidFill>
-                  <a:schemeClr val="tx1"/>
-                </a:solidFill>
-              </a:rPr>
-            </a:br>
-            <a:r>
-              <a:rPr lang="en-US" dirty="0">
-                <a:solidFill>
-                  <a:schemeClr val="tx1"/>
-                </a:solidFill>
-              </a:rPr>
-              <a:t>If you have the requirement for Set then use Set. </a:t>
-            </a:r>
-            <a:r>
-              <a:rPr lang="en-US" dirty="0">
-                <a:solidFill>
-                  <a:schemeClr val="tx1"/>
-                </a:solidFill>
-                <a:hlinkClick r:id="rId2"/>
-              </a:rPr>
-              <a:t>(Source)</a:t>
-            </a:r>
-            <a:endParaRPr lang="en-US" dirty="0">
-              <a:solidFill>
-                <a:schemeClr val="tx1"/>
-              </a:solidFill>
-            </a:endParaRPr>
-          </a:p>
-        </p:txBody>
-      </p:sp>
-      <p:pic>
-        <p:nvPicPr>
-          <p:cNvPr id="2" name="Picture 1"/>
-          <p:cNvPicPr>
-            <a:picLocks noChangeAspect="1"/>
-          </p:cNvPicPr>
-          <p:nvPr/>
-        </p:nvPicPr>
-        <p:blipFill>
-          <a:blip r:embed="rId3"/>
-          <a:stretch>
-            <a:fillRect/>
-          </a:stretch>
-        </p:blipFill>
-        <p:spPr>
-          <a:xfrm>
-            <a:off x="4556759" y="2089289"/>
-            <a:ext cx="2676236" cy="3992920"/>
-          </a:xfrm>
-          <a:prstGeom prst="rect">
-            <a:avLst/>
-          </a:prstGeom>
-        </p:spPr>
-      </p:pic>
-      <p:pic>
-        <p:nvPicPr>
-          <p:cNvPr id="4" name="Picture 3"/>
-          <p:cNvPicPr>
-            <a:picLocks noChangeAspect="1"/>
-          </p:cNvPicPr>
-          <p:nvPr/>
-        </p:nvPicPr>
-        <p:blipFill>
-          <a:blip r:embed="rId4"/>
-          <a:stretch>
-            <a:fillRect/>
-          </a:stretch>
-        </p:blipFill>
-        <p:spPr>
-          <a:xfrm>
-            <a:off x="7432889" y="2089289"/>
-            <a:ext cx="2674328" cy="3992920"/>
-          </a:xfrm>
-          <a:prstGeom prst="rect">
-            <a:avLst/>
-          </a:prstGeom>
-        </p:spPr>
-      </p:pic>
-      <p:sp>
-        <p:nvSpPr>
-          <p:cNvPr id="5" name="TextBox 4"/>
-          <p:cNvSpPr txBox="1"/>
-          <p:nvPr/>
-        </p:nvSpPr>
-        <p:spPr>
-          <a:xfrm>
-            <a:off x="5263869" y="1691235"/>
-            <a:ext cx="1479892" cy="369332"/>
-          </a:xfrm>
-          <a:prstGeom prst="rect">
-            <a:avLst/>
-          </a:prstGeom>
-          <a:noFill/>
-        </p:spPr>
-        <p:txBody>
-          <a:bodyPr wrap="none" rtlCol="0">
-            <a:spAutoFit/>
-          </a:bodyPr>
-          <a:lstStyle/>
-          <a:p>
-            <a:pPr marL="0" marR="0" lvl="0" indent="0" algn="l" defTabSz="914400" rtl="0" eaLnBrk="1" fontAlgn="auto" latinLnBrk="0" hangingPunct="1">
-              <a:lnSpc>
-                <a:spcPct val="100000"/>
-              </a:lnSpc>
-              <a:spcBef>
-                <a:spcPts val="0"/>
-              </a:spcBef>
-              <a:spcAft>
-                <a:spcPts val="0"/>
-              </a:spcAft>
-              <a:buClrTx/>
-              <a:buSzTx/>
-              <a:buFontTx/>
-              <a:buNone/>
-              <a:tabLst/>
-              <a:defRPr/>
-            </a:pPr>
-            <a:r>
-              <a:rPr kumimoji="0" lang="en-US" sz="1800" b="0" i="0" u="none" strike="noStrike" kern="1200" cap="none" spc="0" normalizeH="0" baseline="0" noProof="0" dirty="0">
-                <a:ln>
-                  <a:noFill/>
-                </a:ln>
-                <a:solidFill>
-                  <a:srgbClr val="000000"/>
-                </a:solidFill>
-                <a:effectLst/>
-                <a:uLnTx/>
-                <a:uFillTx/>
-                <a:latin typeface="Arial" panose="020B0604020202020204"/>
-                <a:ea typeface="+mn-ea"/>
-                <a:cs typeface="+mn-cs"/>
-              </a:rPr>
-              <a:t>Set interface</a:t>
-            </a:r>
-          </a:p>
-        </p:txBody>
-      </p:sp>
-      <p:sp>
-        <p:nvSpPr>
-          <p:cNvPr id="7" name="TextBox 6"/>
-          <p:cNvSpPr txBox="1"/>
-          <p:nvPr/>
-        </p:nvSpPr>
-        <p:spPr>
-          <a:xfrm>
-            <a:off x="7706712" y="1719957"/>
-            <a:ext cx="2146742" cy="369332"/>
-          </a:xfrm>
-          <a:prstGeom prst="rect">
-            <a:avLst/>
-          </a:prstGeom>
-          <a:noFill/>
-        </p:spPr>
-        <p:txBody>
-          <a:bodyPr wrap="none" rtlCol="0">
-            <a:spAutoFit/>
-          </a:bodyPr>
-          <a:lstStyle/>
-          <a:p>
-            <a:pPr marL="0" marR="0" lvl="0" indent="0" algn="l" defTabSz="914400" rtl="0" eaLnBrk="1" fontAlgn="auto" latinLnBrk="0" hangingPunct="1">
-              <a:lnSpc>
-                <a:spcPct val="100000"/>
-              </a:lnSpc>
-              <a:spcBef>
-                <a:spcPts val="0"/>
-              </a:spcBef>
-              <a:spcAft>
-                <a:spcPts val="0"/>
-              </a:spcAft>
-              <a:buClrTx/>
-              <a:buSzTx/>
-              <a:buFontTx/>
-              <a:buNone/>
-              <a:tabLst/>
-              <a:defRPr/>
-            </a:pPr>
-            <a:r>
-              <a:rPr kumimoji="0" lang="en-US" sz="1800" b="0" i="0" u="none" strike="noStrike" kern="1200" cap="none" spc="0" normalizeH="0" baseline="0" noProof="0" dirty="0">
-                <a:ln>
-                  <a:noFill/>
-                </a:ln>
-                <a:solidFill>
-                  <a:srgbClr val="000000"/>
-                </a:solidFill>
-                <a:effectLst/>
-                <a:uLnTx/>
-                <a:uFillTx/>
-                <a:latin typeface="Arial" panose="020B0604020202020204"/>
-                <a:ea typeface="+mn-ea"/>
-                <a:cs typeface="+mn-cs"/>
-              </a:rPr>
-              <a:t>Collection interface</a:t>
-            </a:r>
-          </a:p>
-        </p:txBody>
-      </p:sp>
-    </p:spTree>
-    <p:extLst>
-      <p:ext uri="{BB962C8B-B14F-4D97-AF65-F5344CB8AC3E}">
-        <p14:creationId xmlns:p14="http://schemas.microsoft.com/office/powerpoint/2010/main" val="1409644791"/>
       </p:ext>
     </p:extLst>
   </p:cSld>
@@ -20123,7 +19753,7 @@
         <p:spPr>
           <a:xfrm>
             <a:off x="936516" y="810202"/>
-            <a:ext cx="4946394" cy="670641"/>
+            <a:ext cx="7240486" cy="670641"/>
           </a:xfrm>
         </p:spPr>
         <p:txBody>
@@ -20135,38 +19765,222 @@
             <a:pPr eaLnBrk="1" hangingPunct="1"/>
             <a:r>
               <a:rPr lang="en-US" altLang="en-US" dirty="0"/>
-              <a:t>Sets and Set interface</a:t>
-            </a:r>
+              <a:t>Set interface vs Collection interface</a:t>
+            </a:r>
+          </a:p>
+        </p:txBody>
+      </p:sp>
+      <p:sp>
+        <p:nvSpPr>
+          <p:cNvPr id="3" name="Content Placeholder 2"/>
+          <p:cNvSpPr>
+            <a:spLocks noGrp="1"/>
+          </p:cNvSpPr>
+          <p:nvPr>
+            <p:ph idx="1"/>
+          </p:nvPr>
+        </p:nvSpPr>
+        <p:spPr>
+          <a:xfrm>
+            <a:off x="673526" y="1656365"/>
+            <a:ext cx="3627392" cy="4995287"/>
+          </a:xfrm>
+        </p:spPr>
+        <p:txBody>
+          <a:bodyPr rtlCol="0">
+            <a:normAutofit/>
+          </a:bodyPr>
+          <a:lstStyle/>
+          <a:p>
+            <a:pPr marL="0" indent="0">
+              <a:buNone/>
+              <a:defRPr/>
+            </a:pPr>
+            <a:r>
+              <a:rPr lang="en-US" b="1" dirty="0">
+                <a:solidFill>
+                  <a:schemeClr val="tx1"/>
+                </a:solidFill>
+              </a:rPr>
+              <a:t>Why the same?</a:t>
+            </a:r>
+          </a:p>
+          <a:p>
+            <a:pPr lvl="1">
+              <a:defRPr/>
+            </a:pPr>
+            <a:r>
+              <a:rPr lang="en-US" dirty="0">
+                <a:solidFill>
+                  <a:schemeClr val="tx1"/>
+                </a:solidFill>
+              </a:rPr>
+              <a:t>Differences, set enforces:</a:t>
+            </a:r>
+          </a:p>
+          <a:p>
+            <a:pPr lvl="2">
+              <a:defRPr/>
+            </a:pPr>
+            <a:r>
+              <a:rPr lang="en-US" b="1" dirty="0">
+                <a:solidFill>
+                  <a:srgbClr val="FF0000"/>
+                </a:solidFill>
+              </a:rPr>
+              <a:t>set logic</a:t>
+            </a:r>
+          </a:p>
+          <a:p>
+            <a:pPr lvl="2">
+              <a:defRPr/>
+            </a:pPr>
+            <a:r>
+              <a:rPr lang="en-US" b="1" dirty="0">
+                <a:solidFill>
+                  <a:srgbClr val="FF0000"/>
+                </a:solidFill>
+              </a:rPr>
+              <a:t>no duplicates</a:t>
+            </a:r>
+          </a:p>
+          <a:p>
+            <a:pPr lvl="2">
+              <a:defRPr/>
+            </a:pPr>
+            <a:r>
+              <a:rPr lang="en-US" b="1" dirty="0">
+                <a:solidFill>
+                  <a:srgbClr val="FF0000"/>
+                </a:solidFill>
+              </a:rPr>
+              <a:t>Unordered</a:t>
+            </a:r>
+            <a:endParaRPr lang="en-US" b="1" dirty="0">
+              <a:solidFill>
+                <a:schemeClr val="tx1"/>
+              </a:solidFill>
+            </a:endParaRPr>
+          </a:p>
+          <a:p>
+            <a:pPr lvl="2">
+              <a:defRPr/>
+            </a:pPr>
+            <a:endParaRPr lang="en-US" b="1" dirty="0">
+              <a:solidFill>
+                <a:schemeClr val="tx1"/>
+              </a:solidFill>
+            </a:endParaRPr>
+          </a:p>
+          <a:p>
+            <a:pPr marL="457200" lvl="1" indent="0">
+              <a:buNone/>
+              <a:defRPr/>
+            </a:pPr>
+            <a:r>
+              <a:rPr lang="en-US" dirty="0">
+                <a:solidFill>
+                  <a:schemeClr val="tx1"/>
+                </a:solidFill>
+              </a:rPr>
+              <a:t>While </a:t>
+            </a:r>
+            <a:r>
+              <a:rPr lang="en-US" b="1" dirty="0">
+                <a:solidFill>
+                  <a:srgbClr val="00B0F0"/>
+                </a:solidFill>
+              </a:rPr>
+              <a:t>Collection does not.</a:t>
+            </a:r>
+            <a:r>
+              <a:rPr lang="en-US" dirty="0">
+                <a:solidFill>
+                  <a:schemeClr val="tx1"/>
+                </a:solidFill>
+              </a:rPr>
+              <a:t> </a:t>
+            </a:r>
+            <a:br>
+              <a:rPr lang="en-US" dirty="0">
+                <a:solidFill>
+                  <a:schemeClr val="tx1"/>
+                </a:solidFill>
+              </a:rPr>
+            </a:br>
+            <a:br>
+              <a:rPr lang="en-US" dirty="0">
+                <a:solidFill>
+                  <a:schemeClr val="tx1"/>
+                </a:solidFill>
+              </a:rPr>
+            </a:br>
+            <a:r>
+              <a:rPr lang="en-US" dirty="0">
+                <a:solidFill>
+                  <a:schemeClr val="tx1"/>
+                </a:solidFill>
+              </a:rPr>
+              <a:t>If you need a Collection and you have no requirement for </a:t>
+            </a:r>
+            <a:r>
+              <a:rPr lang="en-US" b="1" dirty="0">
+                <a:solidFill>
+                  <a:schemeClr val="tx1"/>
+                </a:solidFill>
+              </a:rPr>
+              <a:t>avoiding duplicates</a:t>
+            </a:r>
+            <a:r>
+              <a:rPr lang="en-US" dirty="0">
+                <a:solidFill>
+                  <a:schemeClr val="tx1"/>
+                </a:solidFill>
+              </a:rPr>
+              <a:t> then use a Collection. </a:t>
+            </a:r>
+            <a:br>
+              <a:rPr lang="en-US" dirty="0">
+                <a:solidFill>
+                  <a:schemeClr val="tx1"/>
+                </a:solidFill>
+              </a:rPr>
+            </a:br>
+            <a:br>
+              <a:rPr lang="en-US" dirty="0">
+                <a:solidFill>
+                  <a:schemeClr val="tx1"/>
+                </a:solidFill>
+              </a:rPr>
+            </a:br>
+            <a:r>
+              <a:rPr lang="en-US" dirty="0">
+                <a:solidFill>
+                  <a:schemeClr val="tx1"/>
+                </a:solidFill>
+              </a:rPr>
+              <a:t>If you have the requirement for Set then use Set. </a:t>
+            </a:r>
+            <a:r>
+              <a:rPr lang="en-US" dirty="0">
+                <a:solidFill>
+                  <a:schemeClr val="tx1"/>
+                </a:solidFill>
+                <a:hlinkClick r:id="rId2"/>
+              </a:rPr>
+              <a:t>(Source)</a:t>
+            </a:r>
+            <a:endParaRPr lang="en-US" dirty="0">
+              <a:solidFill>
+                <a:schemeClr val="tx1"/>
+              </a:solidFill>
+            </a:endParaRPr>
           </a:p>
         </p:txBody>
       </p:sp>
       <p:pic>
         <p:nvPicPr>
-          <p:cNvPr id="5" name="Picture 4"/>
-          <p:cNvPicPr>
-            <a:picLocks noChangeAspect="1"/>
-          </p:cNvPicPr>
-          <p:nvPr/>
-        </p:nvPicPr>
-        <p:blipFill>
-          <a:blip r:embed="rId2"/>
-          <a:stretch>
-            <a:fillRect/>
-          </a:stretch>
-        </p:blipFill>
-        <p:spPr>
-          <a:xfrm>
-            <a:off x="819973" y="4085247"/>
-            <a:ext cx="5170850" cy="1948594"/>
-          </a:xfrm>
-          <a:prstGeom prst="rect">
-            <a:avLst/>
-          </a:prstGeom>
-        </p:spPr>
-      </p:pic>
-      <p:pic>
-        <p:nvPicPr>
-          <p:cNvPr id="6" name="Picture 5"/>
+          <p:cNvPr id="2" name="Picture 1"/>
           <p:cNvPicPr>
             <a:picLocks noChangeAspect="1"/>
           </p:cNvPicPr>
@@ -20180,8 +19994,8 @@
         </p:blipFill>
         <p:spPr>
           <a:xfrm>
-            <a:off x="6592170" y="4085247"/>
-            <a:ext cx="5198065" cy="1894164"/>
+            <a:off x="4556759" y="2089289"/>
+            <a:ext cx="2676236" cy="3992920"/>
           </a:xfrm>
           <a:prstGeom prst="rect">
             <a:avLst/>
@@ -20190,7 +20004,7 @@
       </p:pic>
       <p:pic>
         <p:nvPicPr>
-          <p:cNvPr id="7" name="Picture 6"/>
+          <p:cNvPr id="4" name="Picture 3"/>
           <p:cNvPicPr>
             <a:picLocks noChangeAspect="1"/>
           </p:cNvPicPr>
@@ -20204,8 +20018,8 @@
         </p:blipFill>
         <p:spPr>
           <a:xfrm>
-            <a:off x="3366315" y="1605329"/>
-            <a:ext cx="5159964" cy="1883278"/>
+            <a:off x="7432889" y="2089289"/>
+            <a:ext cx="2674328" cy="3992920"/>
           </a:xfrm>
           <a:prstGeom prst="rect">
             <a:avLst/>
@@ -20214,302 +20028,118 @@
       </p:pic>
       <p:sp>
         <p:nvSpPr>
-          <p:cNvPr id="2" name="Content Placeholder 2">
-            <a:extLst>
-              <a:ext uri="{FF2B5EF4-FFF2-40B4-BE49-F238E27FC236}">
-                <a16:creationId xmlns:a16="http://schemas.microsoft.com/office/drawing/2014/main" id="{9CAA5D68-BE49-9B6C-4584-262045AFFE80}"/>
-              </a:ext>
-            </a:extLst>
-          </p:cNvPr>
-          <p:cNvSpPr txBox="1">
-            <a:spLocks/>
-          </p:cNvSpPr>
+          <p:cNvPr id="5" name="TextBox 4"/>
+          <p:cNvSpPr txBox="1"/>
           <p:nvPr/>
         </p:nvSpPr>
         <p:spPr>
           <a:xfrm>
-            <a:off x="1479882" y="27491"/>
-            <a:ext cx="6020822" cy="329884"/>
+            <a:off x="5263869" y="1691235"/>
+            <a:ext cx="1479892" cy="369332"/>
           </a:xfrm>
           <a:prstGeom prst="rect">
             <a:avLst/>
           </a:prstGeom>
-          <a:ln w="28575">
-            <a:solidFill>
-              <a:srgbClr val="FF0000"/>
-            </a:solidFill>
-          </a:ln>
+          <a:noFill/>
         </p:spPr>
         <p:txBody>
-          <a:bodyPr vert="horz" lIns="91440" tIns="45720" rIns="91440" bIns="45720" rtlCol="0">
-            <a:normAutofit fontScale="77500" lnSpcReduction="20000"/>
+          <a:bodyPr wrap="none" rtlCol="0">
+            <a:spAutoFit/>
           </a:bodyPr>
-          <a:lstStyle>
-            <a:lvl1pPr marL="228600" indent="-228600" algn="l" defTabSz="914400" rtl="0" eaLnBrk="1" latinLnBrk="0" hangingPunct="1">
+          <a:lstStyle/>
+          <a:p>
+            <a:pPr marL="0" marR="0" lvl="0" indent="0" algn="l" defTabSz="914400" rtl="0" eaLnBrk="1" fontAlgn="auto" latinLnBrk="0" hangingPunct="1">
               <a:lnSpc>
-                <a:spcPct val="90000"/>
+                <a:spcPct val="100000"/>
               </a:lnSpc>
               <a:spcBef>
-                <a:spcPts val="1000"/>
-              </a:spcBef>
-              <a:buClr>
-                <a:srgbClr val="B30738"/>
-              </a:buClr>
-              <a:buFont typeface="Arial" panose="020B0604020202020204" pitchFamily="34" charset="0"/>
-              <a:buChar char="•"/>
-              <a:defRPr sz="2600" b="0" i="0" kern="1200">
-                <a:solidFill>
-                  <a:srgbClr val="002060"/>
-                </a:solidFill>
-                <a:latin typeface="Arial Narrow" panose="020B0604020202020204" pitchFamily="34" charset="0"/>
-                <a:ea typeface="+mn-ea"/>
-                <a:cs typeface="Arial Narrow" panose="020B0604020202020204" pitchFamily="34" charset="0"/>
-              </a:defRPr>
-            </a:lvl1pPr>
-            <a:lvl2pPr marL="685800" indent="-228600" algn="l" defTabSz="914400" rtl="0" eaLnBrk="1" latinLnBrk="0" hangingPunct="1">
-              <a:lnSpc>
-                <a:spcPct val="90000"/>
-              </a:lnSpc>
-              <a:spcBef>
-                <a:spcPts val="500"/>
-              </a:spcBef>
-              <a:buClr>
-                <a:srgbClr val="B30738"/>
-              </a:buClr>
-              <a:buFont typeface="Arial" panose="020B0604020202020204" pitchFamily="34" charset="0"/>
-              <a:buChar char="•"/>
-              <a:defRPr sz="2400" b="0" i="0" kern="1200">
-                <a:solidFill>
-                  <a:schemeClr val="accent2">
-                    <a:lumMod val="75000"/>
-                  </a:schemeClr>
-                </a:solidFill>
-                <a:latin typeface="Arial Narrow" panose="020B0604020202020204" pitchFamily="34" charset="0"/>
-                <a:ea typeface="+mn-ea"/>
-                <a:cs typeface="Arial Narrow" panose="020B0604020202020204" pitchFamily="34" charset="0"/>
-              </a:defRPr>
-            </a:lvl2pPr>
-            <a:lvl3pPr marL="1143000" indent="-228600" algn="l" defTabSz="914400" rtl="0" eaLnBrk="1" latinLnBrk="0" hangingPunct="1">
-              <a:lnSpc>
-                <a:spcPct val="90000"/>
-              </a:lnSpc>
-              <a:spcBef>
-                <a:spcPts val="500"/>
-              </a:spcBef>
-              <a:buClr>
-                <a:srgbClr val="B30738"/>
-              </a:buClr>
-              <a:buFont typeface="Arial" panose="020B0604020202020204" pitchFamily="34" charset="0"/>
-              <a:buChar char="•"/>
-              <a:defRPr sz="2000" b="0" i="0" kern="1200">
-                <a:solidFill>
-                  <a:schemeClr val="tx1">
-                    <a:lumMod val="65000"/>
-                    <a:lumOff val="35000"/>
-                  </a:schemeClr>
-                </a:solidFill>
-                <a:latin typeface="Arial Narrow" panose="020B0604020202020204" pitchFamily="34" charset="0"/>
-                <a:ea typeface="+mn-ea"/>
-                <a:cs typeface="Arial Narrow" panose="020B0604020202020204" pitchFamily="34" charset="0"/>
-              </a:defRPr>
-            </a:lvl3pPr>
-            <a:lvl4pPr marL="1600200" indent="-228600" algn="l" defTabSz="914400" rtl="0" eaLnBrk="1" latinLnBrk="0" hangingPunct="1">
-              <a:lnSpc>
-                <a:spcPct val="90000"/>
-              </a:lnSpc>
-              <a:spcBef>
-                <a:spcPts val="500"/>
-              </a:spcBef>
-              <a:buClr>
-                <a:srgbClr val="B30738"/>
-              </a:buClr>
-              <a:buFont typeface="Arial" panose="020B0604020202020204" pitchFamily="34" charset="0"/>
-              <a:buChar char="•"/>
-              <a:defRPr sz="1800" b="0" i="0" kern="1200">
-                <a:solidFill>
-                  <a:schemeClr val="tx1">
-                    <a:lumMod val="65000"/>
-                    <a:lumOff val="35000"/>
-                  </a:schemeClr>
-                </a:solidFill>
-                <a:latin typeface="Arial Narrow" panose="020B0604020202020204" pitchFamily="34" charset="0"/>
-                <a:ea typeface="+mn-ea"/>
-                <a:cs typeface="Arial Narrow" panose="020B0604020202020204" pitchFamily="34" charset="0"/>
-              </a:defRPr>
-            </a:lvl4pPr>
-            <a:lvl5pPr marL="2057400" indent="-228600" algn="l" defTabSz="914400" rtl="0" eaLnBrk="1" latinLnBrk="0" hangingPunct="1">
-              <a:lnSpc>
-                <a:spcPct val="90000"/>
-              </a:lnSpc>
-              <a:spcBef>
-                <a:spcPts val="500"/>
-              </a:spcBef>
-              <a:buClr>
-                <a:srgbClr val="B30738"/>
-              </a:buClr>
-              <a:buFont typeface="Arial" panose="020B0604020202020204" pitchFamily="34" charset="0"/>
-              <a:buChar char="•"/>
-              <a:defRPr sz="1600" b="0" i="0" kern="1200">
-                <a:solidFill>
-                  <a:schemeClr val="tx1">
-                    <a:lumMod val="65000"/>
-                    <a:lumOff val="35000"/>
-                  </a:schemeClr>
-                </a:solidFill>
-                <a:latin typeface="Arial Narrow" panose="020B0604020202020204" pitchFamily="34" charset="0"/>
-                <a:ea typeface="+mn-ea"/>
-                <a:cs typeface="Arial Narrow" panose="020B0604020202020204" pitchFamily="34" charset="0"/>
-              </a:defRPr>
-            </a:lvl5pPr>
-            <a:lvl6pPr marL="2514600" indent="-228600" algn="l" defTabSz="914400" rtl="0" eaLnBrk="1" latinLnBrk="0" hangingPunct="1">
-              <a:lnSpc>
-                <a:spcPct val="90000"/>
-              </a:lnSpc>
-              <a:spcBef>
-                <a:spcPts val="500"/>
-              </a:spcBef>
-              <a:buFont typeface="Arial" panose="020B0604020202020204" pitchFamily="34" charset="0"/>
-              <a:buChar char="•"/>
-              <a:defRPr sz="1800" kern="1200">
-                <a:solidFill>
-                  <a:schemeClr val="tx1"/>
-                </a:solidFill>
-                <a:latin typeface="+mn-lt"/>
-                <a:ea typeface="+mn-ea"/>
-                <a:cs typeface="+mn-cs"/>
-              </a:defRPr>
-            </a:lvl6pPr>
-            <a:lvl7pPr marL="2971800" indent="-228600" algn="l" defTabSz="914400" rtl="0" eaLnBrk="1" latinLnBrk="0" hangingPunct="1">
-              <a:lnSpc>
-                <a:spcPct val="90000"/>
-              </a:lnSpc>
-              <a:spcBef>
-                <a:spcPts val="500"/>
-              </a:spcBef>
-              <a:buFont typeface="Arial" panose="020B0604020202020204" pitchFamily="34" charset="0"/>
-              <a:buChar char="•"/>
-              <a:defRPr sz="1800" kern="1200">
-                <a:solidFill>
-                  <a:schemeClr val="tx1"/>
-                </a:solidFill>
-                <a:latin typeface="+mn-lt"/>
-                <a:ea typeface="+mn-ea"/>
-                <a:cs typeface="+mn-cs"/>
-              </a:defRPr>
-            </a:lvl7pPr>
-            <a:lvl8pPr marL="3429000" indent="-228600" algn="l" defTabSz="914400" rtl="0" eaLnBrk="1" latinLnBrk="0" hangingPunct="1">
-              <a:lnSpc>
-                <a:spcPct val="90000"/>
-              </a:lnSpc>
-              <a:spcBef>
-                <a:spcPts val="500"/>
-              </a:spcBef>
-              <a:buFont typeface="Arial" panose="020B0604020202020204" pitchFamily="34" charset="0"/>
-              <a:buChar char="•"/>
-              <a:defRPr sz="1800" kern="1200">
-                <a:solidFill>
-                  <a:schemeClr val="tx1"/>
-                </a:solidFill>
-                <a:latin typeface="+mn-lt"/>
-                <a:ea typeface="+mn-ea"/>
-                <a:cs typeface="+mn-cs"/>
-              </a:defRPr>
-            </a:lvl8pPr>
-            <a:lvl9pPr marL="3886200" indent="-228600" algn="l" defTabSz="914400" rtl="0" eaLnBrk="1" latinLnBrk="0" hangingPunct="1">
-              <a:lnSpc>
-                <a:spcPct val="90000"/>
-              </a:lnSpc>
-              <a:spcBef>
-                <a:spcPts val="500"/>
-              </a:spcBef>
-              <a:buFont typeface="Arial" panose="020B0604020202020204" pitchFamily="34" charset="0"/>
-              <a:buChar char="•"/>
-              <a:defRPr sz="1800" kern="1200">
-                <a:solidFill>
-                  <a:schemeClr val="tx1"/>
-                </a:solidFill>
-                <a:latin typeface="+mn-lt"/>
-                <a:ea typeface="+mn-ea"/>
-                <a:cs typeface="+mn-cs"/>
-              </a:defRPr>
-            </a:lvl9pPr>
-          </a:lstStyle>
-          <a:p>
-            <a:pPr marL="0" lvl="0" indent="0" algn="ctr">
-              <a:buNone/>
+                <a:spcPts val="0"/>
+              </a:spcBef>
+              <a:spcAft>
+                <a:spcPts val="0"/>
+              </a:spcAft>
+              <a:buClrTx/>
+              <a:buSzTx/>
+              <a:buFontTx/>
+              <a:buNone/>
+              <a:tabLst/>
               <a:defRPr/>
             </a:pPr>
             <a:r>
-              <a:rPr kumimoji="0" lang="en-US" sz="2600" b="0" i="0" u="none" strike="noStrike" kern="1200" cap="none" spc="0" normalizeH="0" baseline="0" noProof="0" dirty="0">
+              <a:rPr kumimoji="0" lang="en-US" sz="1800" b="0" i="0" u="none" strike="noStrike" kern="1200" cap="none" spc="0" normalizeH="0" baseline="0" noProof="0" dirty="0">
                 <a:ln>
                   <a:noFill/>
                 </a:ln>
                 <a:solidFill>
-                  <a:srgbClr val="C00000"/>
+                  <a:srgbClr val="000000"/>
                 </a:solidFill>
                 <a:effectLst/>
                 <a:uLnTx/>
                 <a:uFillTx/>
-                <a:latin typeface="Arial Narrow" panose="020B0604020202020204" pitchFamily="34" charset="0"/>
+                <a:latin typeface="Arial" panose="020B0604020202020204"/>
                 <a:ea typeface="+mn-ea"/>
-              </a:rPr>
-              <a:t>“</a:t>
-            </a:r>
-            <a:r>
-              <a:rPr lang="en-US" dirty="0">
-                <a:solidFill>
-                  <a:srgbClr val="C00000"/>
-                </a:solidFill>
-              </a:rPr>
-              <a:t>CSEN160_05_Lecture_DataStructursAndGenerics</a:t>
-            </a:r>
-            <a:r>
-              <a:rPr kumimoji="0" lang="en-US" sz="2600" b="0" i="0" u="none" strike="noStrike" kern="1200" cap="none" spc="0" normalizeH="0" baseline="0" noProof="0" dirty="0">
+                <a:cs typeface="+mn-cs"/>
+              </a:rPr>
+              <a:t>Set interface</a:t>
+            </a:r>
+          </a:p>
+        </p:txBody>
+      </p:sp>
+      <p:sp>
+        <p:nvSpPr>
+          <p:cNvPr id="7" name="TextBox 6"/>
+          <p:cNvSpPr txBox="1"/>
+          <p:nvPr/>
+        </p:nvSpPr>
+        <p:spPr>
+          <a:xfrm>
+            <a:off x="7706712" y="1719957"/>
+            <a:ext cx="2146742" cy="369332"/>
+          </a:xfrm>
+          <a:prstGeom prst="rect">
+            <a:avLst/>
+          </a:prstGeom>
+          <a:noFill/>
+        </p:spPr>
+        <p:txBody>
+          <a:bodyPr wrap="none" rtlCol="0">
+            <a:spAutoFit/>
+          </a:bodyPr>
+          <a:lstStyle/>
+          <a:p>
+            <a:pPr marL="0" marR="0" lvl="0" indent="0" algn="l" defTabSz="914400" rtl="0" eaLnBrk="1" fontAlgn="auto" latinLnBrk="0" hangingPunct="1">
+              <a:lnSpc>
+                <a:spcPct val="100000"/>
+              </a:lnSpc>
+              <a:spcBef>
+                <a:spcPts val="0"/>
+              </a:spcBef>
+              <a:spcAft>
+                <a:spcPts val="0"/>
+              </a:spcAft>
+              <a:buClrTx/>
+              <a:buSzTx/>
+              <a:buFontTx/>
+              <a:buNone/>
+              <a:tabLst/>
+              <a:defRPr/>
+            </a:pPr>
+            <a:r>
+              <a:rPr kumimoji="0" lang="en-US" sz="1800" b="0" i="0" u="none" strike="noStrike" kern="1200" cap="none" spc="0" normalizeH="0" baseline="0" noProof="0" dirty="0">
                 <a:ln>
                   <a:noFill/>
                 </a:ln>
                 <a:solidFill>
-                  <a:srgbClr val="C00000"/>
+                  <a:srgbClr val="000000"/>
                 </a:solidFill>
                 <a:effectLst/>
                 <a:uLnTx/>
                 <a:uFillTx/>
-                <a:latin typeface="Arial Narrow" panose="020B0604020202020204" pitchFamily="34" charset="0"/>
+                <a:latin typeface="Arial" panose="020B0604020202020204"/>
                 <a:ea typeface="+mn-ea"/>
-              </a:rPr>
-              <a:t>.</a:t>
-            </a:r>
-            <a:r>
-              <a:rPr kumimoji="0" lang="en-US" sz="2600" b="0" i="0" u="none" strike="noStrike" kern="1200" cap="none" spc="0" normalizeH="0" baseline="0" noProof="0" dirty="0" err="1">
-                <a:ln>
-                  <a:noFill/>
-                </a:ln>
-                <a:solidFill>
-                  <a:srgbClr val="C00000"/>
-                </a:solidFill>
-                <a:effectLst/>
-                <a:uLnTx/>
-                <a:uFillTx/>
-                <a:latin typeface="Arial Narrow" panose="020B0604020202020204" pitchFamily="34" charset="0"/>
-                <a:ea typeface="+mn-ea"/>
-              </a:rPr>
-              <a:t>T_Set</a:t>
-            </a:r>
-            <a:r>
-              <a:rPr kumimoji="0" lang="en-US" sz="2600" b="0" i="0" u="none" strike="noStrike" kern="1200" cap="none" spc="0" normalizeH="0" baseline="0" noProof="0" dirty="0">
-                <a:ln>
-                  <a:noFill/>
-                </a:ln>
-                <a:solidFill>
-                  <a:srgbClr val="C00000"/>
-                </a:solidFill>
-                <a:effectLst/>
-                <a:uLnTx/>
-                <a:uFillTx/>
-                <a:latin typeface="Arial Narrow" panose="020B0604020202020204" pitchFamily="34" charset="0"/>
-                <a:ea typeface="+mn-ea"/>
-              </a:rPr>
-              <a:t>”</a:t>
+                <a:cs typeface="+mn-cs"/>
+              </a:rPr>
+              <a:t>Collection interface</a:t>
             </a:r>
           </a:p>
         </p:txBody>
@@ -20517,7 +20147,7 @@
     </p:spTree>
     <p:extLst>
       <p:ext uri="{BB962C8B-B14F-4D97-AF65-F5344CB8AC3E}">
-        <p14:creationId xmlns:p14="http://schemas.microsoft.com/office/powerpoint/2010/main" val="3913914751"/>
+        <p14:creationId xmlns:p14="http://schemas.microsoft.com/office/powerpoint/2010/main" val="1409644791"/>
       </p:ext>
     </p:extLst>
   </p:cSld>
@@ -20557,7 +20187,7 @@
         <p:spPr>
           <a:xfrm>
             <a:off x="936516" y="810202"/>
-            <a:ext cx="6423190" cy="670641"/>
+            <a:ext cx="4946394" cy="670641"/>
           </a:xfrm>
         </p:spPr>
         <p:txBody>
@@ -20569,14 +20199,14 @@
             <a:pPr eaLnBrk="1" hangingPunct="1"/>
             <a:r>
               <a:rPr lang="en-US" altLang="en-US" dirty="0"/>
-              <a:t>Sets and Collection interface</a:t>
+              <a:t>Sets and Set interface</a:t>
             </a:r>
           </a:p>
         </p:txBody>
       </p:sp>
       <p:pic>
         <p:nvPicPr>
-          <p:cNvPr id="2" name="Picture 1"/>
+          <p:cNvPr id="5" name="Picture 4"/>
           <p:cNvPicPr>
             <a:picLocks noChangeAspect="1"/>
           </p:cNvPicPr>
@@ -20590,8 +20220,8 @@
         </p:blipFill>
         <p:spPr>
           <a:xfrm>
-            <a:off x="3317546" y="1587675"/>
-            <a:ext cx="5208951" cy="1910493"/>
+            <a:off x="819973" y="4085247"/>
+            <a:ext cx="5170850" cy="1948594"/>
           </a:xfrm>
           <a:prstGeom prst="rect">
             <a:avLst/>
@@ -20600,7 +20230,7 @@
       </p:pic>
       <p:pic>
         <p:nvPicPr>
-          <p:cNvPr id="3" name="Picture 2"/>
+          <p:cNvPr id="6" name="Picture 5"/>
           <p:cNvPicPr>
             <a:picLocks noChangeAspect="1"/>
           </p:cNvPicPr>
@@ -20614,8 +20244,8 @@
         </p:blipFill>
         <p:spPr>
           <a:xfrm>
-            <a:off x="819900" y="4093339"/>
-            <a:ext cx="5187179" cy="1894164"/>
+            <a:off x="6592170" y="4085247"/>
+            <a:ext cx="5198065" cy="1894164"/>
           </a:xfrm>
           <a:prstGeom prst="rect">
             <a:avLst/>
@@ -20638,8 +20268,8 @@
         </p:blipFill>
         <p:spPr>
           <a:xfrm>
-            <a:off x="6621744" y="4076937"/>
-            <a:ext cx="5219837" cy="1943151"/>
+            <a:off x="3366315" y="1605329"/>
+            <a:ext cx="5159964" cy="1883278"/>
           </a:xfrm>
           <a:prstGeom prst="rect">
             <a:avLst/>
@@ -20648,10 +20278,10 @@
       </p:pic>
       <p:sp>
         <p:nvSpPr>
-          <p:cNvPr id="5" name="Content Placeholder 2">
+          <p:cNvPr id="2" name="Content Placeholder 2">
             <a:extLst>
               <a:ext uri="{FF2B5EF4-FFF2-40B4-BE49-F238E27FC236}">
-                <a16:creationId xmlns:a16="http://schemas.microsoft.com/office/drawing/2014/main" id="{70E6DEDB-C1EA-2A8C-436A-4F6EF837ACFF}"/>
+                <a16:creationId xmlns:a16="http://schemas.microsoft.com/office/drawing/2014/main" id="{9CAA5D68-BE49-9B6C-4584-262045AFFE80}"/>
               </a:ext>
             </a:extLst>
           </p:cNvPr>
@@ -20951,7 +20581,7 @@
     </p:spTree>
     <p:extLst>
       <p:ext uri="{BB962C8B-B14F-4D97-AF65-F5344CB8AC3E}">
-        <p14:creationId xmlns:p14="http://schemas.microsoft.com/office/powerpoint/2010/main" val="138419387"/>
+        <p14:creationId xmlns:p14="http://schemas.microsoft.com/office/powerpoint/2010/main" val="3913914751"/>
       </p:ext>
     </p:extLst>
   </p:cSld>
@@ -21565,7 +21195,7 @@
       </p:grpSpPr>
       <p:sp>
         <p:nvSpPr>
-          <p:cNvPr id="4098" name="Title 1"/>
+          <p:cNvPr id="14338" name="Title 1"/>
           <p:cNvSpPr>
             <a:spLocks noGrp="1"/>
           </p:cNvSpPr>
@@ -21573,40 +21203,404 @@
             <p:ph type="title"/>
           </p:nvPr>
         </p:nvSpPr>
-        <p:spPr/>
+        <p:spPr>
+          <a:xfrm>
+            <a:off x="936516" y="810202"/>
+            <a:ext cx="6423190" cy="670641"/>
+          </a:xfrm>
+        </p:spPr>
         <p:txBody>
-          <a:bodyPr/>
+          <a:bodyPr>
+            <a:normAutofit fontScale="90000"/>
+          </a:bodyPr>
           <a:lstStyle/>
           <a:p>
             <a:pPr eaLnBrk="1" hangingPunct="1"/>
             <a:r>
               <a:rPr lang="en-US" altLang="en-US" dirty="0"/>
-              <a:t>Maps</a:t>
-            </a:r>
-            <a:br>
-              <a:rPr lang="en-US" altLang="en-US" dirty="0"/>
-            </a:br>
-            <a:r>
-              <a:rPr lang="en-US" altLang="en-US" sz="2000" b="0" dirty="0">
-                <a:latin typeface="Google Sans"/>
-              </a:rPr>
-              <a:t>D</a:t>
-            </a:r>
-            <a:r>
-              <a:rPr lang="en-US" sz="2000" b="0" i="0" dirty="0">
+              <a:t>Sets and Collection interface</a:t>
+            </a:r>
+          </a:p>
+        </p:txBody>
+      </p:sp>
+      <p:pic>
+        <p:nvPicPr>
+          <p:cNvPr id="2" name="Picture 1"/>
+          <p:cNvPicPr>
+            <a:picLocks noChangeAspect="1"/>
+          </p:cNvPicPr>
+          <p:nvPr/>
+        </p:nvPicPr>
+        <p:blipFill>
+          <a:blip r:embed="rId2"/>
+          <a:stretch>
+            <a:fillRect/>
+          </a:stretch>
+        </p:blipFill>
+        <p:spPr>
+          <a:xfrm>
+            <a:off x="3317546" y="1587675"/>
+            <a:ext cx="5208951" cy="1910493"/>
+          </a:xfrm>
+          <a:prstGeom prst="rect">
+            <a:avLst/>
+          </a:prstGeom>
+        </p:spPr>
+      </p:pic>
+      <p:pic>
+        <p:nvPicPr>
+          <p:cNvPr id="3" name="Picture 2"/>
+          <p:cNvPicPr>
+            <a:picLocks noChangeAspect="1"/>
+          </p:cNvPicPr>
+          <p:nvPr/>
+        </p:nvPicPr>
+        <p:blipFill>
+          <a:blip r:embed="rId3"/>
+          <a:stretch>
+            <a:fillRect/>
+          </a:stretch>
+        </p:blipFill>
+        <p:spPr>
+          <a:xfrm>
+            <a:off x="819900" y="4093339"/>
+            <a:ext cx="5187179" cy="1894164"/>
+          </a:xfrm>
+          <a:prstGeom prst="rect">
+            <a:avLst/>
+          </a:prstGeom>
+        </p:spPr>
+      </p:pic>
+      <p:pic>
+        <p:nvPicPr>
+          <p:cNvPr id="7" name="Picture 6"/>
+          <p:cNvPicPr>
+            <a:picLocks noChangeAspect="1"/>
+          </p:cNvPicPr>
+          <p:nvPr/>
+        </p:nvPicPr>
+        <p:blipFill>
+          <a:blip r:embed="rId4"/>
+          <a:stretch>
+            <a:fillRect/>
+          </a:stretch>
+        </p:blipFill>
+        <p:spPr>
+          <a:xfrm>
+            <a:off x="6621744" y="4076937"/>
+            <a:ext cx="5219837" cy="1943151"/>
+          </a:xfrm>
+          <a:prstGeom prst="rect">
+            <a:avLst/>
+          </a:prstGeom>
+        </p:spPr>
+      </p:pic>
+      <p:sp>
+        <p:nvSpPr>
+          <p:cNvPr id="5" name="Content Placeholder 2">
+            <a:extLst>
+              <a:ext uri="{FF2B5EF4-FFF2-40B4-BE49-F238E27FC236}">
+                <a16:creationId xmlns:a16="http://schemas.microsoft.com/office/drawing/2014/main" id="{70E6DEDB-C1EA-2A8C-436A-4F6EF837ACFF}"/>
+              </a:ext>
+            </a:extLst>
+          </p:cNvPr>
+          <p:cNvSpPr txBox="1">
+            <a:spLocks/>
+          </p:cNvSpPr>
+          <p:nvPr/>
+        </p:nvSpPr>
+        <p:spPr>
+          <a:xfrm>
+            <a:off x="1479882" y="27491"/>
+            <a:ext cx="6020822" cy="329884"/>
+          </a:xfrm>
+          <a:prstGeom prst="rect">
+            <a:avLst/>
+          </a:prstGeom>
+          <a:ln w="28575">
+            <a:solidFill>
+              <a:srgbClr val="FF0000"/>
+            </a:solidFill>
+          </a:ln>
+        </p:spPr>
+        <p:txBody>
+          <a:bodyPr vert="horz" lIns="91440" tIns="45720" rIns="91440" bIns="45720" rtlCol="0">
+            <a:normAutofit fontScale="77500" lnSpcReduction="20000"/>
+          </a:bodyPr>
+          <a:lstStyle>
+            <a:lvl1pPr marL="228600" indent="-228600" algn="l" defTabSz="914400" rtl="0" eaLnBrk="1" latinLnBrk="0" hangingPunct="1">
+              <a:lnSpc>
+                <a:spcPct val="90000"/>
+              </a:lnSpc>
+              <a:spcBef>
+                <a:spcPts val="1000"/>
+              </a:spcBef>
+              <a:buClr>
+                <a:srgbClr val="B30738"/>
+              </a:buClr>
+              <a:buFont typeface="Arial" panose="020B0604020202020204" pitchFamily="34" charset="0"/>
+              <a:buChar char="•"/>
+              <a:defRPr sz="2600" b="0" i="0" kern="1200">
+                <a:solidFill>
+                  <a:srgbClr val="002060"/>
+                </a:solidFill>
+                <a:latin typeface="Arial Narrow" panose="020B0604020202020204" pitchFamily="34" charset="0"/>
+                <a:ea typeface="+mn-ea"/>
+                <a:cs typeface="Arial Narrow" panose="020B0604020202020204" pitchFamily="34" charset="0"/>
+              </a:defRPr>
+            </a:lvl1pPr>
+            <a:lvl2pPr marL="685800" indent="-228600" algn="l" defTabSz="914400" rtl="0" eaLnBrk="1" latinLnBrk="0" hangingPunct="1">
+              <a:lnSpc>
+                <a:spcPct val="90000"/>
+              </a:lnSpc>
+              <a:spcBef>
+                <a:spcPts val="500"/>
+              </a:spcBef>
+              <a:buClr>
+                <a:srgbClr val="B30738"/>
+              </a:buClr>
+              <a:buFont typeface="Arial" panose="020B0604020202020204" pitchFamily="34" charset="0"/>
+              <a:buChar char="•"/>
+              <a:defRPr sz="2400" b="0" i="0" kern="1200">
+                <a:solidFill>
+                  <a:schemeClr val="accent2">
+                    <a:lumMod val="75000"/>
+                  </a:schemeClr>
+                </a:solidFill>
+                <a:latin typeface="Arial Narrow" panose="020B0604020202020204" pitchFamily="34" charset="0"/>
+                <a:ea typeface="+mn-ea"/>
+                <a:cs typeface="Arial Narrow" panose="020B0604020202020204" pitchFamily="34" charset="0"/>
+              </a:defRPr>
+            </a:lvl2pPr>
+            <a:lvl3pPr marL="1143000" indent="-228600" algn="l" defTabSz="914400" rtl="0" eaLnBrk="1" latinLnBrk="0" hangingPunct="1">
+              <a:lnSpc>
+                <a:spcPct val="90000"/>
+              </a:lnSpc>
+              <a:spcBef>
+                <a:spcPts val="500"/>
+              </a:spcBef>
+              <a:buClr>
+                <a:srgbClr val="B30738"/>
+              </a:buClr>
+              <a:buFont typeface="Arial" panose="020B0604020202020204" pitchFamily="34" charset="0"/>
+              <a:buChar char="•"/>
+              <a:defRPr sz="2000" b="0" i="0" kern="1200">
+                <a:solidFill>
+                  <a:schemeClr val="tx1">
+                    <a:lumMod val="65000"/>
+                    <a:lumOff val="35000"/>
+                  </a:schemeClr>
+                </a:solidFill>
+                <a:latin typeface="Arial Narrow" panose="020B0604020202020204" pitchFamily="34" charset="0"/>
+                <a:ea typeface="+mn-ea"/>
+                <a:cs typeface="Arial Narrow" panose="020B0604020202020204" pitchFamily="34" charset="0"/>
+              </a:defRPr>
+            </a:lvl3pPr>
+            <a:lvl4pPr marL="1600200" indent="-228600" algn="l" defTabSz="914400" rtl="0" eaLnBrk="1" latinLnBrk="0" hangingPunct="1">
+              <a:lnSpc>
+                <a:spcPct val="90000"/>
+              </a:lnSpc>
+              <a:spcBef>
+                <a:spcPts val="500"/>
+              </a:spcBef>
+              <a:buClr>
+                <a:srgbClr val="B30738"/>
+              </a:buClr>
+              <a:buFont typeface="Arial" panose="020B0604020202020204" pitchFamily="34" charset="0"/>
+              <a:buChar char="•"/>
+              <a:defRPr sz="1800" b="0" i="0" kern="1200">
+                <a:solidFill>
+                  <a:schemeClr val="tx1">
+                    <a:lumMod val="65000"/>
+                    <a:lumOff val="35000"/>
+                  </a:schemeClr>
+                </a:solidFill>
+                <a:latin typeface="Arial Narrow" panose="020B0604020202020204" pitchFamily="34" charset="0"/>
+                <a:ea typeface="+mn-ea"/>
+                <a:cs typeface="Arial Narrow" panose="020B0604020202020204" pitchFamily="34" charset="0"/>
+              </a:defRPr>
+            </a:lvl4pPr>
+            <a:lvl5pPr marL="2057400" indent="-228600" algn="l" defTabSz="914400" rtl="0" eaLnBrk="1" latinLnBrk="0" hangingPunct="1">
+              <a:lnSpc>
+                <a:spcPct val="90000"/>
+              </a:lnSpc>
+              <a:spcBef>
+                <a:spcPts val="500"/>
+              </a:spcBef>
+              <a:buClr>
+                <a:srgbClr val="B30738"/>
+              </a:buClr>
+              <a:buFont typeface="Arial" panose="020B0604020202020204" pitchFamily="34" charset="0"/>
+              <a:buChar char="•"/>
+              <a:defRPr sz="1600" b="0" i="0" kern="1200">
+                <a:solidFill>
+                  <a:schemeClr val="tx1">
+                    <a:lumMod val="65000"/>
+                    <a:lumOff val="35000"/>
+                  </a:schemeClr>
+                </a:solidFill>
+                <a:latin typeface="Arial Narrow" panose="020B0604020202020204" pitchFamily="34" charset="0"/>
+                <a:ea typeface="+mn-ea"/>
+                <a:cs typeface="Arial Narrow" panose="020B0604020202020204" pitchFamily="34" charset="0"/>
+              </a:defRPr>
+            </a:lvl5pPr>
+            <a:lvl6pPr marL="2514600" indent="-228600" algn="l" defTabSz="914400" rtl="0" eaLnBrk="1" latinLnBrk="0" hangingPunct="1">
+              <a:lnSpc>
+                <a:spcPct val="90000"/>
+              </a:lnSpc>
+              <a:spcBef>
+                <a:spcPts val="500"/>
+              </a:spcBef>
+              <a:buFont typeface="Arial" panose="020B0604020202020204" pitchFamily="34" charset="0"/>
+              <a:buChar char="•"/>
+              <a:defRPr sz="1800" kern="1200">
+                <a:solidFill>
+                  <a:schemeClr val="tx1"/>
+                </a:solidFill>
+                <a:latin typeface="+mn-lt"/>
+                <a:ea typeface="+mn-ea"/>
+                <a:cs typeface="+mn-cs"/>
+              </a:defRPr>
+            </a:lvl6pPr>
+            <a:lvl7pPr marL="2971800" indent="-228600" algn="l" defTabSz="914400" rtl="0" eaLnBrk="1" latinLnBrk="0" hangingPunct="1">
+              <a:lnSpc>
+                <a:spcPct val="90000"/>
+              </a:lnSpc>
+              <a:spcBef>
+                <a:spcPts val="500"/>
+              </a:spcBef>
+              <a:buFont typeface="Arial" panose="020B0604020202020204" pitchFamily="34" charset="0"/>
+              <a:buChar char="•"/>
+              <a:defRPr sz="1800" kern="1200">
+                <a:solidFill>
+                  <a:schemeClr val="tx1"/>
+                </a:solidFill>
+                <a:latin typeface="+mn-lt"/>
+                <a:ea typeface="+mn-ea"/>
+                <a:cs typeface="+mn-cs"/>
+              </a:defRPr>
+            </a:lvl7pPr>
+            <a:lvl8pPr marL="3429000" indent="-228600" algn="l" defTabSz="914400" rtl="0" eaLnBrk="1" latinLnBrk="0" hangingPunct="1">
+              <a:lnSpc>
+                <a:spcPct val="90000"/>
+              </a:lnSpc>
+              <a:spcBef>
+                <a:spcPts val="500"/>
+              </a:spcBef>
+              <a:buFont typeface="Arial" panose="020B0604020202020204" pitchFamily="34" charset="0"/>
+              <a:buChar char="•"/>
+              <a:defRPr sz="1800" kern="1200">
+                <a:solidFill>
+                  <a:schemeClr val="tx1"/>
+                </a:solidFill>
+                <a:latin typeface="+mn-lt"/>
+                <a:ea typeface="+mn-ea"/>
+                <a:cs typeface="+mn-cs"/>
+              </a:defRPr>
+            </a:lvl8pPr>
+            <a:lvl9pPr marL="3886200" indent="-228600" algn="l" defTabSz="914400" rtl="0" eaLnBrk="1" latinLnBrk="0" hangingPunct="1">
+              <a:lnSpc>
+                <a:spcPct val="90000"/>
+              </a:lnSpc>
+              <a:spcBef>
+                <a:spcPts val="500"/>
+              </a:spcBef>
+              <a:buFont typeface="Arial" panose="020B0604020202020204" pitchFamily="34" charset="0"/>
+              <a:buChar char="•"/>
+              <a:defRPr sz="1800" kern="1200">
+                <a:solidFill>
+                  <a:schemeClr val="tx1"/>
+                </a:solidFill>
+                <a:latin typeface="+mn-lt"/>
+                <a:ea typeface="+mn-ea"/>
+                <a:cs typeface="+mn-cs"/>
+              </a:defRPr>
+            </a:lvl9pPr>
+          </a:lstStyle>
+          <a:p>
+            <a:pPr marL="0" lvl="0" indent="0" algn="ctr">
+              <a:buNone/>
+              <a:defRPr/>
+            </a:pPr>
+            <a:r>
+              <a:rPr kumimoji="0" lang="en-US" sz="2600" b="0" i="0" u="none" strike="noStrike" kern="1200" cap="none" spc="0" normalizeH="0" baseline="0" noProof="0" dirty="0">
+                <a:ln>
+                  <a:noFill/>
+                </a:ln>
+                <a:solidFill>
+                  <a:srgbClr val="C00000"/>
+                </a:solidFill>
                 <a:effectLst/>
-                <a:latin typeface="Google Sans"/>
-              </a:rPr>
-              <a:t>ata in key-value pairs, where each unique key maps to a specific value</a:t>
-            </a:r>
-            <a:endParaRPr lang="en-US" altLang="en-US" dirty="0"/>
+                <a:uLnTx/>
+                <a:uFillTx/>
+                <a:latin typeface="Arial Narrow" panose="020B0604020202020204" pitchFamily="34" charset="0"/>
+                <a:ea typeface="+mn-ea"/>
+              </a:rPr>
+              <a:t>“</a:t>
+            </a:r>
+            <a:r>
+              <a:rPr lang="en-US" dirty="0">
+                <a:solidFill>
+                  <a:srgbClr val="C00000"/>
+                </a:solidFill>
+              </a:rPr>
+              <a:t>CSEN160_05_Lecture_DataStructursAndGenerics</a:t>
+            </a:r>
+            <a:r>
+              <a:rPr kumimoji="0" lang="en-US" sz="2600" b="0" i="0" u="none" strike="noStrike" kern="1200" cap="none" spc="0" normalizeH="0" baseline="0" noProof="0" dirty="0">
+                <a:ln>
+                  <a:noFill/>
+                </a:ln>
+                <a:solidFill>
+                  <a:srgbClr val="C00000"/>
+                </a:solidFill>
+                <a:effectLst/>
+                <a:uLnTx/>
+                <a:uFillTx/>
+                <a:latin typeface="Arial Narrow" panose="020B0604020202020204" pitchFamily="34" charset="0"/>
+                <a:ea typeface="+mn-ea"/>
+              </a:rPr>
+              <a:t>.</a:t>
+            </a:r>
+            <a:r>
+              <a:rPr kumimoji="0" lang="en-US" sz="2600" b="0" i="0" u="none" strike="noStrike" kern="1200" cap="none" spc="0" normalizeH="0" baseline="0" noProof="0" dirty="0" err="1">
+                <a:ln>
+                  <a:noFill/>
+                </a:ln>
+                <a:solidFill>
+                  <a:srgbClr val="C00000"/>
+                </a:solidFill>
+                <a:effectLst/>
+                <a:uLnTx/>
+                <a:uFillTx/>
+                <a:latin typeface="Arial Narrow" panose="020B0604020202020204" pitchFamily="34" charset="0"/>
+                <a:ea typeface="+mn-ea"/>
+              </a:rPr>
+              <a:t>T_Set</a:t>
+            </a:r>
+            <a:r>
+              <a:rPr kumimoji="0" lang="en-US" sz="2600" b="0" i="0" u="none" strike="noStrike" kern="1200" cap="none" spc="0" normalizeH="0" baseline="0" noProof="0" dirty="0">
+                <a:ln>
+                  <a:noFill/>
+                </a:ln>
+                <a:solidFill>
+                  <a:srgbClr val="C00000"/>
+                </a:solidFill>
+                <a:effectLst/>
+                <a:uLnTx/>
+                <a:uFillTx/>
+                <a:latin typeface="Arial Narrow" panose="020B0604020202020204" pitchFamily="34" charset="0"/>
+                <a:ea typeface="+mn-ea"/>
+              </a:rPr>
+              <a:t>”</a:t>
+            </a:r>
           </a:p>
         </p:txBody>
       </p:sp>
     </p:spTree>
     <p:extLst>
       <p:ext uri="{BB962C8B-B14F-4D97-AF65-F5344CB8AC3E}">
-        <p14:creationId xmlns:p14="http://schemas.microsoft.com/office/powerpoint/2010/main" val="311099406"/>
+        <p14:creationId xmlns:p14="http://schemas.microsoft.com/office/powerpoint/2010/main" val="138419387"/>
       </p:ext>
     </p:extLst>
   </p:cSld>
@@ -21635,6 +21629,76 @@
       </p:grpSpPr>
       <p:sp>
         <p:nvSpPr>
+          <p:cNvPr id="4098" name="Title 1"/>
+          <p:cNvSpPr>
+            <a:spLocks noGrp="1"/>
+          </p:cNvSpPr>
+          <p:nvPr>
+            <p:ph type="title"/>
+          </p:nvPr>
+        </p:nvSpPr>
+        <p:spPr/>
+        <p:txBody>
+          <a:bodyPr/>
+          <a:lstStyle/>
+          <a:p>
+            <a:pPr eaLnBrk="1" hangingPunct="1"/>
+            <a:r>
+              <a:rPr lang="en-US" altLang="en-US" dirty="0"/>
+              <a:t>Maps</a:t>
+            </a:r>
+            <a:br>
+              <a:rPr lang="en-US" altLang="en-US" dirty="0"/>
+            </a:br>
+            <a:r>
+              <a:rPr lang="en-US" altLang="en-US" sz="2000" b="0" dirty="0">
+                <a:latin typeface="Google Sans"/>
+              </a:rPr>
+              <a:t>D</a:t>
+            </a:r>
+            <a:r>
+              <a:rPr lang="en-US" sz="2000" b="0" i="0" dirty="0">
+                <a:effectLst/>
+                <a:latin typeface="Google Sans"/>
+              </a:rPr>
+              <a:t>ata in key-value pairs, where each unique key maps to a specific value</a:t>
+            </a:r>
+            <a:endParaRPr lang="en-US" altLang="en-US" dirty="0"/>
+          </a:p>
+        </p:txBody>
+      </p:sp>
+    </p:spTree>
+    <p:extLst>
+      <p:ext uri="{BB962C8B-B14F-4D97-AF65-F5344CB8AC3E}">
+        <p14:creationId xmlns:p14="http://schemas.microsoft.com/office/powerpoint/2010/main" val="311099406"/>
+      </p:ext>
+    </p:extLst>
+  </p:cSld>
+  <p:clrMapOvr>
+    <a:masterClrMapping/>
+  </p:clrMapOvr>
+</p:sld>
+</file>
+
+<file path=ppt/slides/slide42.xml><?xml version="1.0" encoding="utf-8"?>
+<p:sld xmlns:a="http://schemas.openxmlformats.org/drawingml/2006/main" xmlns:r="http://schemas.openxmlformats.org/officeDocument/2006/relationships" xmlns:p="http://schemas.openxmlformats.org/presentationml/2006/main">
+  <p:cSld>
+    <p:spTree>
+      <p:nvGrpSpPr>
+        <p:cNvPr id="1" name=""/>
+        <p:cNvGrpSpPr/>
+        <p:nvPr/>
+      </p:nvGrpSpPr>
+      <p:grpSpPr>
+        <a:xfrm>
+          <a:off x="0" y="0"/>
+          <a:ext cx="0" cy="0"/>
+          <a:chOff x="0" y="0"/>
+          <a:chExt cx="0" cy="0"/>
+        </a:xfrm>
+      </p:grpSpPr>
+      <p:sp>
+        <p:nvSpPr>
           <p:cNvPr id="14338" name="Title 1"/>
           <p:cNvSpPr>
             <a:spLocks noGrp="1"/>
@@ -21998,7 +22062,7 @@
 </p:sld>
 </file>
 
-<file path=ppt/slides/slide42.xml><?xml version="1.0" encoding="utf-8"?>
+<file path=ppt/slides/slide43.xml><?xml version="1.0" encoding="utf-8"?>
 <p:sld xmlns:a="http://schemas.openxmlformats.org/drawingml/2006/main" xmlns:r="http://schemas.openxmlformats.org/officeDocument/2006/relationships" xmlns:p="http://schemas.openxmlformats.org/presentationml/2006/main">
   <p:cSld>
     <p:spTree>
@@ -23121,7 +23185,7 @@
 </p:sld>
 </file>
 
-<file path=ppt/slides/slide43.xml><?xml version="1.0" encoding="utf-8"?>
+<file path=ppt/slides/slide44.xml><?xml version="1.0" encoding="utf-8"?>
 <p:sld xmlns:a="http://schemas.openxmlformats.org/drawingml/2006/main" xmlns:r="http://schemas.openxmlformats.org/officeDocument/2006/relationships" xmlns:p="http://schemas.openxmlformats.org/presentationml/2006/main">
   <p:cSld>
     <p:spTree>
@@ -24202,7 +24266,7 @@
 </p:sld>
 </file>
 
-<file path=ppt/slides/slide44.xml><?xml version="1.0" encoding="utf-8"?>
+<file path=ppt/slides/slide45.xml><?xml version="1.0" encoding="utf-8"?>
 <p:sld xmlns:a="http://schemas.openxmlformats.org/drawingml/2006/main" xmlns:r="http://schemas.openxmlformats.org/officeDocument/2006/relationships" xmlns:p="http://schemas.openxmlformats.org/presentationml/2006/main">
   <p:cSld>
     <p:spTree>
@@ -25473,7 +25537,7 @@
 </p:sld>
 </file>
 
-<file path=ppt/slides/slide45.xml><?xml version="1.0" encoding="utf-8"?>
+<file path=ppt/slides/slide46.xml><?xml version="1.0" encoding="utf-8"?>
 <p:sld xmlns:a="http://schemas.openxmlformats.org/drawingml/2006/main" xmlns:r="http://schemas.openxmlformats.org/officeDocument/2006/relationships" xmlns:p="http://schemas.openxmlformats.org/presentationml/2006/main">
   <p:cSld>
     <p:spTree>
@@ -25538,7 +25602,7 @@
 </p:sld>
 </file>
 
-<file path=ppt/slides/slide46.xml><?xml version="1.0" encoding="utf-8"?>
+<file path=ppt/slides/slide47.xml><?xml version="1.0" encoding="utf-8"?>
 <p:sld xmlns:a="http://schemas.openxmlformats.org/drawingml/2006/main" xmlns:r="http://schemas.openxmlformats.org/officeDocument/2006/relationships" xmlns:p="http://schemas.openxmlformats.org/presentationml/2006/main">
   <p:cSld>
     <p:spTree>
@@ -25756,7 +25820,7 @@
 </p:sld>
 </file>
 
-<file path=ppt/slides/slide47.xml><?xml version="1.0" encoding="utf-8"?>
+<file path=ppt/slides/slide48.xml><?xml version="1.0" encoding="utf-8"?>
 <p:sld xmlns:a="http://schemas.openxmlformats.org/drawingml/2006/main" xmlns:r="http://schemas.openxmlformats.org/officeDocument/2006/relationships" xmlns:p="http://schemas.openxmlformats.org/presentationml/2006/main">
   <p:cSld>
     <p:spTree>
@@ -26286,627 +26350,6 @@
     <p:extLst>
       <p:ext uri="{BB962C8B-B14F-4D97-AF65-F5344CB8AC3E}">
         <p14:creationId xmlns:p14="http://schemas.microsoft.com/office/powerpoint/2010/main" val="1333803209"/>
-      </p:ext>
-    </p:extLst>
-  </p:cSld>
-  <p:clrMapOvr>
-    <a:masterClrMapping/>
-  </p:clrMapOvr>
-</p:sld>
-</file>
-
-<file path=ppt/slides/slide48.xml><?xml version="1.0" encoding="utf-8"?>
-<p:sld xmlns:a="http://schemas.openxmlformats.org/drawingml/2006/main" xmlns:r="http://schemas.openxmlformats.org/officeDocument/2006/relationships" xmlns:p="http://schemas.openxmlformats.org/presentationml/2006/main">
-  <p:cSld>
-    <p:spTree>
-      <p:nvGrpSpPr>
-        <p:cNvPr id="1" name=""/>
-        <p:cNvGrpSpPr/>
-        <p:nvPr/>
-      </p:nvGrpSpPr>
-      <p:grpSpPr>
-        <a:xfrm>
-          <a:off x="0" y="0"/>
-          <a:ext cx="0" cy="0"/>
-          <a:chOff x="0" y="0"/>
-          <a:chExt cx="0" cy="0"/>
-        </a:xfrm>
-      </p:grpSpPr>
-      <p:sp>
-        <p:nvSpPr>
-          <p:cNvPr id="13314" name="Title 1"/>
-          <p:cNvSpPr>
-            <a:spLocks noGrp="1"/>
-          </p:cNvSpPr>
-          <p:nvPr>
-            <p:ph type="title"/>
-          </p:nvPr>
-        </p:nvSpPr>
-        <p:spPr>
-          <a:xfrm>
-            <a:off x="936516" y="810201"/>
-            <a:ext cx="4670200" cy="686825"/>
-          </a:xfrm>
-        </p:spPr>
-        <p:txBody>
-          <a:bodyPr>
-            <a:normAutofit fontScale="90000"/>
-          </a:bodyPr>
-          <a:lstStyle/>
-          <a:p>
-            <a:pPr eaLnBrk="1" hangingPunct="1"/>
-            <a:r>
-              <a:rPr lang="en-US" altLang="en-US" dirty="0"/>
-              <a:t>A Generic Comparator</a:t>
-            </a:r>
-          </a:p>
-        </p:txBody>
-      </p:sp>
-      <p:pic>
-        <p:nvPicPr>
-          <p:cNvPr id="2" name="Picture 1"/>
-          <p:cNvPicPr>
-            <a:picLocks noChangeAspect="1"/>
-          </p:cNvPicPr>
-          <p:nvPr/>
-        </p:nvPicPr>
-        <p:blipFill>
-          <a:blip r:embed="rId2"/>
-          <a:stretch>
-            <a:fillRect/>
-          </a:stretch>
-        </p:blipFill>
-        <p:spPr>
-          <a:xfrm>
-            <a:off x="1012000" y="2397052"/>
-            <a:ext cx="4446931" cy="3390989"/>
-          </a:xfrm>
-          <a:prstGeom prst="rect">
-            <a:avLst/>
-          </a:prstGeom>
-        </p:spPr>
-      </p:pic>
-      <p:pic>
-        <p:nvPicPr>
-          <p:cNvPr id="3" name="Picture 2"/>
-          <p:cNvPicPr>
-            <a:picLocks noChangeAspect="1"/>
-          </p:cNvPicPr>
-          <p:nvPr/>
-        </p:nvPicPr>
-        <p:blipFill>
-          <a:blip r:embed="rId3"/>
-          <a:stretch>
-            <a:fillRect/>
-          </a:stretch>
-        </p:blipFill>
-        <p:spPr>
-          <a:xfrm>
-            <a:off x="6981997" y="2524962"/>
-            <a:ext cx="4272755" cy="1567584"/>
-          </a:xfrm>
-          <a:prstGeom prst="rect">
-            <a:avLst/>
-          </a:prstGeom>
-        </p:spPr>
-      </p:pic>
-      <p:pic>
-        <p:nvPicPr>
-          <p:cNvPr id="4" name="Picture 3"/>
-          <p:cNvPicPr>
-            <a:picLocks noChangeAspect="1"/>
-          </p:cNvPicPr>
-          <p:nvPr/>
-        </p:nvPicPr>
-        <p:blipFill>
-          <a:blip r:embed="rId4"/>
-          <a:stretch>
-            <a:fillRect/>
-          </a:stretch>
-        </p:blipFill>
-        <p:spPr>
-          <a:xfrm>
-            <a:off x="5578243" y="4928374"/>
-            <a:ext cx="881766" cy="990626"/>
-          </a:xfrm>
-          <a:prstGeom prst="rect">
-            <a:avLst/>
-          </a:prstGeom>
-        </p:spPr>
-      </p:pic>
-      <p:sp>
-        <p:nvSpPr>
-          <p:cNvPr id="5" name="Down Arrow 4"/>
-          <p:cNvSpPr/>
-          <p:nvPr/>
-        </p:nvSpPr>
-        <p:spPr>
-          <a:xfrm rot="3615558">
-            <a:off x="7969215" y="2898560"/>
-            <a:ext cx="288901" cy="3436370"/>
-          </a:xfrm>
-          <a:prstGeom prst="downArrow">
-            <a:avLst/>
-          </a:prstGeom>
-        </p:spPr>
-        <p:style>
-          <a:lnRef idx="2">
-            <a:schemeClr val="accent1">
-              <a:shade val="50000"/>
-            </a:schemeClr>
-          </a:lnRef>
-          <a:fillRef idx="1">
-            <a:schemeClr val="accent1"/>
-          </a:fillRef>
-          <a:effectRef idx="0">
-            <a:schemeClr val="accent1"/>
-          </a:effectRef>
-          <a:fontRef idx="minor">
-            <a:schemeClr val="lt1"/>
-          </a:fontRef>
-        </p:style>
-        <p:txBody>
-          <a:bodyPr rtlCol="0" anchor="ctr"/>
-          <a:lstStyle/>
-          <a:p>
-            <a:pPr marL="0" marR="0" lvl="0" indent="0" algn="ctr" defTabSz="914400" rtl="0" eaLnBrk="1" fontAlgn="auto" latinLnBrk="0" hangingPunct="1">
-              <a:lnSpc>
-                <a:spcPct val="100000"/>
-              </a:lnSpc>
-              <a:spcBef>
-                <a:spcPts val="0"/>
-              </a:spcBef>
-              <a:spcAft>
-                <a:spcPts val="0"/>
-              </a:spcAft>
-              <a:buClrTx/>
-              <a:buSzTx/>
-              <a:buFontTx/>
-              <a:buNone/>
-              <a:tabLst/>
-              <a:defRPr/>
-            </a:pPr>
-            <a:endParaRPr kumimoji="0" lang="en-US" sz="1800" b="0" i="0" u="none" strike="noStrike" kern="1200" cap="none" spc="0" normalizeH="0" baseline="0" noProof="0">
-              <a:ln>
-                <a:noFill/>
-              </a:ln>
-              <a:solidFill>
-                <a:srgbClr val="FFFFFF"/>
-              </a:solidFill>
-              <a:effectLst/>
-              <a:uLnTx/>
-              <a:uFillTx/>
-              <a:latin typeface="Arial" panose="020B0604020202020204"/>
-              <a:ea typeface="+mn-ea"/>
-              <a:cs typeface="+mn-cs"/>
-            </a:endParaRPr>
-          </a:p>
-        </p:txBody>
-      </p:sp>
-      <p:sp>
-        <p:nvSpPr>
-          <p:cNvPr id="6" name="Rectangle 5"/>
-          <p:cNvSpPr/>
-          <p:nvPr/>
-        </p:nvSpPr>
-        <p:spPr>
-          <a:xfrm>
-            <a:off x="4219996" y="2397052"/>
-            <a:ext cx="1035781" cy="240952"/>
-          </a:xfrm>
-          <a:prstGeom prst="rect">
-            <a:avLst/>
-          </a:prstGeom>
-          <a:noFill/>
-          <a:ln w="19050">
-            <a:solidFill>
-              <a:srgbClr val="00B0F0"/>
-            </a:solidFill>
-          </a:ln>
-        </p:spPr>
-        <p:style>
-          <a:lnRef idx="2">
-            <a:schemeClr val="accent1">
-              <a:shade val="50000"/>
-            </a:schemeClr>
-          </a:lnRef>
-          <a:fillRef idx="1">
-            <a:schemeClr val="accent1"/>
-          </a:fillRef>
-          <a:effectRef idx="0">
-            <a:schemeClr val="accent1"/>
-          </a:effectRef>
-          <a:fontRef idx="minor">
-            <a:schemeClr val="lt1"/>
-          </a:fontRef>
-        </p:style>
-        <p:txBody>
-          <a:bodyPr rtlCol="0" anchor="ctr"/>
-          <a:lstStyle/>
-          <a:p>
-            <a:pPr marL="0" marR="0" lvl="0" indent="0" algn="ctr" defTabSz="914400" rtl="0" eaLnBrk="1" fontAlgn="auto" latinLnBrk="0" hangingPunct="1">
-              <a:lnSpc>
-                <a:spcPct val="100000"/>
-              </a:lnSpc>
-              <a:spcBef>
-                <a:spcPts val="0"/>
-              </a:spcBef>
-              <a:spcAft>
-                <a:spcPts val="0"/>
-              </a:spcAft>
-              <a:buClrTx/>
-              <a:buSzTx/>
-              <a:buFontTx/>
-              <a:buNone/>
-              <a:tabLst/>
-              <a:defRPr/>
-            </a:pPr>
-            <a:endParaRPr kumimoji="0" lang="en-US" sz="1800" b="0" i="0" u="none" strike="noStrike" kern="1200" cap="none" spc="0" normalizeH="0" baseline="0" noProof="0">
-              <a:ln>
-                <a:noFill/>
-              </a:ln>
-              <a:solidFill>
-                <a:srgbClr val="FFFFFF"/>
-              </a:solidFill>
-              <a:effectLst/>
-              <a:uLnTx/>
-              <a:uFillTx/>
-              <a:latin typeface="Arial" panose="020B0604020202020204"/>
-              <a:ea typeface="+mn-ea"/>
-              <a:cs typeface="+mn-cs"/>
-            </a:endParaRPr>
-          </a:p>
-        </p:txBody>
-      </p:sp>
-      <p:sp>
-        <p:nvSpPr>
-          <p:cNvPr id="9" name="Rectangle 8"/>
-          <p:cNvSpPr/>
-          <p:nvPr/>
-        </p:nvSpPr>
-        <p:spPr>
-          <a:xfrm>
-            <a:off x="2996750" y="4058617"/>
-            <a:ext cx="1035781" cy="240952"/>
-          </a:xfrm>
-          <a:prstGeom prst="rect">
-            <a:avLst/>
-          </a:prstGeom>
-          <a:noFill/>
-          <a:ln w="19050">
-            <a:solidFill>
-              <a:srgbClr val="00B0F0"/>
-            </a:solidFill>
-          </a:ln>
-        </p:spPr>
-        <p:style>
-          <a:lnRef idx="2">
-            <a:schemeClr val="accent1">
-              <a:shade val="50000"/>
-            </a:schemeClr>
-          </a:lnRef>
-          <a:fillRef idx="1">
-            <a:schemeClr val="accent1"/>
-          </a:fillRef>
-          <a:effectRef idx="0">
-            <a:schemeClr val="accent1"/>
-          </a:effectRef>
-          <a:fontRef idx="minor">
-            <a:schemeClr val="lt1"/>
-          </a:fontRef>
-        </p:style>
-        <p:txBody>
-          <a:bodyPr rtlCol="0" anchor="ctr"/>
-          <a:lstStyle/>
-          <a:p>
-            <a:pPr marL="0" marR="0" lvl="0" indent="0" algn="ctr" defTabSz="914400" rtl="0" eaLnBrk="1" fontAlgn="auto" latinLnBrk="0" hangingPunct="1">
-              <a:lnSpc>
-                <a:spcPct val="100000"/>
-              </a:lnSpc>
-              <a:spcBef>
-                <a:spcPts val="0"/>
-              </a:spcBef>
-              <a:spcAft>
-                <a:spcPts val="0"/>
-              </a:spcAft>
-              <a:buClrTx/>
-              <a:buSzTx/>
-              <a:buFontTx/>
-              <a:buNone/>
-              <a:tabLst/>
-              <a:defRPr/>
-            </a:pPr>
-            <a:endParaRPr kumimoji="0" lang="en-US" sz="1800" b="0" i="0" u="none" strike="noStrike" kern="1200" cap="none" spc="0" normalizeH="0" baseline="0" noProof="0">
-              <a:ln>
-                <a:noFill/>
-              </a:ln>
-              <a:solidFill>
-                <a:srgbClr val="FFFFFF"/>
-              </a:solidFill>
-              <a:effectLst/>
-              <a:uLnTx/>
-              <a:uFillTx/>
-              <a:latin typeface="Arial" panose="020B0604020202020204"/>
-              <a:ea typeface="+mn-ea"/>
-              <a:cs typeface="+mn-cs"/>
-            </a:endParaRPr>
-          </a:p>
-        </p:txBody>
-      </p:sp>
-      <p:sp>
-        <p:nvSpPr>
-          <p:cNvPr id="7" name="Content Placeholder 2">
-            <a:extLst>
-              <a:ext uri="{FF2B5EF4-FFF2-40B4-BE49-F238E27FC236}">
-                <a16:creationId xmlns:a16="http://schemas.microsoft.com/office/drawing/2014/main" id="{A26D8104-BFA5-C3D9-7C6A-130708316EC1}"/>
-              </a:ext>
-            </a:extLst>
-          </p:cNvPr>
-          <p:cNvSpPr txBox="1">
-            <a:spLocks/>
-          </p:cNvSpPr>
-          <p:nvPr/>
-        </p:nvSpPr>
-        <p:spPr>
-          <a:xfrm>
-            <a:off x="1843820" y="24771"/>
-            <a:ext cx="6289527" cy="339871"/>
-          </a:xfrm>
-          <a:prstGeom prst="rect">
-            <a:avLst/>
-          </a:prstGeom>
-          <a:ln w="28575">
-            <a:solidFill>
-              <a:srgbClr val="FF0000"/>
-            </a:solidFill>
-          </a:ln>
-        </p:spPr>
-        <p:txBody>
-          <a:bodyPr vert="horz" lIns="91440" tIns="45720" rIns="91440" bIns="45720" rtlCol="0">
-            <a:normAutofit fontScale="62500" lnSpcReduction="20000"/>
-          </a:bodyPr>
-          <a:lstStyle>
-            <a:lvl1pPr marL="228600" indent="-228600" algn="l" defTabSz="914400" rtl="0" eaLnBrk="1" latinLnBrk="0" hangingPunct="1">
-              <a:lnSpc>
-                <a:spcPct val="90000"/>
-              </a:lnSpc>
-              <a:spcBef>
-                <a:spcPts val="1000"/>
-              </a:spcBef>
-              <a:buClr>
-                <a:srgbClr val="B30738"/>
-              </a:buClr>
-              <a:buFont typeface="Arial" panose="020B0604020202020204" pitchFamily="34" charset="0"/>
-              <a:buChar char="•"/>
-              <a:defRPr sz="2600" b="0" i="0" kern="1200">
-                <a:solidFill>
-                  <a:srgbClr val="002060"/>
-                </a:solidFill>
-                <a:latin typeface="Arial Narrow" panose="020B0604020202020204" pitchFamily="34" charset="0"/>
-                <a:ea typeface="+mn-ea"/>
-                <a:cs typeface="Arial Narrow" panose="020B0604020202020204" pitchFamily="34" charset="0"/>
-              </a:defRPr>
-            </a:lvl1pPr>
-            <a:lvl2pPr marL="685800" indent="-228600" algn="l" defTabSz="914400" rtl="0" eaLnBrk="1" latinLnBrk="0" hangingPunct="1">
-              <a:lnSpc>
-                <a:spcPct val="90000"/>
-              </a:lnSpc>
-              <a:spcBef>
-                <a:spcPts val="500"/>
-              </a:spcBef>
-              <a:buClr>
-                <a:srgbClr val="B30738"/>
-              </a:buClr>
-              <a:buFont typeface="Arial" panose="020B0604020202020204" pitchFamily="34" charset="0"/>
-              <a:buChar char="•"/>
-              <a:defRPr sz="2400" b="0" i="0" kern="1200">
-                <a:solidFill>
-                  <a:schemeClr val="accent2">
-                    <a:lumMod val="75000"/>
-                  </a:schemeClr>
-                </a:solidFill>
-                <a:latin typeface="Arial Narrow" panose="020B0604020202020204" pitchFamily="34" charset="0"/>
-                <a:ea typeface="+mn-ea"/>
-                <a:cs typeface="Arial Narrow" panose="020B0604020202020204" pitchFamily="34" charset="0"/>
-              </a:defRPr>
-            </a:lvl2pPr>
-            <a:lvl3pPr marL="1143000" indent="-228600" algn="l" defTabSz="914400" rtl="0" eaLnBrk="1" latinLnBrk="0" hangingPunct="1">
-              <a:lnSpc>
-                <a:spcPct val="90000"/>
-              </a:lnSpc>
-              <a:spcBef>
-                <a:spcPts val="500"/>
-              </a:spcBef>
-              <a:buClr>
-                <a:srgbClr val="B30738"/>
-              </a:buClr>
-              <a:buFont typeface="Arial" panose="020B0604020202020204" pitchFamily="34" charset="0"/>
-              <a:buChar char="•"/>
-              <a:defRPr sz="2000" b="0" i="0" kern="1200">
-                <a:solidFill>
-                  <a:schemeClr val="tx1">
-                    <a:lumMod val="65000"/>
-                    <a:lumOff val="35000"/>
-                  </a:schemeClr>
-                </a:solidFill>
-                <a:latin typeface="Arial Narrow" panose="020B0604020202020204" pitchFamily="34" charset="0"/>
-                <a:ea typeface="+mn-ea"/>
-                <a:cs typeface="Arial Narrow" panose="020B0604020202020204" pitchFamily="34" charset="0"/>
-              </a:defRPr>
-            </a:lvl3pPr>
-            <a:lvl4pPr marL="1600200" indent="-228600" algn="l" defTabSz="914400" rtl="0" eaLnBrk="1" latinLnBrk="0" hangingPunct="1">
-              <a:lnSpc>
-                <a:spcPct val="90000"/>
-              </a:lnSpc>
-              <a:spcBef>
-                <a:spcPts val="500"/>
-              </a:spcBef>
-              <a:buClr>
-                <a:srgbClr val="B30738"/>
-              </a:buClr>
-              <a:buFont typeface="Arial" panose="020B0604020202020204" pitchFamily="34" charset="0"/>
-              <a:buChar char="•"/>
-              <a:defRPr sz="1800" b="0" i="0" kern="1200">
-                <a:solidFill>
-                  <a:schemeClr val="tx1">
-                    <a:lumMod val="65000"/>
-                    <a:lumOff val="35000"/>
-                  </a:schemeClr>
-                </a:solidFill>
-                <a:latin typeface="Arial Narrow" panose="020B0604020202020204" pitchFamily="34" charset="0"/>
-                <a:ea typeface="+mn-ea"/>
-                <a:cs typeface="Arial Narrow" panose="020B0604020202020204" pitchFamily="34" charset="0"/>
-              </a:defRPr>
-            </a:lvl4pPr>
-            <a:lvl5pPr marL="2057400" indent="-228600" algn="l" defTabSz="914400" rtl="0" eaLnBrk="1" latinLnBrk="0" hangingPunct="1">
-              <a:lnSpc>
-                <a:spcPct val="90000"/>
-              </a:lnSpc>
-              <a:spcBef>
-                <a:spcPts val="500"/>
-              </a:spcBef>
-              <a:buClr>
-                <a:srgbClr val="B30738"/>
-              </a:buClr>
-              <a:buFont typeface="Arial" panose="020B0604020202020204" pitchFamily="34" charset="0"/>
-              <a:buChar char="•"/>
-              <a:defRPr sz="1600" b="0" i="0" kern="1200">
-                <a:solidFill>
-                  <a:schemeClr val="tx1">
-                    <a:lumMod val="65000"/>
-                    <a:lumOff val="35000"/>
-                  </a:schemeClr>
-                </a:solidFill>
-                <a:latin typeface="Arial Narrow" panose="020B0604020202020204" pitchFamily="34" charset="0"/>
-                <a:ea typeface="+mn-ea"/>
-                <a:cs typeface="Arial Narrow" panose="020B0604020202020204" pitchFamily="34" charset="0"/>
-              </a:defRPr>
-            </a:lvl5pPr>
-            <a:lvl6pPr marL="2514600" indent="-228600" algn="l" defTabSz="914400" rtl="0" eaLnBrk="1" latinLnBrk="0" hangingPunct="1">
-              <a:lnSpc>
-                <a:spcPct val="90000"/>
-              </a:lnSpc>
-              <a:spcBef>
-                <a:spcPts val="500"/>
-              </a:spcBef>
-              <a:buFont typeface="Arial" panose="020B0604020202020204" pitchFamily="34" charset="0"/>
-              <a:buChar char="•"/>
-              <a:defRPr sz="1800" kern="1200">
-                <a:solidFill>
-                  <a:schemeClr val="tx1"/>
-                </a:solidFill>
-                <a:latin typeface="+mn-lt"/>
-                <a:ea typeface="+mn-ea"/>
-                <a:cs typeface="+mn-cs"/>
-              </a:defRPr>
-            </a:lvl6pPr>
-            <a:lvl7pPr marL="2971800" indent="-228600" algn="l" defTabSz="914400" rtl="0" eaLnBrk="1" latinLnBrk="0" hangingPunct="1">
-              <a:lnSpc>
-                <a:spcPct val="90000"/>
-              </a:lnSpc>
-              <a:spcBef>
-                <a:spcPts val="500"/>
-              </a:spcBef>
-              <a:buFont typeface="Arial" panose="020B0604020202020204" pitchFamily="34" charset="0"/>
-              <a:buChar char="•"/>
-              <a:defRPr sz="1800" kern="1200">
-                <a:solidFill>
-                  <a:schemeClr val="tx1"/>
-                </a:solidFill>
-                <a:latin typeface="+mn-lt"/>
-                <a:ea typeface="+mn-ea"/>
-                <a:cs typeface="+mn-cs"/>
-              </a:defRPr>
-            </a:lvl7pPr>
-            <a:lvl8pPr marL="3429000" indent="-228600" algn="l" defTabSz="914400" rtl="0" eaLnBrk="1" latinLnBrk="0" hangingPunct="1">
-              <a:lnSpc>
-                <a:spcPct val="90000"/>
-              </a:lnSpc>
-              <a:spcBef>
-                <a:spcPts val="500"/>
-              </a:spcBef>
-              <a:buFont typeface="Arial" panose="020B0604020202020204" pitchFamily="34" charset="0"/>
-              <a:buChar char="•"/>
-              <a:defRPr sz="1800" kern="1200">
-                <a:solidFill>
-                  <a:schemeClr val="tx1"/>
-                </a:solidFill>
-                <a:latin typeface="+mn-lt"/>
-                <a:ea typeface="+mn-ea"/>
-                <a:cs typeface="+mn-cs"/>
-              </a:defRPr>
-            </a:lvl8pPr>
-            <a:lvl9pPr marL="3886200" indent="-228600" algn="l" defTabSz="914400" rtl="0" eaLnBrk="1" latinLnBrk="0" hangingPunct="1">
-              <a:lnSpc>
-                <a:spcPct val="90000"/>
-              </a:lnSpc>
-              <a:spcBef>
-                <a:spcPts val="500"/>
-              </a:spcBef>
-              <a:buFont typeface="Arial" panose="020B0604020202020204" pitchFamily="34" charset="0"/>
-              <a:buChar char="•"/>
-              <a:defRPr sz="1800" kern="1200">
-                <a:solidFill>
-                  <a:schemeClr val="tx1"/>
-                </a:solidFill>
-                <a:latin typeface="+mn-lt"/>
-                <a:ea typeface="+mn-ea"/>
-                <a:cs typeface="+mn-cs"/>
-              </a:defRPr>
-            </a:lvl9pPr>
-          </a:lstStyle>
-          <a:p>
-            <a:pPr marL="0" lvl="0" indent="0" algn="ctr">
-              <a:buNone/>
-              <a:defRPr/>
-            </a:pPr>
-            <a:r>
-              <a:rPr kumimoji="0" lang="en-US" sz="2600" b="0" i="0" u="none" strike="noStrike" kern="1200" cap="none" spc="0" normalizeH="0" baseline="0" noProof="0" dirty="0">
-                <a:ln>
-                  <a:noFill/>
-                </a:ln>
-                <a:solidFill>
-                  <a:srgbClr val="C00000"/>
-                </a:solidFill>
-                <a:effectLst/>
-                <a:uLnTx/>
-                <a:uFillTx/>
-                <a:latin typeface="Arial Narrow" panose="020B0604020202020204" pitchFamily="34" charset="0"/>
-                <a:ea typeface="+mn-ea"/>
-              </a:rPr>
-              <a:t>“</a:t>
-            </a:r>
-            <a:r>
-              <a:rPr lang="en-US" dirty="0">
-                <a:solidFill>
-                  <a:srgbClr val="C00000"/>
-                </a:solidFill>
-              </a:rPr>
-              <a:t>CSEN160_05_Lecture_DataStructursAndGenerics</a:t>
-            </a:r>
-            <a:r>
-              <a:rPr kumimoji="0" lang="en-US" sz="2600" b="0" i="0" u="none" strike="noStrike" kern="1200" cap="none" spc="0" normalizeH="0" baseline="0" noProof="0" dirty="0">
-                <a:ln>
-                  <a:noFill/>
-                </a:ln>
-                <a:solidFill>
-                  <a:srgbClr val="C00000"/>
-                </a:solidFill>
-                <a:effectLst/>
-                <a:uLnTx/>
-                <a:uFillTx/>
-                <a:latin typeface="Arial Narrow" panose="020B0604020202020204" pitchFamily="34" charset="0"/>
-                <a:ea typeface="+mn-ea"/>
-              </a:rPr>
-              <a:t>.G_ComparisonDemo2”</a:t>
-            </a:r>
-          </a:p>
-        </p:txBody>
-      </p:sp>
-    </p:spTree>
-    <p:extLst>
-      <p:ext uri="{BB962C8B-B14F-4D97-AF65-F5344CB8AC3E}">
-        <p14:creationId xmlns:p14="http://schemas.microsoft.com/office/powerpoint/2010/main" val="1584346581"/>
       </p:ext>
     </p:extLst>
   </p:cSld>
@@ -26946,17 +26389,19 @@
         <p:spPr>
           <a:xfrm>
             <a:off x="936516" y="810201"/>
-            <a:ext cx="3441275" cy="686825"/>
+            <a:ext cx="4670200" cy="686825"/>
           </a:xfrm>
         </p:spPr>
         <p:txBody>
-          <a:bodyPr/>
+          <a:bodyPr>
+            <a:normAutofit fontScale="90000"/>
+          </a:bodyPr>
           <a:lstStyle/>
           <a:p>
             <a:pPr eaLnBrk="1" hangingPunct="1"/>
             <a:r>
               <a:rPr lang="en-US" altLang="en-US" dirty="0"/>
-              <a:t>A Comparator</a:t>
+              <a:t>A Generic Comparator</a:t>
             </a:r>
           </a:p>
         </p:txBody>
@@ -26977,8 +26422,8 @@
         </p:blipFill>
         <p:spPr>
           <a:xfrm>
-            <a:off x="1143575" y="1942585"/>
-            <a:ext cx="3658334" cy="4640284"/>
+            <a:off x="1012000" y="2397052"/>
+            <a:ext cx="4446931" cy="3390989"/>
           </a:xfrm>
           <a:prstGeom prst="rect">
             <a:avLst/>
@@ -27001,17 +26446,12 @@
         </p:blipFill>
         <p:spPr>
           <a:xfrm>
-            <a:off x="6055633" y="951959"/>
-            <a:ext cx="5753250" cy="990626"/>
+            <a:off x="6981997" y="2524962"/>
+            <a:ext cx="4272755" cy="1567584"/>
           </a:xfrm>
           <a:prstGeom prst="rect">
             <a:avLst/>
           </a:prstGeom>
-          <a:ln>
-            <a:solidFill>
-              <a:schemeClr val="tx1"/>
-            </a:solidFill>
-          </a:ln>
         </p:spPr>
       </p:pic>
       <p:pic>
@@ -27030,53 +26470,28 @@
         </p:blipFill>
         <p:spPr>
           <a:xfrm>
-            <a:off x="7264949" y="1993940"/>
-            <a:ext cx="4173801" cy="4629392"/>
+            <a:off x="5578243" y="4928374"/>
+            <a:ext cx="881766" cy="990626"/>
           </a:xfrm>
           <a:prstGeom prst="rect">
             <a:avLst/>
           </a:prstGeom>
         </p:spPr>
       </p:pic>
-      <p:pic>
-        <p:nvPicPr>
-          <p:cNvPr id="5" name="Picture 4"/>
-          <p:cNvPicPr>
-            <a:picLocks noChangeAspect="1"/>
-          </p:cNvPicPr>
-          <p:nvPr/>
-        </p:nvPicPr>
-        <p:blipFill>
-          <a:blip r:embed="rId5"/>
-          <a:stretch>
-            <a:fillRect/>
-          </a:stretch>
-        </p:blipFill>
-        <p:spPr>
-          <a:xfrm>
-            <a:off x="5073321" y="3832313"/>
-            <a:ext cx="2122770" cy="2721500"/>
-          </a:xfrm>
-          <a:prstGeom prst="rect">
-            <a:avLst/>
-          </a:prstGeom>
-        </p:spPr>
-      </p:pic>
       <p:sp>
         <p:nvSpPr>
-          <p:cNvPr id="6" name="Rectangle 5"/>
+          <p:cNvPr id="5" name="Down Arrow 4"/>
           <p:cNvSpPr/>
           <p:nvPr/>
         </p:nvSpPr>
         <p:spPr>
-          <a:xfrm>
-            <a:off x="1331140" y="4535586"/>
-            <a:ext cx="3002145" cy="1314956"/>
-          </a:xfrm>
-          <a:prstGeom prst="rect">
+          <a:xfrm rot="3615558">
+            <a:off x="7969215" y="2898560"/>
+            <a:ext cx="288901" cy="3436370"/>
+          </a:xfrm>
+          <a:prstGeom prst="downArrow">
             <a:avLst/>
           </a:prstGeom>
-          <a:noFill/>
         </p:spPr>
         <p:style>
           <a:lnRef idx="2">
@@ -27134,19 +26549,24 @@
       </p:sp>
       <p:sp>
         <p:nvSpPr>
-          <p:cNvPr id="10" name="Rectangle 9"/>
+          <p:cNvPr id="6" name="Rectangle 5"/>
           <p:cNvSpPr/>
           <p:nvPr/>
         </p:nvSpPr>
         <p:spPr>
           <a:xfrm>
-            <a:off x="9239757" y="5458476"/>
-            <a:ext cx="2198994" cy="189765"/>
+            <a:off x="4219996" y="2397052"/>
+            <a:ext cx="1035781" cy="240952"/>
           </a:xfrm>
           <a:prstGeom prst="rect">
             <a:avLst/>
           </a:prstGeom>
           <a:noFill/>
+          <a:ln w="19050">
+            <a:solidFill>
+              <a:srgbClr val="00B0F0"/>
+            </a:solidFill>
+          </a:ln>
         </p:spPr>
         <p:style>
           <a:lnRef idx="2">
@@ -27202,83 +26622,87 @@
           </a:p>
         </p:txBody>
       </p:sp>
-      <p:cxnSp>
-        <p:nvCxnSpPr>
-          <p:cNvPr id="8" name="Straight Arrow Connector 7"/>
-          <p:cNvCxnSpPr>
-            <a:stCxn id="10" idx="3"/>
-            <a:endCxn id="3" idx="3"/>
-          </p:cNvCxnSpPr>
+      <p:sp>
+        <p:nvSpPr>
+          <p:cNvPr id="9" name="Rectangle 8"/>
+          <p:cNvSpPr/>
           <p:nvPr/>
-        </p:nvCxnSpPr>
-        <p:spPr>
-          <a:xfrm flipV="1">
-            <a:off x="11438751" y="1447272"/>
-            <a:ext cx="370132" cy="4106087"/>
-          </a:xfrm>
-          <a:prstGeom prst="straightConnector1">
+        </p:nvSpPr>
+        <p:spPr>
+          <a:xfrm>
+            <a:off x="2996750" y="4058617"/>
+            <a:ext cx="1035781" cy="240952"/>
+          </a:xfrm>
+          <a:prstGeom prst="rect">
             <a:avLst/>
           </a:prstGeom>
-          <a:ln>
-            <a:tailEnd type="triangle"/>
+          <a:noFill/>
+          <a:ln w="19050">
+            <a:solidFill>
+              <a:srgbClr val="00B0F0"/>
+            </a:solidFill>
           </a:ln>
         </p:spPr>
         <p:style>
-          <a:lnRef idx="1">
-            <a:schemeClr val="accent1"/>
+          <a:lnRef idx="2">
+            <a:schemeClr val="accent1">
+              <a:shade val="50000"/>
+            </a:schemeClr>
           </a:lnRef>
-          <a:fillRef idx="0">
+          <a:fillRef idx="1">
             <a:schemeClr val="accent1"/>
           </a:fillRef>
           <a:effectRef idx="0">
             <a:schemeClr val="accent1"/>
           </a:effectRef>
           <a:fontRef idx="minor">
-            <a:schemeClr val="tx1"/>
+            <a:schemeClr val="lt1"/>
           </a:fontRef>
         </p:style>
-      </p:cxnSp>
-      <p:cxnSp>
-        <p:nvCxnSpPr>
-          <p:cNvPr id="14" name="Elbow Connector 13"/>
-          <p:cNvCxnSpPr/>
-          <p:nvPr/>
-        </p:nvCxnSpPr>
-        <p:spPr>
-          <a:xfrm rot="10800000" flipV="1">
-            <a:off x="4333286" y="4288779"/>
-            <a:ext cx="4450619" cy="926538"/>
-          </a:xfrm>
-          <a:prstGeom prst="bentConnector3">
-            <a:avLst>
-              <a:gd name="adj1" fmla="val 87727"/>
-            </a:avLst>
-          </a:prstGeom>
-          <a:ln>
-            <a:tailEnd type="triangle"/>
-          </a:ln>
-        </p:spPr>
-        <p:style>
-          <a:lnRef idx="1">
-            <a:schemeClr val="accent1"/>
-          </a:lnRef>
-          <a:fillRef idx="0">
-            <a:schemeClr val="accent1"/>
-          </a:fillRef>
-          <a:effectRef idx="0">
-            <a:schemeClr val="accent1"/>
-          </a:effectRef>
-          <a:fontRef idx="minor">
-            <a:schemeClr val="tx1"/>
-          </a:fontRef>
-        </p:style>
-      </p:cxnSp>
+        <p:txBody>
+          <a:bodyPr rtlCol="0" anchor="ctr"/>
+          <a:lstStyle/>
+          <a:p>
+            <a:pPr marL="0" marR="0" lvl="0" indent="0" algn="ctr" defTabSz="914400" rtl="0" eaLnBrk="1" fontAlgn="auto" latinLnBrk="0" hangingPunct="1">
+              <a:lnSpc>
+                <a:spcPct val="100000"/>
+              </a:lnSpc>
+              <a:spcBef>
+                <a:spcPts val="0"/>
+              </a:spcBef>
+              <a:spcAft>
+                <a:spcPts val="0"/>
+              </a:spcAft>
+              <a:buClrTx/>
+              <a:buSzTx/>
+              <a:buFontTx/>
+              <a:buNone/>
+              <a:tabLst/>
+              <a:defRPr/>
+            </a:pPr>
+            <a:endParaRPr kumimoji="0" lang="en-US" sz="1800" b="0" i="0" u="none" strike="noStrike" kern="1200" cap="none" spc="0" normalizeH="0" baseline="0" noProof="0">
+              <a:ln>
+                <a:noFill/>
+              </a:ln>
+              <a:solidFill>
+                <a:srgbClr val="FFFFFF"/>
+              </a:solidFill>
+              <a:effectLst/>
+              <a:uLnTx/>
+              <a:uFillTx/>
+              <a:latin typeface="Arial" panose="020B0604020202020204"/>
+              <a:ea typeface="+mn-ea"/>
+              <a:cs typeface="+mn-cs"/>
+            </a:endParaRPr>
+          </a:p>
+        </p:txBody>
+      </p:sp>
       <p:sp>
         <p:nvSpPr>
           <p:cNvPr id="7" name="Content Placeholder 2">
             <a:extLst>
               <a:ext uri="{FF2B5EF4-FFF2-40B4-BE49-F238E27FC236}">
-                <a16:creationId xmlns:a16="http://schemas.microsoft.com/office/drawing/2014/main" id="{4AEF813C-E41E-0E39-8FA4-14D9F04BD2A5}"/>
+                <a16:creationId xmlns:a16="http://schemas.microsoft.com/office/drawing/2014/main" id="{A26D8104-BFA5-C3D9-7C6A-130708316EC1}"/>
               </a:ext>
             </a:extLst>
           </p:cNvPr>
@@ -27538,72 +26962,7 @@
                 <a:latin typeface="Arial Narrow" panose="020B0604020202020204" pitchFamily="34" charset="0"/>
                 <a:ea typeface="+mn-ea"/>
               </a:rPr>
-              <a:t>.H_ComparisonDemo3”</a:t>
-            </a:r>
-          </a:p>
-        </p:txBody>
-      </p:sp>
-      <p:sp>
-        <p:nvSpPr>
-          <p:cNvPr id="9" name="TextBox 8">
-            <a:extLst>
-              <a:ext uri="{FF2B5EF4-FFF2-40B4-BE49-F238E27FC236}">
-                <a16:creationId xmlns:a16="http://schemas.microsoft.com/office/drawing/2014/main" id="{D372A809-E0CB-70A5-8888-D6D1BC83FCF5}"/>
-              </a:ext>
-            </a:extLst>
-          </p:cNvPr>
-          <p:cNvSpPr txBox="1"/>
-          <p:nvPr/>
-        </p:nvSpPr>
-        <p:spPr>
-          <a:xfrm rot="16498546">
-            <a:off x="10229975" y="3600640"/>
-            <a:ext cx="2529860" cy="307777"/>
-          </a:xfrm>
-          <a:prstGeom prst="rect">
-            <a:avLst/>
-          </a:prstGeom>
-          <a:noFill/>
-        </p:spPr>
-        <p:txBody>
-          <a:bodyPr wrap="none" rtlCol="0">
-            <a:spAutoFit/>
-          </a:bodyPr>
-          <a:lstStyle/>
-          <a:p>
-            <a:pPr marL="0" marR="0" lvl="0" indent="0" algn="ctr" defTabSz="914400" rtl="0" eaLnBrk="1" fontAlgn="auto" latinLnBrk="0" hangingPunct="1">
-              <a:lnSpc>
-                <a:spcPct val="100000"/>
-              </a:lnSpc>
-              <a:spcBef>
-                <a:spcPts val="0"/>
-              </a:spcBef>
-              <a:spcAft>
-                <a:spcPts val="0"/>
-              </a:spcAft>
-              <a:buClrTx/>
-              <a:buSzTx/>
-              <a:buFontTx/>
-              <a:buNone/>
-              <a:tabLst/>
-              <a:defRPr/>
-            </a:pPr>
-            <a:r>
-              <a:rPr kumimoji="0" lang="en-US" sz="1400" b="1" i="0" u="none" strike="noStrike" kern="1200" cap="none" spc="0" normalizeH="0" baseline="0" noProof="0" dirty="0">
-                <a:ln>
-                  <a:noFill/>
-                </a:ln>
-                <a:solidFill>
-                  <a:srgbClr val="FF0000"/>
-                </a:solidFill>
-                <a:effectLst/>
-                <a:uLnTx/>
-                <a:uFillTx/>
-                <a:latin typeface="Arial" panose="020B0604020202020204"/>
-                <a:ea typeface="+mn-ea"/>
-                <a:cs typeface="+mn-cs"/>
-              </a:rPr>
-              <a:t>Sort by delivering an object</a:t>
+              <a:t>.G_ComparisonDemo2”</a:t>
             </a:r>
           </a:p>
         </p:txBody>
@@ -27611,7 +26970,7 @@
     </p:spTree>
     <p:extLst>
       <p:ext uri="{BB962C8B-B14F-4D97-AF65-F5344CB8AC3E}">
-        <p14:creationId xmlns:p14="http://schemas.microsoft.com/office/powerpoint/2010/main" val="3630884746"/>
+        <p14:creationId xmlns:p14="http://schemas.microsoft.com/office/powerpoint/2010/main" val="1584346581"/>
       </p:ext>
     </p:extLst>
   </p:cSld>
@@ -28477,6 +27836,711 @@
       </p:grpSpPr>
       <p:sp>
         <p:nvSpPr>
+          <p:cNvPr id="13314" name="Title 1"/>
+          <p:cNvSpPr>
+            <a:spLocks noGrp="1"/>
+          </p:cNvSpPr>
+          <p:nvPr>
+            <p:ph type="title"/>
+          </p:nvPr>
+        </p:nvSpPr>
+        <p:spPr>
+          <a:xfrm>
+            <a:off x="936516" y="810201"/>
+            <a:ext cx="3441275" cy="686825"/>
+          </a:xfrm>
+        </p:spPr>
+        <p:txBody>
+          <a:bodyPr/>
+          <a:lstStyle/>
+          <a:p>
+            <a:pPr eaLnBrk="1" hangingPunct="1"/>
+            <a:r>
+              <a:rPr lang="en-US" altLang="en-US" dirty="0"/>
+              <a:t>A Comparator</a:t>
+            </a:r>
+          </a:p>
+        </p:txBody>
+      </p:sp>
+      <p:pic>
+        <p:nvPicPr>
+          <p:cNvPr id="2" name="Picture 1"/>
+          <p:cNvPicPr>
+            <a:picLocks noChangeAspect="1"/>
+          </p:cNvPicPr>
+          <p:nvPr/>
+        </p:nvPicPr>
+        <p:blipFill>
+          <a:blip r:embed="rId2"/>
+          <a:stretch>
+            <a:fillRect/>
+          </a:stretch>
+        </p:blipFill>
+        <p:spPr>
+          <a:xfrm>
+            <a:off x="1143575" y="1942585"/>
+            <a:ext cx="3658334" cy="4640284"/>
+          </a:xfrm>
+          <a:prstGeom prst="rect">
+            <a:avLst/>
+          </a:prstGeom>
+        </p:spPr>
+      </p:pic>
+      <p:pic>
+        <p:nvPicPr>
+          <p:cNvPr id="3" name="Picture 2"/>
+          <p:cNvPicPr>
+            <a:picLocks noChangeAspect="1"/>
+          </p:cNvPicPr>
+          <p:nvPr/>
+        </p:nvPicPr>
+        <p:blipFill>
+          <a:blip r:embed="rId3"/>
+          <a:stretch>
+            <a:fillRect/>
+          </a:stretch>
+        </p:blipFill>
+        <p:spPr>
+          <a:xfrm>
+            <a:off x="6055633" y="951959"/>
+            <a:ext cx="5753250" cy="990626"/>
+          </a:xfrm>
+          <a:prstGeom prst="rect">
+            <a:avLst/>
+          </a:prstGeom>
+          <a:ln>
+            <a:solidFill>
+              <a:schemeClr val="tx1"/>
+            </a:solidFill>
+          </a:ln>
+        </p:spPr>
+      </p:pic>
+      <p:pic>
+        <p:nvPicPr>
+          <p:cNvPr id="4" name="Picture 3"/>
+          <p:cNvPicPr>
+            <a:picLocks noChangeAspect="1"/>
+          </p:cNvPicPr>
+          <p:nvPr/>
+        </p:nvPicPr>
+        <p:blipFill>
+          <a:blip r:embed="rId4"/>
+          <a:stretch>
+            <a:fillRect/>
+          </a:stretch>
+        </p:blipFill>
+        <p:spPr>
+          <a:xfrm>
+            <a:off x="7264949" y="1993940"/>
+            <a:ext cx="4173801" cy="4629392"/>
+          </a:xfrm>
+          <a:prstGeom prst="rect">
+            <a:avLst/>
+          </a:prstGeom>
+        </p:spPr>
+      </p:pic>
+      <p:pic>
+        <p:nvPicPr>
+          <p:cNvPr id="5" name="Picture 4"/>
+          <p:cNvPicPr>
+            <a:picLocks noChangeAspect="1"/>
+          </p:cNvPicPr>
+          <p:nvPr/>
+        </p:nvPicPr>
+        <p:blipFill>
+          <a:blip r:embed="rId5"/>
+          <a:stretch>
+            <a:fillRect/>
+          </a:stretch>
+        </p:blipFill>
+        <p:spPr>
+          <a:xfrm>
+            <a:off x="5073321" y="3832313"/>
+            <a:ext cx="2122770" cy="2721500"/>
+          </a:xfrm>
+          <a:prstGeom prst="rect">
+            <a:avLst/>
+          </a:prstGeom>
+        </p:spPr>
+      </p:pic>
+      <p:sp>
+        <p:nvSpPr>
+          <p:cNvPr id="6" name="Rectangle 5"/>
+          <p:cNvSpPr/>
+          <p:nvPr/>
+        </p:nvSpPr>
+        <p:spPr>
+          <a:xfrm>
+            <a:off x="1331140" y="4535586"/>
+            <a:ext cx="3002145" cy="1314956"/>
+          </a:xfrm>
+          <a:prstGeom prst="rect">
+            <a:avLst/>
+          </a:prstGeom>
+          <a:noFill/>
+        </p:spPr>
+        <p:style>
+          <a:lnRef idx="2">
+            <a:schemeClr val="accent1">
+              <a:shade val="50000"/>
+            </a:schemeClr>
+          </a:lnRef>
+          <a:fillRef idx="1">
+            <a:schemeClr val="accent1"/>
+          </a:fillRef>
+          <a:effectRef idx="0">
+            <a:schemeClr val="accent1"/>
+          </a:effectRef>
+          <a:fontRef idx="minor">
+            <a:schemeClr val="lt1"/>
+          </a:fontRef>
+        </p:style>
+        <p:txBody>
+          <a:bodyPr rtlCol="0" anchor="ctr"/>
+          <a:lstStyle/>
+          <a:p>
+            <a:pPr marL="0" marR="0" lvl="0" indent="0" algn="ctr" defTabSz="914400" rtl="0" eaLnBrk="1" fontAlgn="auto" latinLnBrk="0" hangingPunct="1">
+              <a:lnSpc>
+                <a:spcPct val="100000"/>
+              </a:lnSpc>
+              <a:spcBef>
+                <a:spcPts val="0"/>
+              </a:spcBef>
+              <a:spcAft>
+                <a:spcPts val="0"/>
+              </a:spcAft>
+              <a:buClrTx/>
+              <a:buSzTx/>
+              <a:buFontTx/>
+              <a:buNone/>
+              <a:tabLst/>
+              <a:defRPr/>
+            </a:pPr>
+            <a:endParaRPr kumimoji="0" lang="en-US" sz="1800" b="0" i="0" u="none" strike="noStrike" kern="1200" cap="none" spc="0" normalizeH="0" baseline="0" noProof="0">
+              <a:ln>
+                <a:noFill/>
+              </a:ln>
+              <a:solidFill>
+                <a:srgbClr val="FFFFFF"/>
+              </a:solidFill>
+              <a:effectLst/>
+              <a:uLnTx/>
+              <a:uFillTx/>
+              <a:latin typeface="Arial" panose="020B0604020202020204"/>
+              <a:ea typeface="+mn-ea"/>
+              <a:cs typeface="+mn-cs"/>
+            </a:endParaRPr>
+          </a:p>
+        </p:txBody>
+      </p:sp>
+      <p:sp>
+        <p:nvSpPr>
+          <p:cNvPr id="10" name="Rectangle 9"/>
+          <p:cNvSpPr/>
+          <p:nvPr/>
+        </p:nvSpPr>
+        <p:spPr>
+          <a:xfrm>
+            <a:off x="9239757" y="5458476"/>
+            <a:ext cx="2198994" cy="189765"/>
+          </a:xfrm>
+          <a:prstGeom prst="rect">
+            <a:avLst/>
+          </a:prstGeom>
+          <a:noFill/>
+        </p:spPr>
+        <p:style>
+          <a:lnRef idx="2">
+            <a:schemeClr val="accent1">
+              <a:shade val="50000"/>
+            </a:schemeClr>
+          </a:lnRef>
+          <a:fillRef idx="1">
+            <a:schemeClr val="accent1"/>
+          </a:fillRef>
+          <a:effectRef idx="0">
+            <a:schemeClr val="accent1"/>
+          </a:effectRef>
+          <a:fontRef idx="minor">
+            <a:schemeClr val="lt1"/>
+          </a:fontRef>
+        </p:style>
+        <p:txBody>
+          <a:bodyPr rtlCol="0" anchor="ctr"/>
+          <a:lstStyle/>
+          <a:p>
+            <a:pPr marL="0" marR="0" lvl="0" indent="0" algn="ctr" defTabSz="914400" rtl="0" eaLnBrk="1" fontAlgn="auto" latinLnBrk="0" hangingPunct="1">
+              <a:lnSpc>
+                <a:spcPct val="100000"/>
+              </a:lnSpc>
+              <a:spcBef>
+                <a:spcPts val="0"/>
+              </a:spcBef>
+              <a:spcAft>
+                <a:spcPts val="0"/>
+              </a:spcAft>
+              <a:buClrTx/>
+              <a:buSzTx/>
+              <a:buFontTx/>
+              <a:buNone/>
+              <a:tabLst/>
+              <a:defRPr/>
+            </a:pPr>
+            <a:endParaRPr kumimoji="0" lang="en-US" sz="1800" b="0" i="0" u="none" strike="noStrike" kern="1200" cap="none" spc="0" normalizeH="0" baseline="0" noProof="0">
+              <a:ln>
+                <a:noFill/>
+              </a:ln>
+              <a:solidFill>
+                <a:srgbClr val="FFFFFF"/>
+              </a:solidFill>
+              <a:effectLst/>
+              <a:uLnTx/>
+              <a:uFillTx/>
+              <a:latin typeface="Arial" panose="020B0604020202020204"/>
+              <a:ea typeface="+mn-ea"/>
+              <a:cs typeface="+mn-cs"/>
+            </a:endParaRPr>
+          </a:p>
+        </p:txBody>
+      </p:sp>
+      <p:cxnSp>
+        <p:nvCxnSpPr>
+          <p:cNvPr id="8" name="Straight Arrow Connector 7"/>
+          <p:cNvCxnSpPr>
+            <a:stCxn id="10" idx="3"/>
+            <a:endCxn id="3" idx="3"/>
+          </p:cNvCxnSpPr>
+          <p:nvPr/>
+        </p:nvCxnSpPr>
+        <p:spPr>
+          <a:xfrm flipV="1">
+            <a:off x="11438751" y="1447272"/>
+            <a:ext cx="370132" cy="4106087"/>
+          </a:xfrm>
+          <a:prstGeom prst="straightConnector1">
+            <a:avLst/>
+          </a:prstGeom>
+          <a:ln>
+            <a:tailEnd type="triangle"/>
+          </a:ln>
+        </p:spPr>
+        <p:style>
+          <a:lnRef idx="1">
+            <a:schemeClr val="accent1"/>
+          </a:lnRef>
+          <a:fillRef idx="0">
+            <a:schemeClr val="accent1"/>
+          </a:fillRef>
+          <a:effectRef idx="0">
+            <a:schemeClr val="accent1"/>
+          </a:effectRef>
+          <a:fontRef idx="minor">
+            <a:schemeClr val="tx1"/>
+          </a:fontRef>
+        </p:style>
+      </p:cxnSp>
+      <p:cxnSp>
+        <p:nvCxnSpPr>
+          <p:cNvPr id="14" name="Elbow Connector 13"/>
+          <p:cNvCxnSpPr/>
+          <p:nvPr/>
+        </p:nvCxnSpPr>
+        <p:spPr>
+          <a:xfrm rot="10800000" flipV="1">
+            <a:off x="4333286" y="4288779"/>
+            <a:ext cx="4450619" cy="926538"/>
+          </a:xfrm>
+          <a:prstGeom prst="bentConnector3">
+            <a:avLst>
+              <a:gd name="adj1" fmla="val 87727"/>
+            </a:avLst>
+          </a:prstGeom>
+          <a:ln>
+            <a:tailEnd type="triangle"/>
+          </a:ln>
+        </p:spPr>
+        <p:style>
+          <a:lnRef idx="1">
+            <a:schemeClr val="accent1"/>
+          </a:lnRef>
+          <a:fillRef idx="0">
+            <a:schemeClr val="accent1"/>
+          </a:fillRef>
+          <a:effectRef idx="0">
+            <a:schemeClr val="accent1"/>
+          </a:effectRef>
+          <a:fontRef idx="minor">
+            <a:schemeClr val="tx1"/>
+          </a:fontRef>
+        </p:style>
+      </p:cxnSp>
+      <p:sp>
+        <p:nvSpPr>
+          <p:cNvPr id="7" name="Content Placeholder 2">
+            <a:extLst>
+              <a:ext uri="{FF2B5EF4-FFF2-40B4-BE49-F238E27FC236}">
+                <a16:creationId xmlns:a16="http://schemas.microsoft.com/office/drawing/2014/main" id="{4AEF813C-E41E-0E39-8FA4-14D9F04BD2A5}"/>
+              </a:ext>
+            </a:extLst>
+          </p:cNvPr>
+          <p:cNvSpPr txBox="1">
+            <a:spLocks/>
+          </p:cNvSpPr>
+          <p:nvPr/>
+        </p:nvSpPr>
+        <p:spPr>
+          <a:xfrm>
+            <a:off x="1843820" y="24771"/>
+            <a:ext cx="6289527" cy="339871"/>
+          </a:xfrm>
+          <a:prstGeom prst="rect">
+            <a:avLst/>
+          </a:prstGeom>
+          <a:ln w="28575">
+            <a:solidFill>
+              <a:srgbClr val="FF0000"/>
+            </a:solidFill>
+          </a:ln>
+        </p:spPr>
+        <p:txBody>
+          <a:bodyPr vert="horz" lIns="91440" tIns="45720" rIns="91440" bIns="45720" rtlCol="0">
+            <a:normAutofit fontScale="62500" lnSpcReduction="20000"/>
+          </a:bodyPr>
+          <a:lstStyle>
+            <a:lvl1pPr marL="228600" indent="-228600" algn="l" defTabSz="914400" rtl="0" eaLnBrk="1" latinLnBrk="0" hangingPunct="1">
+              <a:lnSpc>
+                <a:spcPct val="90000"/>
+              </a:lnSpc>
+              <a:spcBef>
+                <a:spcPts val="1000"/>
+              </a:spcBef>
+              <a:buClr>
+                <a:srgbClr val="B30738"/>
+              </a:buClr>
+              <a:buFont typeface="Arial" panose="020B0604020202020204" pitchFamily="34" charset="0"/>
+              <a:buChar char="•"/>
+              <a:defRPr sz="2600" b="0" i="0" kern="1200">
+                <a:solidFill>
+                  <a:srgbClr val="002060"/>
+                </a:solidFill>
+                <a:latin typeface="Arial Narrow" panose="020B0604020202020204" pitchFamily="34" charset="0"/>
+                <a:ea typeface="+mn-ea"/>
+                <a:cs typeface="Arial Narrow" panose="020B0604020202020204" pitchFamily="34" charset="0"/>
+              </a:defRPr>
+            </a:lvl1pPr>
+            <a:lvl2pPr marL="685800" indent="-228600" algn="l" defTabSz="914400" rtl="0" eaLnBrk="1" latinLnBrk="0" hangingPunct="1">
+              <a:lnSpc>
+                <a:spcPct val="90000"/>
+              </a:lnSpc>
+              <a:spcBef>
+                <a:spcPts val="500"/>
+              </a:spcBef>
+              <a:buClr>
+                <a:srgbClr val="B30738"/>
+              </a:buClr>
+              <a:buFont typeface="Arial" panose="020B0604020202020204" pitchFamily="34" charset="0"/>
+              <a:buChar char="•"/>
+              <a:defRPr sz="2400" b="0" i="0" kern="1200">
+                <a:solidFill>
+                  <a:schemeClr val="accent2">
+                    <a:lumMod val="75000"/>
+                  </a:schemeClr>
+                </a:solidFill>
+                <a:latin typeface="Arial Narrow" panose="020B0604020202020204" pitchFamily="34" charset="0"/>
+                <a:ea typeface="+mn-ea"/>
+                <a:cs typeface="Arial Narrow" panose="020B0604020202020204" pitchFamily="34" charset="0"/>
+              </a:defRPr>
+            </a:lvl2pPr>
+            <a:lvl3pPr marL="1143000" indent="-228600" algn="l" defTabSz="914400" rtl="0" eaLnBrk="1" latinLnBrk="0" hangingPunct="1">
+              <a:lnSpc>
+                <a:spcPct val="90000"/>
+              </a:lnSpc>
+              <a:spcBef>
+                <a:spcPts val="500"/>
+              </a:spcBef>
+              <a:buClr>
+                <a:srgbClr val="B30738"/>
+              </a:buClr>
+              <a:buFont typeface="Arial" panose="020B0604020202020204" pitchFamily="34" charset="0"/>
+              <a:buChar char="•"/>
+              <a:defRPr sz="2000" b="0" i="0" kern="1200">
+                <a:solidFill>
+                  <a:schemeClr val="tx1">
+                    <a:lumMod val="65000"/>
+                    <a:lumOff val="35000"/>
+                  </a:schemeClr>
+                </a:solidFill>
+                <a:latin typeface="Arial Narrow" panose="020B0604020202020204" pitchFamily="34" charset="0"/>
+                <a:ea typeface="+mn-ea"/>
+                <a:cs typeface="Arial Narrow" panose="020B0604020202020204" pitchFamily="34" charset="0"/>
+              </a:defRPr>
+            </a:lvl3pPr>
+            <a:lvl4pPr marL="1600200" indent="-228600" algn="l" defTabSz="914400" rtl="0" eaLnBrk="1" latinLnBrk="0" hangingPunct="1">
+              <a:lnSpc>
+                <a:spcPct val="90000"/>
+              </a:lnSpc>
+              <a:spcBef>
+                <a:spcPts val="500"/>
+              </a:spcBef>
+              <a:buClr>
+                <a:srgbClr val="B30738"/>
+              </a:buClr>
+              <a:buFont typeface="Arial" panose="020B0604020202020204" pitchFamily="34" charset="0"/>
+              <a:buChar char="•"/>
+              <a:defRPr sz="1800" b="0" i="0" kern="1200">
+                <a:solidFill>
+                  <a:schemeClr val="tx1">
+                    <a:lumMod val="65000"/>
+                    <a:lumOff val="35000"/>
+                  </a:schemeClr>
+                </a:solidFill>
+                <a:latin typeface="Arial Narrow" panose="020B0604020202020204" pitchFamily="34" charset="0"/>
+                <a:ea typeface="+mn-ea"/>
+                <a:cs typeface="Arial Narrow" panose="020B0604020202020204" pitchFamily="34" charset="0"/>
+              </a:defRPr>
+            </a:lvl4pPr>
+            <a:lvl5pPr marL="2057400" indent="-228600" algn="l" defTabSz="914400" rtl="0" eaLnBrk="1" latinLnBrk="0" hangingPunct="1">
+              <a:lnSpc>
+                <a:spcPct val="90000"/>
+              </a:lnSpc>
+              <a:spcBef>
+                <a:spcPts val="500"/>
+              </a:spcBef>
+              <a:buClr>
+                <a:srgbClr val="B30738"/>
+              </a:buClr>
+              <a:buFont typeface="Arial" panose="020B0604020202020204" pitchFamily="34" charset="0"/>
+              <a:buChar char="•"/>
+              <a:defRPr sz="1600" b="0" i="0" kern="1200">
+                <a:solidFill>
+                  <a:schemeClr val="tx1">
+                    <a:lumMod val="65000"/>
+                    <a:lumOff val="35000"/>
+                  </a:schemeClr>
+                </a:solidFill>
+                <a:latin typeface="Arial Narrow" panose="020B0604020202020204" pitchFamily="34" charset="0"/>
+                <a:ea typeface="+mn-ea"/>
+                <a:cs typeface="Arial Narrow" panose="020B0604020202020204" pitchFamily="34" charset="0"/>
+              </a:defRPr>
+            </a:lvl5pPr>
+            <a:lvl6pPr marL="2514600" indent="-228600" algn="l" defTabSz="914400" rtl="0" eaLnBrk="1" latinLnBrk="0" hangingPunct="1">
+              <a:lnSpc>
+                <a:spcPct val="90000"/>
+              </a:lnSpc>
+              <a:spcBef>
+                <a:spcPts val="500"/>
+              </a:spcBef>
+              <a:buFont typeface="Arial" panose="020B0604020202020204" pitchFamily="34" charset="0"/>
+              <a:buChar char="•"/>
+              <a:defRPr sz="1800" kern="1200">
+                <a:solidFill>
+                  <a:schemeClr val="tx1"/>
+                </a:solidFill>
+                <a:latin typeface="+mn-lt"/>
+                <a:ea typeface="+mn-ea"/>
+                <a:cs typeface="+mn-cs"/>
+              </a:defRPr>
+            </a:lvl6pPr>
+            <a:lvl7pPr marL="2971800" indent="-228600" algn="l" defTabSz="914400" rtl="0" eaLnBrk="1" latinLnBrk="0" hangingPunct="1">
+              <a:lnSpc>
+                <a:spcPct val="90000"/>
+              </a:lnSpc>
+              <a:spcBef>
+                <a:spcPts val="500"/>
+              </a:spcBef>
+              <a:buFont typeface="Arial" panose="020B0604020202020204" pitchFamily="34" charset="0"/>
+              <a:buChar char="•"/>
+              <a:defRPr sz="1800" kern="1200">
+                <a:solidFill>
+                  <a:schemeClr val="tx1"/>
+                </a:solidFill>
+                <a:latin typeface="+mn-lt"/>
+                <a:ea typeface="+mn-ea"/>
+                <a:cs typeface="+mn-cs"/>
+              </a:defRPr>
+            </a:lvl7pPr>
+            <a:lvl8pPr marL="3429000" indent="-228600" algn="l" defTabSz="914400" rtl="0" eaLnBrk="1" latinLnBrk="0" hangingPunct="1">
+              <a:lnSpc>
+                <a:spcPct val="90000"/>
+              </a:lnSpc>
+              <a:spcBef>
+                <a:spcPts val="500"/>
+              </a:spcBef>
+              <a:buFont typeface="Arial" panose="020B0604020202020204" pitchFamily="34" charset="0"/>
+              <a:buChar char="•"/>
+              <a:defRPr sz="1800" kern="1200">
+                <a:solidFill>
+                  <a:schemeClr val="tx1"/>
+                </a:solidFill>
+                <a:latin typeface="+mn-lt"/>
+                <a:ea typeface="+mn-ea"/>
+                <a:cs typeface="+mn-cs"/>
+              </a:defRPr>
+            </a:lvl8pPr>
+            <a:lvl9pPr marL="3886200" indent="-228600" algn="l" defTabSz="914400" rtl="0" eaLnBrk="1" latinLnBrk="0" hangingPunct="1">
+              <a:lnSpc>
+                <a:spcPct val="90000"/>
+              </a:lnSpc>
+              <a:spcBef>
+                <a:spcPts val="500"/>
+              </a:spcBef>
+              <a:buFont typeface="Arial" panose="020B0604020202020204" pitchFamily="34" charset="0"/>
+              <a:buChar char="•"/>
+              <a:defRPr sz="1800" kern="1200">
+                <a:solidFill>
+                  <a:schemeClr val="tx1"/>
+                </a:solidFill>
+                <a:latin typeface="+mn-lt"/>
+                <a:ea typeface="+mn-ea"/>
+                <a:cs typeface="+mn-cs"/>
+              </a:defRPr>
+            </a:lvl9pPr>
+          </a:lstStyle>
+          <a:p>
+            <a:pPr marL="0" lvl="0" indent="0" algn="ctr">
+              <a:buNone/>
+              <a:defRPr/>
+            </a:pPr>
+            <a:r>
+              <a:rPr kumimoji="0" lang="en-US" sz="2600" b="0" i="0" u="none" strike="noStrike" kern="1200" cap="none" spc="0" normalizeH="0" baseline="0" noProof="0" dirty="0">
+                <a:ln>
+                  <a:noFill/>
+                </a:ln>
+                <a:solidFill>
+                  <a:srgbClr val="C00000"/>
+                </a:solidFill>
+                <a:effectLst/>
+                <a:uLnTx/>
+                <a:uFillTx/>
+                <a:latin typeface="Arial Narrow" panose="020B0604020202020204" pitchFamily="34" charset="0"/>
+                <a:ea typeface="+mn-ea"/>
+              </a:rPr>
+              <a:t>“</a:t>
+            </a:r>
+            <a:r>
+              <a:rPr lang="en-US" dirty="0">
+                <a:solidFill>
+                  <a:srgbClr val="C00000"/>
+                </a:solidFill>
+              </a:rPr>
+              <a:t>CSEN160_05_Lecture_DataStructursAndGenerics</a:t>
+            </a:r>
+            <a:r>
+              <a:rPr kumimoji="0" lang="en-US" sz="2600" b="0" i="0" u="none" strike="noStrike" kern="1200" cap="none" spc="0" normalizeH="0" baseline="0" noProof="0" dirty="0">
+                <a:ln>
+                  <a:noFill/>
+                </a:ln>
+                <a:solidFill>
+                  <a:srgbClr val="C00000"/>
+                </a:solidFill>
+                <a:effectLst/>
+                <a:uLnTx/>
+                <a:uFillTx/>
+                <a:latin typeface="Arial Narrow" panose="020B0604020202020204" pitchFamily="34" charset="0"/>
+                <a:ea typeface="+mn-ea"/>
+              </a:rPr>
+              <a:t>.H_ComparisonDemo3”</a:t>
+            </a:r>
+          </a:p>
+        </p:txBody>
+      </p:sp>
+      <p:sp>
+        <p:nvSpPr>
+          <p:cNvPr id="9" name="TextBox 8">
+            <a:extLst>
+              <a:ext uri="{FF2B5EF4-FFF2-40B4-BE49-F238E27FC236}">
+                <a16:creationId xmlns:a16="http://schemas.microsoft.com/office/drawing/2014/main" id="{D372A809-E0CB-70A5-8888-D6D1BC83FCF5}"/>
+              </a:ext>
+            </a:extLst>
+          </p:cNvPr>
+          <p:cNvSpPr txBox="1"/>
+          <p:nvPr/>
+        </p:nvSpPr>
+        <p:spPr>
+          <a:xfrm rot="16498546">
+            <a:off x="10229975" y="3600640"/>
+            <a:ext cx="2529860" cy="307777"/>
+          </a:xfrm>
+          <a:prstGeom prst="rect">
+            <a:avLst/>
+          </a:prstGeom>
+          <a:noFill/>
+        </p:spPr>
+        <p:txBody>
+          <a:bodyPr wrap="none" rtlCol="0">
+            <a:spAutoFit/>
+          </a:bodyPr>
+          <a:lstStyle/>
+          <a:p>
+            <a:pPr marL="0" marR="0" lvl="0" indent="0" algn="ctr" defTabSz="914400" rtl="0" eaLnBrk="1" fontAlgn="auto" latinLnBrk="0" hangingPunct="1">
+              <a:lnSpc>
+                <a:spcPct val="100000"/>
+              </a:lnSpc>
+              <a:spcBef>
+                <a:spcPts val="0"/>
+              </a:spcBef>
+              <a:spcAft>
+                <a:spcPts val="0"/>
+              </a:spcAft>
+              <a:buClrTx/>
+              <a:buSzTx/>
+              <a:buFontTx/>
+              <a:buNone/>
+              <a:tabLst/>
+              <a:defRPr/>
+            </a:pPr>
+            <a:r>
+              <a:rPr kumimoji="0" lang="en-US" sz="1400" b="1" i="0" u="none" strike="noStrike" kern="1200" cap="none" spc="0" normalizeH="0" baseline="0" noProof="0" dirty="0">
+                <a:ln>
+                  <a:noFill/>
+                </a:ln>
+                <a:solidFill>
+                  <a:srgbClr val="FF0000"/>
+                </a:solidFill>
+                <a:effectLst/>
+                <a:uLnTx/>
+                <a:uFillTx/>
+                <a:latin typeface="Arial" panose="020B0604020202020204"/>
+                <a:ea typeface="+mn-ea"/>
+                <a:cs typeface="+mn-cs"/>
+              </a:rPr>
+              <a:t>Sort by delivering an object</a:t>
+            </a:r>
+          </a:p>
+        </p:txBody>
+      </p:sp>
+    </p:spTree>
+    <p:extLst>
+      <p:ext uri="{BB962C8B-B14F-4D97-AF65-F5344CB8AC3E}">
+        <p14:creationId xmlns:p14="http://schemas.microsoft.com/office/powerpoint/2010/main" val="3630884746"/>
+      </p:ext>
+    </p:extLst>
+  </p:cSld>
+  <p:clrMapOvr>
+    <a:masterClrMapping/>
+  </p:clrMapOvr>
+</p:sld>
+</file>
+
+<file path=ppt/slides/slide51.xml><?xml version="1.0" encoding="utf-8"?>
+<p:sld xmlns:a="http://schemas.openxmlformats.org/drawingml/2006/main" xmlns:r="http://schemas.openxmlformats.org/officeDocument/2006/relationships" xmlns:p="http://schemas.openxmlformats.org/presentationml/2006/main">
+  <p:cSld>
+    <p:spTree>
+      <p:nvGrpSpPr>
+        <p:cNvPr id="1" name=""/>
+        <p:cNvGrpSpPr/>
+        <p:nvPr/>
+      </p:nvGrpSpPr>
+      <p:grpSpPr>
+        <a:xfrm>
+          <a:off x="0" y="0"/>
+          <a:ext cx="0" cy="0"/>
+          <a:chOff x="0" y="0"/>
+          <a:chExt cx="0" cy="0"/>
+        </a:xfrm>
+      </p:grpSpPr>
+      <p:sp>
+        <p:nvSpPr>
           <p:cNvPr id="2" name="Title 1"/>
           <p:cNvSpPr>
             <a:spLocks noGrp="1"/>
@@ -28710,70 +28774,6 @@
     <p:extLst>
       <p:ext uri="{BB962C8B-B14F-4D97-AF65-F5344CB8AC3E}">
         <p14:creationId xmlns:p14="http://schemas.microsoft.com/office/powerpoint/2010/main" val="596222078"/>
-      </p:ext>
-    </p:extLst>
-  </p:cSld>
-  <p:clrMapOvr>
-    <a:masterClrMapping/>
-  </p:clrMapOvr>
-</p:sld>
-</file>
-
-<file path=ppt/slides/slide51.xml><?xml version="1.0" encoding="utf-8"?>
-<p:sld xmlns:a="http://schemas.openxmlformats.org/drawingml/2006/main" xmlns:r="http://schemas.openxmlformats.org/officeDocument/2006/relationships" xmlns:p="http://schemas.openxmlformats.org/presentationml/2006/main">
-  <p:cSld>
-    <p:spTree>
-      <p:nvGrpSpPr>
-        <p:cNvPr id="1" name="">
-          <a:extLst>
-            <a:ext uri="{FF2B5EF4-FFF2-40B4-BE49-F238E27FC236}">
-              <a16:creationId xmlns:a16="http://schemas.microsoft.com/office/drawing/2014/main" id="{84DA25F2-3AE0-BDCF-0880-EDD5EEF55E54}"/>
-            </a:ext>
-          </a:extLst>
-        </p:cNvPr>
-        <p:cNvGrpSpPr/>
-        <p:nvPr/>
-      </p:nvGrpSpPr>
-      <p:grpSpPr>
-        <a:xfrm>
-          <a:off x="0" y="0"/>
-          <a:ext cx="0" cy="0"/>
-          <a:chOff x="0" y="0"/>
-          <a:chExt cx="0" cy="0"/>
-        </a:xfrm>
-      </p:grpSpPr>
-      <p:sp>
-        <p:nvSpPr>
-          <p:cNvPr id="2" name="Title 1">
-            <a:extLst>
-              <a:ext uri="{FF2B5EF4-FFF2-40B4-BE49-F238E27FC236}">
-                <a16:creationId xmlns:a16="http://schemas.microsoft.com/office/drawing/2014/main" id="{6EAE57A2-3A61-C5F8-EEFD-EA2961784338}"/>
-              </a:ext>
-            </a:extLst>
-          </p:cNvPr>
-          <p:cNvSpPr>
-            <a:spLocks noGrp="1"/>
-          </p:cNvSpPr>
-          <p:nvPr>
-            <p:ph type="ctrTitle"/>
-          </p:nvPr>
-        </p:nvSpPr>
-        <p:spPr/>
-        <p:txBody>
-          <a:bodyPr/>
-          <a:lstStyle/>
-          <a:p>
-            <a:r>
-              <a:rPr lang="en-US" dirty="0"/>
-              <a:t>… to here …</a:t>
-            </a:r>
-          </a:p>
-        </p:txBody>
-      </p:sp>
-    </p:spTree>
-    <p:extLst>
-      <p:ext uri="{BB962C8B-B14F-4D97-AF65-F5344CB8AC3E}">
-        <p14:creationId xmlns:p14="http://schemas.microsoft.com/office/powerpoint/2010/main" val="2815624037"/>
       </p:ext>
     </p:extLst>
   </p:cSld>
